--- a/docs/plots/carbo/jx_carbo_linsubhr_egfrdisc_sideeffect.pptx
+++ b/docs/plots/carbo/jx_carbo_linsubhr_egfrdisc_sideeffect.pptx
@@ -3003,479 +3003,485 @@
           <p:spPr>
             <a:xfrm>
               <a:off x="1172049" y="2073503"/>
-              <a:ext cx="7090630" cy="3356525"/>
+              <a:ext cx="7090630" cy="3335346"/>
             </a:xfrm>
             <a:custGeom>
               <a:avLst/>
               <a:pathLst>
-                <a:path w="7090630" h="3356525">
+                <a:path w="7090630" h="3335346">
                   <a:moveTo>
-                    <a:pt x="3222712" y="0"/>
+                    <a:pt x="3072822" y="0"/>
                   </a:moveTo>
                   <a:lnTo>
-                    <a:pt x="3223013" y="925"/>
-                  </a:lnTo>
-                  <a:lnTo>
-                    <a:pt x="3294636" y="207978"/>
-                  </a:lnTo>
-                  <a:lnTo>
-                    <a:pt x="3366258" y="402721"/>
-                  </a:lnTo>
-                  <a:lnTo>
-                    <a:pt x="3437881" y="585887"/>
-                  </a:lnTo>
-                  <a:lnTo>
-                    <a:pt x="3509503" y="758164"/>
-                  </a:lnTo>
-                  <a:lnTo>
-                    <a:pt x="3581126" y="920199"/>
-                  </a:lnTo>
-                  <a:lnTo>
-                    <a:pt x="3652748" y="1072601"/>
-                  </a:lnTo>
-                  <a:lnTo>
-                    <a:pt x="3724371" y="1215943"/>
-                  </a:lnTo>
-                  <a:lnTo>
-                    <a:pt x="3795993" y="1350764"/>
-                  </a:lnTo>
-                  <a:lnTo>
-                    <a:pt x="3867616" y="1477569"/>
-                  </a:lnTo>
-                  <a:lnTo>
-                    <a:pt x="3939238" y="1596835"/>
-                  </a:lnTo>
-                  <a:lnTo>
-                    <a:pt x="4010861" y="1709012"/>
-                  </a:lnTo>
-                  <a:lnTo>
-                    <a:pt x="4082483" y="1814519"/>
-                  </a:lnTo>
-                  <a:lnTo>
-                    <a:pt x="4154106" y="1913754"/>
-                  </a:lnTo>
-                  <a:lnTo>
-                    <a:pt x="4225729" y="2007090"/>
-                  </a:lnTo>
-                  <a:lnTo>
-                    <a:pt x="4297351" y="2094877"/>
-                  </a:lnTo>
-                  <a:lnTo>
-                    <a:pt x="4368974" y="2177444"/>
-                  </a:lnTo>
-                  <a:lnTo>
-                    <a:pt x="4440596" y="2255104"/>
-                  </a:lnTo>
-                  <a:lnTo>
-                    <a:pt x="4512219" y="2328146"/>
-                  </a:lnTo>
-                  <a:lnTo>
-                    <a:pt x="4583841" y="2396846"/>
-                  </a:lnTo>
-                  <a:lnTo>
-                    <a:pt x="4655464" y="2461462"/>
-                  </a:lnTo>
-                  <a:lnTo>
-                    <a:pt x="4727086" y="2522237"/>
-                  </a:lnTo>
-                  <a:lnTo>
-                    <a:pt x="4798709" y="2579398"/>
-                  </a:lnTo>
-                  <a:lnTo>
-                    <a:pt x="4870331" y="2633161"/>
-                  </a:lnTo>
-                  <a:lnTo>
-                    <a:pt x="4941954" y="2658734"/>
-                  </a:lnTo>
-                  <a:lnTo>
-                    <a:pt x="5013576" y="2666226"/>
-                  </a:lnTo>
-                  <a:lnTo>
-                    <a:pt x="5085199" y="2673651"/>
-                  </a:lnTo>
-                  <a:lnTo>
-                    <a:pt x="5156821" y="2681008"/>
-                  </a:lnTo>
-                  <a:lnTo>
-                    <a:pt x="5228444" y="2688298"/>
-                  </a:lnTo>
-                  <a:lnTo>
-                    <a:pt x="5300066" y="2695522"/>
-                  </a:lnTo>
-                  <a:lnTo>
-                    <a:pt x="5371689" y="2702681"/>
-                  </a:lnTo>
-                  <a:lnTo>
-                    <a:pt x="5443311" y="2709774"/>
-                  </a:lnTo>
-                  <a:lnTo>
-                    <a:pt x="5514934" y="2716803"/>
-                  </a:lnTo>
-                  <a:lnTo>
-                    <a:pt x="5586557" y="2723768"/>
-                  </a:lnTo>
-                  <a:lnTo>
-                    <a:pt x="5658179" y="2730670"/>
-                  </a:lnTo>
-                  <a:lnTo>
-                    <a:pt x="5729802" y="2737509"/>
-                  </a:lnTo>
-                  <a:lnTo>
-                    <a:pt x="5801424" y="2744286"/>
-                  </a:lnTo>
-                  <a:lnTo>
-                    <a:pt x="5873047" y="2751002"/>
-                  </a:lnTo>
-                  <a:lnTo>
-                    <a:pt x="5944669" y="2757657"/>
-                  </a:lnTo>
-                  <a:lnTo>
-                    <a:pt x="6016292" y="2764251"/>
-                  </a:lnTo>
-                  <a:lnTo>
-                    <a:pt x="6087914" y="2770785"/>
-                  </a:lnTo>
-                  <a:lnTo>
-                    <a:pt x="6159537" y="2777260"/>
-                  </a:lnTo>
-                  <a:lnTo>
-                    <a:pt x="6231159" y="2783676"/>
-                  </a:lnTo>
-                  <a:lnTo>
-                    <a:pt x="6302782" y="2790034"/>
-                  </a:lnTo>
-                  <a:lnTo>
-                    <a:pt x="6374404" y="2796334"/>
-                  </a:lnTo>
-                  <a:lnTo>
-                    <a:pt x="6446027" y="2802577"/>
-                  </a:lnTo>
-                  <a:lnTo>
-                    <a:pt x="6517649" y="2808763"/>
-                  </a:lnTo>
-                  <a:lnTo>
-                    <a:pt x="6589272" y="2814893"/>
-                  </a:lnTo>
-                  <a:lnTo>
-                    <a:pt x="6660894" y="2820968"/>
-                  </a:lnTo>
-                  <a:lnTo>
-                    <a:pt x="6732517" y="2826987"/>
-                  </a:lnTo>
-                  <a:lnTo>
-                    <a:pt x="6804139" y="2832951"/>
-                  </a:lnTo>
-                  <a:lnTo>
-                    <a:pt x="6875762" y="2838862"/>
-                  </a:lnTo>
-                  <a:lnTo>
-                    <a:pt x="6947385" y="2844718"/>
-                  </a:lnTo>
-                  <a:lnTo>
-                    <a:pt x="7019007" y="2850522"/>
-                  </a:lnTo>
-                  <a:lnTo>
-                    <a:pt x="7090630" y="2856273"/>
-                  </a:lnTo>
-                  <a:lnTo>
-                    <a:pt x="7090630" y="3356525"/>
-                  </a:lnTo>
-                  <a:lnTo>
-                    <a:pt x="7019007" y="3348484"/>
-                  </a:lnTo>
-                  <a:lnTo>
-                    <a:pt x="6947385" y="3339934"/>
-                  </a:lnTo>
-                  <a:lnTo>
-                    <a:pt x="6875762" y="3330844"/>
-                  </a:lnTo>
-                  <a:lnTo>
-                    <a:pt x="6804139" y="3321179"/>
-                  </a:lnTo>
-                  <a:lnTo>
-                    <a:pt x="6732517" y="3310904"/>
-                  </a:lnTo>
-                  <a:lnTo>
-                    <a:pt x="6660894" y="3299979"/>
-                  </a:lnTo>
-                  <a:lnTo>
-                    <a:pt x="6589272" y="3288364"/>
-                  </a:lnTo>
-                  <a:lnTo>
-                    <a:pt x="6517649" y="3276014"/>
-                  </a:lnTo>
-                  <a:lnTo>
-                    <a:pt x="6446027" y="3262884"/>
-                  </a:lnTo>
-                  <a:lnTo>
-                    <a:pt x="6374404" y="3248924"/>
-                  </a:lnTo>
-                  <a:lnTo>
-                    <a:pt x="6302782" y="3234081"/>
-                  </a:lnTo>
-                  <a:lnTo>
-                    <a:pt x="6231159" y="3218300"/>
-                  </a:lnTo>
-                  <a:lnTo>
-                    <a:pt x="6159537" y="3201522"/>
-                  </a:lnTo>
-                  <a:lnTo>
-                    <a:pt x="6087914" y="3183684"/>
-                  </a:lnTo>
-                  <a:lnTo>
-                    <a:pt x="6016292" y="3164717"/>
-                  </a:lnTo>
-                  <a:lnTo>
-                    <a:pt x="5944669" y="3144552"/>
-                  </a:lnTo>
-                  <a:lnTo>
-                    <a:pt x="5873047" y="3123113"/>
-                  </a:lnTo>
-                  <a:lnTo>
-                    <a:pt x="5801424" y="3100318"/>
-                  </a:lnTo>
-                  <a:lnTo>
-                    <a:pt x="5729802" y="3076083"/>
-                  </a:lnTo>
-                  <a:lnTo>
-                    <a:pt x="5658179" y="3050315"/>
-                  </a:lnTo>
-                  <a:lnTo>
-                    <a:pt x="5586557" y="3022919"/>
-                  </a:lnTo>
-                  <a:lnTo>
-                    <a:pt x="5514934" y="2993792"/>
-                  </a:lnTo>
-                  <a:lnTo>
-                    <a:pt x="5443311" y="2962823"/>
-                  </a:lnTo>
-                  <a:lnTo>
-                    <a:pt x="5371689" y="2929897"/>
-                  </a:lnTo>
-                  <a:lnTo>
-                    <a:pt x="5300066" y="2894889"/>
-                  </a:lnTo>
-                  <a:lnTo>
-                    <a:pt x="5228444" y="2857669"/>
-                  </a:lnTo>
-                  <a:lnTo>
-                    <a:pt x="5156821" y="2818097"/>
-                  </a:lnTo>
-                  <a:lnTo>
-                    <a:pt x="5085199" y="2776023"/>
-                  </a:lnTo>
-                  <a:lnTo>
-                    <a:pt x="5013576" y="2731289"/>
-                  </a:lnTo>
-                  <a:lnTo>
-                    <a:pt x="4941954" y="2683728"/>
-                  </a:lnTo>
-                  <a:lnTo>
-                    <a:pt x="4870331" y="2651172"/>
-                  </a:lnTo>
-                  <a:lnTo>
-                    <a:pt x="4798709" y="2643542"/>
-                  </a:lnTo>
-                  <a:lnTo>
-                    <a:pt x="4727086" y="2635841"/>
-                  </a:lnTo>
-                  <a:lnTo>
-                    <a:pt x="4655464" y="2628070"/>
-                  </a:lnTo>
-                  <a:lnTo>
-                    <a:pt x="4583841" y="2620228"/>
-                  </a:lnTo>
-                  <a:lnTo>
-                    <a:pt x="4512219" y="2612314"/>
-                  </a:lnTo>
-                  <a:lnTo>
-                    <a:pt x="4440596" y="2604327"/>
-                  </a:lnTo>
-                  <a:lnTo>
-                    <a:pt x="4368974" y="2596268"/>
-                  </a:lnTo>
-                  <a:lnTo>
-                    <a:pt x="4297351" y="2588134"/>
-                  </a:lnTo>
-                  <a:lnTo>
-                    <a:pt x="4225729" y="2579926"/>
-                  </a:lnTo>
-                  <a:lnTo>
-                    <a:pt x="4154106" y="2571642"/>
-                  </a:lnTo>
-                  <a:lnTo>
-                    <a:pt x="4082483" y="2563283"/>
-                  </a:lnTo>
-                  <a:lnTo>
-                    <a:pt x="4010861" y="2554847"/>
-                  </a:lnTo>
-                  <a:lnTo>
-                    <a:pt x="3939238" y="2546333"/>
-                  </a:lnTo>
-                  <a:lnTo>
-                    <a:pt x="3867616" y="2537742"/>
-                  </a:lnTo>
-                  <a:lnTo>
-                    <a:pt x="3795993" y="2529072"/>
-                  </a:lnTo>
-                  <a:lnTo>
-                    <a:pt x="3724371" y="2520322"/>
-                  </a:lnTo>
-                  <a:lnTo>
-                    <a:pt x="3652748" y="2511492"/>
-                  </a:lnTo>
-                  <a:lnTo>
-                    <a:pt x="3581126" y="2502582"/>
-                  </a:lnTo>
-                  <a:lnTo>
-                    <a:pt x="3509503" y="2493589"/>
-                  </a:lnTo>
-                  <a:lnTo>
-                    <a:pt x="3437881" y="2484515"/>
-                  </a:lnTo>
-                  <a:lnTo>
-                    <a:pt x="3366258" y="2475357"/>
-                  </a:lnTo>
-                  <a:lnTo>
-                    <a:pt x="3294636" y="2466115"/>
-                  </a:lnTo>
-                  <a:lnTo>
-                    <a:pt x="3223013" y="2456788"/>
-                  </a:lnTo>
-                  <a:lnTo>
-                    <a:pt x="3151391" y="2447376"/>
-                  </a:lnTo>
-                  <a:lnTo>
-                    <a:pt x="3079768" y="2437878"/>
-                  </a:lnTo>
-                  <a:lnTo>
-                    <a:pt x="3008146" y="2428293"/>
-                  </a:lnTo>
-                  <a:lnTo>
-                    <a:pt x="2936523" y="2418619"/>
-                  </a:lnTo>
-                  <a:lnTo>
-                    <a:pt x="2864901" y="2408858"/>
-                  </a:lnTo>
-                  <a:lnTo>
-                    <a:pt x="2793278" y="2399006"/>
-                  </a:lnTo>
-                  <a:lnTo>
-                    <a:pt x="2721655" y="2389065"/>
-                  </a:lnTo>
-                  <a:lnTo>
-                    <a:pt x="2650033" y="2379032"/>
-                  </a:lnTo>
-                  <a:lnTo>
-                    <a:pt x="2578410" y="2368907"/>
-                  </a:lnTo>
-                  <a:lnTo>
-                    <a:pt x="2506788" y="2358690"/>
-                  </a:lnTo>
-                  <a:lnTo>
-                    <a:pt x="2435165" y="2348379"/>
-                  </a:lnTo>
-                  <a:lnTo>
-                    <a:pt x="2363543" y="2337973"/>
-                  </a:lnTo>
-                  <a:lnTo>
-                    <a:pt x="2291920" y="2327472"/>
-                  </a:lnTo>
-                  <a:lnTo>
-                    <a:pt x="2220298" y="2316875"/>
-                  </a:lnTo>
-                  <a:lnTo>
-                    <a:pt x="2148675" y="2306180"/>
-                  </a:lnTo>
-                  <a:lnTo>
-                    <a:pt x="2077053" y="2295388"/>
-                  </a:lnTo>
-                  <a:lnTo>
-                    <a:pt x="2005430" y="2284497"/>
-                  </a:lnTo>
-                  <a:lnTo>
-                    <a:pt x="1933808" y="2273506"/>
-                  </a:lnTo>
-                  <a:lnTo>
-                    <a:pt x="1862185" y="2262414"/>
-                  </a:lnTo>
-                  <a:lnTo>
-                    <a:pt x="1790563" y="2251220"/>
-                  </a:lnTo>
-                  <a:lnTo>
-                    <a:pt x="1718940" y="2239924"/>
-                  </a:lnTo>
-                  <a:lnTo>
-                    <a:pt x="1647318" y="2228525"/>
-                  </a:lnTo>
-                  <a:lnTo>
-                    <a:pt x="1575695" y="2217021"/>
-                  </a:lnTo>
-                  <a:lnTo>
-                    <a:pt x="1504073" y="2205411"/>
-                  </a:lnTo>
-                  <a:lnTo>
-                    <a:pt x="1432450" y="2193695"/>
-                  </a:lnTo>
-                  <a:lnTo>
-                    <a:pt x="1360827" y="2181872"/>
-                  </a:lnTo>
-                  <a:lnTo>
-                    <a:pt x="1289205" y="2169940"/>
-                  </a:lnTo>
-                  <a:lnTo>
-                    <a:pt x="1217582" y="2157899"/>
-                  </a:lnTo>
-                  <a:lnTo>
-                    <a:pt x="1145960" y="2145748"/>
-                  </a:lnTo>
-                  <a:lnTo>
-                    <a:pt x="1074337" y="2133485"/>
-                  </a:lnTo>
-                  <a:lnTo>
-                    <a:pt x="1002715" y="2121110"/>
-                  </a:lnTo>
-                  <a:lnTo>
-                    <a:pt x="931092" y="2108622"/>
-                  </a:lnTo>
-                  <a:lnTo>
-                    <a:pt x="859470" y="2096019"/>
-                  </a:lnTo>
-                  <a:lnTo>
-                    <a:pt x="787847" y="2083300"/>
-                  </a:lnTo>
-                  <a:lnTo>
-                    <a:pt x="716225" y="2070465"/>
-                  </a:lnTo>
-                  <a:lnTo>
-                    <a:pt x="644602" y="2057512"/>
-                  </a:lnTo>
-                  <a:lnTo>
-                    <a:pt x="572980" y="2044441"/>
-                  </a:lnTo>
-                  <a:lnTo>
-                    <a:pt x="501357" y="2031250"/>
-                  </a:lnTo>
-                  <a:lnTo>
-                    <a:pt x="429735" y="2017938"/>
-                  </a:lnTo>
-                  <a:lnTo>
-                    <a:pt x="358112" y="2004504"/>
-                  </a:lnTo>
-                  <a:lnTo>
-                    <a:pt x="286490" y="1990946"/>
-                  </a:lnTo>
-                  <a:lnTo>
-                    <a:pt x="214867" y="1977265"/>
-                  </a:lnTo>
-                  <a:lnTo>
-                    <a:pt x="143245" y="1963458"/>
-                  </a:lnTo>
-                  <a:lnTo>
-                    <a:pt x="71622" y="1949525"/>
-                  </a:lnTo>
-                  <a:lnTo>
-                    <a:pt x="0" y="1935464"/>
+                    <a:pt x="3079768" y="19442"/>
+                  </a:lnTo>
+                  <a:lnTo>
+                    <a:pt x="3151391" y="208951"/>
+                  </a:lnTo>
+                  <a:lnTo>
+                    <a:pt x="3223013" y="388092"/>
+                  </a:lnTo>
+                  <a:lnTo>
+                    <a:pt x="3294636" y="557435"/>
+                  </a:lnTo>
+                  <a:lnTo>
+                    <a:pt x="3366258" y="717513"/>
+                  </a:lnTo>
+                  <a:lnTo>
+                    <a:pt x="3437881" y="868835"/>
+                  </a:lnTo>
+                  <a:lnTo>
+                    <a:pt x="3509503" y="1011879"/>
+                  </a:lnTo>
+                  <a:lnTo>
+                    <a:pt x="3581126" y="1147098"/>
+                  </a:lnTo>
+                  <a:lnTo>
+                    <a:pt x="3652748" y="1274920"/>
+                  </a:lnTo>
+                  <a:lnTo>
+                    <a:pt x="3724371" y="1395750"/>
+                  </a:lnTo>
+                  <a:lnTo>
+                    <a:pt x="3795993" y="1509970"/>
+                  </a:lnTo>
+                  <a:lnTo>
+                    <a:pt x="3867616" y="1617942"/>
+                  </a:lnTo>
+                  <a:lnTo>
+                    <a:pt x="3939238" y="1720007"/>
+                  </a:lnTo>
+                  <a:lnTo>
+                    <a:pt x="4010861" y="1816489"/>
+                  </a:lnTo>
+                  <a:lnTo>
+                    <a:pt x="4082483" y="1907694"/>
+                  </a:lnTo>
+                  <a:lnTo>
+                    <a:pt x="4154106" y="1993909"/>
+                  </a:lnTo>
+                  <a:lnTo>
+                    <a:pt x="4225729" y="2075408"/>
+                  </a:lnTo>
+                  <a:lnTo>
+                    <a:pt x="4297351" y="2152448"/>
+                  </a:lnTo>
+                  <a:lnTo>
+                    <a:pt x="4368974" y="2225275"/>
+                  </a:lnTo>
+                  <a:lnTo>
+                    <a:pt x="4440596" y="2294117"/>
+                  </a:lnTo>
+                  <a:lnTo>
+                    <a:pt x="4512219" y="2359194"/>
+                  </a:lnTo>
+                  <a:lnTo>
+                    <a:pt x="4583841" y="2420710"/>
+                  </a:lnTo>
+                  <a:lnTo>
+                    <a:pt x="4655464" y="2478862"/>
+                  </a:lnTo>
+                  <a:lnTo>
+                    <a:pt x="4727086" y="2533832"/>
+                  </a:lnTo>
+                  <a:lnTo>
+                    <a:pt x="4798709" y="2585795"/>
+                  </a:lnTo>
+                  <a:lnTo>
+                    <a:pt x="4870331" y="2634916"/>
+                  </a:lnTo>
+                  <a:lnTo>
+                    <a:pt x="4941954" y="2654490"/>
+                  </a:lnTo>
+                  <a:lnTo>
+                    <a:pt x="5013576" y="2654841"/>
+                  </a:lnTo>
+                  <a:lnTo>
+                    <a:pt x="5085199" y="2655192"/>
+                  </a:lnTo>
+                  <a:lnTo>
+                    <a:pt x="5156821" y="2655543"/>
+                  </a:lnTo>
+                  <a:lnTo>
+                    <a:pt x="5228444" y="2655894"/>
+                  </a:lnTo>
+                  <a:lnTo>
+                    <a:pt x="5300066" y="2656245"/>
+                  </a:lnTo>
+                  <a:lnTo>
+                    <a:pt x="5371689" y="2656595"/>
+                  </a:lnTo>
+                  <a:lnTo>
+                    <a:pt x="5443311" y="2656946"/>
+                  </a:lnTo>
+                  <a:lnTo>
+                    <a:pt x="5514934" y="2657296"/>
+                  </a:lnTo>
+                  <a:lnTo>
+                    <a:pt x="5586557" y="2657646"/>
+                  </a:lnTo>
+                  <a:lnTo>
+                    <a:pt x="5658179" y="2657996"/>
+                  </a:lnTo>
+                  <a:lnTo>
+                    <a:pt x="5729802" y="2658346"/>
+                  </a:lnTo>
+                  <a:lnTo>
+                    <a:pt x="5801424" y="2658695"/>
+                  </a:lnTo>
+                  <a:lnTo>
+                    <a:pt x="5873047" y="2659045"/>
+                  </a:lnTo>
+                  <a:lnTo>
+                    <a:pt x="5944669" y="2659394"/>
+                  </a:lnTo>
+                  <a:lnTo>
+                    <a:pt x="6016292" y="2659743"/>
+                  </a:lnTo>
+                  <a:lnTo>
+                    <a:pt x="6087914" y="2660092"/>
+                  </a:lnTo>
+                  <a:lnTo>
+                    <a:pt x="6159537" y="2660441"/>
+                  </a:lnTo>
+                  <a:lnTo>
+                    <a:pt x="6231159" y="2660790"/>
+                  </a:lnTo>
+                  <a:lnTo>
+                    <a:pt x="6302782" y="2661139"/>
+                  </a:lnTo>
+                  <a:lnTo>
+                    <a:pt x="6374404" y="2661487"/>
+                  </a:lnTo>
+                  <a:lnTo>
+                    <a:pt x="6446027" y="2661835"/>
+                  </a:lnTo>
+                  <a:lnTo>
+                    <a:pt x="6517649" y="2662184"/>
+                  </a:lnTo>
+                  <a:lnTo>
+                    <a:pt x="6589272" y="2662532"/>
+                  </a:lnTo>
+                  <a:lnTo>
+                    <a:pt x="6660894" y="2662879"/>
+                  </a:lnTo>
+                  <a:lnTo>
+                    <a:pt x="6732517" y="2663227"/>
+                  </a:lnTo>
+                  <a:lnTo>
+                    <a:pt x="6804139" y="2663575"/>
+                  </a:lnTo>
+                  <a:lnTo>
+                    <a:pt x="6875762" y="2663922"/>
+                  </a:lnTo>
+                  <a:lnTo>
+                    <a:pt x="6947385" y="2664269"/>
+                  </a:lnTo>
+                  <a:lnTo>
+                    <a:pt x="7019007" y="2664616"/>
+                  </a:lnTo>
+                  <a:lnTo>
+                    <a:pt x="7090630" y="2664963"/>
+                  </a:lnTo>
+                  <a:lnTo>
+                    <a:pt x="7090630" y="3335346"/>
+                  </a:lnTo>
+                  <a:lnTo>
+                    <a:pt x="7019007" y="3326758"/>
+                  </a:lnTo>
+                  <a:lnTo>
+                    <a:pt x="6947385" y="3317674"/>
+                  </a:lnTo>
+                  <a:lnTo>
+                    <a:pt x="6875762" y="3308063"/>
+                  </a:lnTo>
+                  <a:lnTo>
+                    <a:pt x="6804139" y="3297897"/>
+                  </a:lnTo>
+                  <a:lnTo>
+                    <a:pt x="6732517" y="3287142"/>
+                  </a:lnTo>
+                  <a:lnTo>
+                    <a:pt x="6660894" y="3275764"/>
+                  </a:lnTo>
+                  <a:lnTo>
+                    <a:pt x="6589272" y="3263729"/>
+                  </a:lnTo>
+                  <a:lnTo>
+                    <a:pt x="6517649" y="3250997"/>
+                  </a:lnTo>
+                  <a:lnTo>
+                    <a:pt x="6446027" y="3237528"/>
+                  </a:lnTo>
+                  <a:lnTo>
+                    <a:pt x="6374404" y="3223279"/>
+                  </a:lnTo>
+                  <a:lnTo>
+                    <a:pt x="6302782" y="3208206"/>
+                  </a:lnTo>
+                  <a:lnTo>
+                    <a:pt x="6231159" y="3192261"/>
+                  </a:lnTo>
+                  <a:lnTo>
+                    <a:pt x="6159537" y="3175393"/>
+                  </a:lnTo>
+                  <a:lnTo>
+                    <a:pt x="6087914" y="3157549"/>
+                  </a:lnTo>
+                  <a:lnTo>
+                    <a:pt x="6016292" y="3138673"/>
+                  </a:lnTo>
+                  <a:lnTo>
+                    <a:pt x="5944669" y="3118704"/>
+                  </a:lnTo>
+                  <a:lnTo>
+                    <a:pt x="5873047" y="3097579"/>
+                  </a:lnTo>
+                  <a:lnTo>
+                    <a:pt x="5801424" y="3075232"/>
+                  </a:lnTo>
+                  <a:lnTo>
+                    <a:pt x="5729802" y="3051592"/>
+                  </a:lnTo>
+                  <a:lnTo>
+                    <a:pt x="5658179" y="3026584"/>
+                  </a:lnTo>
+                  <a:lnTo>
+                    <a:pt x="5586557" y="3000128"/>
+                  </a:lnTo>
+                  <a:lnTo>
+                    <a:pt x="5514934" y="2972142"/>
+                  </a:lnTo>
+                  <a:lnTo>
+                    <a:pt x="5443311" y="2942536"/>
+                  </a:lnTo>
+                  <a:lnTo>
+                    <a:pt x="5371689" y="2911216"/>
+                  </a:lnTo>
+                  <a:lnTo>
+                    <a:pt x="5300066" y="2878085"/>
+                  </a:lnTo>
+                  <a:lnTo>
+                    <a:pt x="5228444" y="2843036"/>
+                  </a:lnTo>
+                  <a:lnTo>
+                    <a:pt x="5156821" y="2805959"/>
+                  </a:lnTo>
+                  <a:lnTo>
+                    <a:pt x="5085199" y="2766736"/>
+                  </a:lnTo>
+                  <a:lnTo>
+                    <a:pt x="5013576" y="2725244"/>
+                  </a:lnTo>
+                  <a:lnTo>
+                    <a:pt x="4941954" y="2681350"/>
+                  </a:lnTo>
+                  <a:lnTo>
+                    <a:pt x="4870331" y="2654139"/>
+                  </a:lnTo>
+                  <a:lnTo>
+                    <a:pt x="4798709" y="2653787"/>
+                  </a:lnTo>
+                  <a:lnTo>
+                    <a:pt x="4727086" y="2653435"/>
+                  </a:lnTo>
+                  <a:lnTo>
+                    <a:pt x="4655464" y="2653084"/>
+                  </a:lnTo>
+                  <a:lnTo>
+                    <a:pt x="4583841" y="2652732"/>
+                  </a:lnTo>
+                  <a:lnTo>
+                    <a:pt x="4512219" y="2652379"/>
+                  </a:lnTo>
+                  <a:lnTo>
+                    <a:pt x="4440596" y="2652027"/>
+                  </a:lnTo>
+                  <a:lnTo>
+                    <a:pt x="4368974" y="2651675"/>
+                  </a:lnTo>
+                  <a:lnTo>
+                    <a:pt x="4297351" y="2651322"/>
+                  </a:lnTo>
+                  <a:lnTo>
+                    <a:pt x="4225729" y="2650969"/>
+                  </a:lnTo>
+                  <a:lnTo>
+                    <a:pt x="4154106" y="2650616"/>
+                  </a:lnTo>
+                  <a:lnTo>
+                    <a:pt x="4082483" y="2650263"/>
+                  </a:lnTo>
+                  <a:lnTo>
+                    <a:pt x="4010861" y="2649910"/>
+                  </a:lnTo>
+                  <a:lnTo>
+                    <a:pt x="3939238" y="2649557"/>
+                  </a:lnTo>
+                  <a:lnTo>
+                    <a:pt x="3867616" y="2649203"/>
+                  </a:lnTo>
+                  <a:lnTo>
+                    <a:pt x="3795993" y="2648850"/>
+                  </a:lnTo>
+                  <a:lnTo>
+                    <a:pt x="3724371" y="2648496"/>
+                  </a:lnTo>
+                  <a:lnTo>
+                    <a:pt x="3652748" y="2648142"/>
+                  </a:lnTo>
+                  <a:lnTo>
+                    <a:pt x="3581126" y="2647788"/>
+                  </a:lnTo>
+                  <a:lnTo>
+                    <a:pt x="3509503" y="2647434"/>
+                  </a:lnTo>
+                  <a:lnTo>
+                    <a:pt x="3437881" y="2647079"/>
+                  </a:lnTo>
+                  <a:lnTo>
+                    <a:pt x="3366258" y="2646725"/>
+                  </a:lnTo>
+                  <a:lnTo>
+                    <a:pt x="3294636" y="2646370"/>
+                  </a:lnTo>
+                  <a:lnTo>
+                    <a:pt x="3223013" y="2646015"/>
+                  </a:lnTo>
+                  <a:lnTo>
+                    <a:pt x="3151391" y="2645660"/>
+                  </a:lnTo>
+                  <a:lnTo>
+                    <a:pt x="3079768" y="2645305"/>
+                  </a:lnTo>
+                  <a:lnTo>
+                    <a:pt x="3008146" y="2644950"/>
+                  </a:lnTo>
+                  <a:lnTo>
+                    <a:pt x="2936523" y="2644594"/>
+                  </a:lnTo>
+                  <a:lnTo>
+                    <a:pt x="2864901" y="2644239"/>
+                  </a:lnTo>
+                  <a:lnTo>
+                    <a:pt x="2793278" y="2643883"/>
+                  </a:lnTo>
+                  <a:lnTo>
+                    <a:pt x="2721655" y="2643527"/>
+                  </a:lnTo>
+                  <a:lnTo>
+                    <a:pt x="2650033" y="2643171"/>
+                  </a:lnTo>
+                  <a:lnTo>
+                    <a:pt x="2578410" y="2642815"/>
+                  </a:lnTo>
+                  <a:lnTo>
+                    <a:pt x="2506788" y="2642458"/>
+                  </a:lnTo>
+                  <a:lnTo>
+                    <a:pt x="2435165" y="2642102"/>
+                  </a:lnTo>
+                  <a:lnTo>
+                    <a:pt x="2363543" y="2641745"/>
+                  </a:lnTo>
+                  <a:lnTo>
+                    <a:pt x="2291920" y="2641388"/>
+                  </a:lnTo>
+                  <a:lnTo>
+                    <a:pt x="2220298" y="2641031"/>
+                  </a:lnTo>
+                  <a:lnTo>
+                    <a:pt x="2148675" y="2640674"/>
+                  </a:lnTo>
+                  <a:lnTo>
+                    <a:pt x="2077053" y="2640317"/>
+                  </a:lnTo>
+                  <a:lnTo>
+                    <a:pt x="2005430" y="2639959"/>
+                  </a:lnTo>
+                  <a:lnTo>
+                    <a:pt x="1933808" y="2639602"/>
+                  </a:lnTo>
+                  <a:lnTo>
+                    <a:pt x="1862185" y="2639244"/>
+                  </a:lnTo>
+                  <a:lnTo>
+                    <a:pt x="1790563" y="2638886"/>
+                  </a:lnTo>
+                  <a:lnTo>
+                    <a:pt x="1718940" y="2638528"/>
+                  </a:lnTo>
+                  <a:lnTo>
+                    <a:pt x="1647318" y="2638170"/>
+                  </a:lnTo>
+                  <a:lnTo>
+                    <a:pt x="1575695" y="2637812"/>
+                  </a:lnTo>
+                  <a:lnTo>
+                    <a:pt x="1504073" y="2637453"/>
+                  </a:lnTo>
+                  <a:lnTo>
+                    <a:pt x="1432450" y="2637095"/>
+                  </a:lnTo>
+                  <a:lnTo>
+                    <a:pt x="1360827" y="2636736"/>
+                  </a:lnTo>
+                  <a:lnTo>
+                    <a:pt x="1289205" y="2636377"/>
+                  </a:lnTo>
+                  <a:lnTo>
+                    <a:pt x="1217582" y="2636018"/>
+                  </a:lnTo>
+                  <a:lnTo>
+                    <a:pt x="1145960" y="2635659"/>
+                  </a:lnTo>
+                  <a:lnTo>
+                    <a:pt x="1074337" y="2635299"/>
+                  </a:lnTo>
+                  <a:lnTo>
+                    <a:pt x="1002715" y="2634940"/>
+                  </a:lnTo>
+                  <a:lnTo>
+                    <a:pt x="931092" y="2634580"/>
+                  </a:lnTo>
+                  <a:lnTo>
+                    <a:pt x="859470" y="2634220"/>
+                  </a:lnTo>
+                  <a:lnTo>
+                    <a:pt x="787847" y="2633860"/>
+                  </a:lnTo>
+                  <a:lnTo>
+                    <a:pt x="716225" y="2633500"/>
+                  </a:lnTo>
+                  <a:lnTo>
+                    <a:pt x="644602" y="2633140"/>
+                  </a:lnTo>
+                  <a:lnTo>
+                    <a:pt x="572980" y="2632779"/>
+                  </a:lnTo>
+                  <a:lnTo>
+                    <a:pt x="501357" y="2632419"/>
+                  </a:lnTo>
+                  <a:lnTo>
+                    <a:pt x="429735" y="2632058"/>
+                  </a:lnTo>
+                  <a:lnTo>
+                    <a:pt x="358112" y="2631697"/>
+                  </a:lnTo>
+                  <a:lnTo>
+                    <a:pt x="286490" y="2631336"/>
+                  </a:lnTo>
+                  <a:lnTo>
+                    <a:pt x="214867" y="2630975"/>
+                  </a:lnTo>
+                  <a:lnTo>
+                    <a:pt x="143245" y="2630613"/>
+                  </a:lnTo>
+                  <a:lnTo>
+                    <a:pt x="71622" y="2630252"/>
+                  </a:lnTo>
+                  <a:lnTo>
+                    <a:pt x="0" y="2629890"/>
                   </a:lnTo>
                   <a:lnTo>
                     <a:pt x="0" y="0"/>
@@ -3504,180 +3510,186 @@
           </p:nvSpPr>
           <p:spPr>
             <a:xfrm>
-              <a:off x="4394761" y="2073503"/>
-              <a:ext cx="3867917" cy="2856273"/>
+              <a:off x="4244871" y="2073503"/>
+              <a:ext cx="4017807" cy="2664963"/>
             </a:xfrm>
             <a:custGeom>
               <a:avLst/>
               <a:pathLst>
-                <a:path w="3867917" h="2856273">
+                <a:path w="4017807" h="2664963">
                   <a:moveTo>
                     <a:pt x="0" y="0"/>
                   </a:moveTo>
                   <a:lnTo>
-                    <a:pt x="301" y="925"/>
-                  </a:lnTo>
-                  <a:lnTo>
-                    <a:pt x="71923" y="207978"/>
-                  </a:lnTo>
-                  <a:lnTo>
-                    <a:pt x="143546" y="402721"/>
-                  </a:lnTo>
-                  <a:lnTo>
-                    <a:pt x="215168" y="585887"/>
-                  </a:lnTo>
-                  <a:lnTo>
-                    <a:pt x="286791" y="758164"/>
-                  </a:lnTo>
-                  <a:lnTo>
-                    <a:pt x="358413" y="920199"/>
-                  </a:lnTo>
-                  <a:lnTo>
-                    <a:pt x="430036" y="1072601"/>
-                  </a:lnTo>
-                  <a:lnTo>
-                    <a:pt x="501658" y="1215943"/>
-                  </a:lnTo>
-                  <a:lnTo>
-                    <a:pt x="573281" y="1350764"/>
-                  </a:lnTo>
-                  <a:lnTo>
-                    <a:pt x="644903" y="1477569"/>
-                  </a:lnTo>
-                  <a:lnTo>
-                    <a:pt x="716526" y="1596835"/>
-                  </a:lnTo>
-                  <a:lnTo>
-                    <a:pt x="788149" y="1709012"/>
-                  </a:lnTo>
-                  <a:lnTo>
-                    <a:pt x="859771" y="1814519"/>
-                  </a:lnTo>
-                  <a:lnTo>
-                    <a:pt x="931394" y="1913754"/>
-                  </a:lnTo>
-                  <a:lnTo>
-                    <a:pt x="1003016" y="2007090"/>
-                  </a:lnTo>
-                  <a:lnTo>
-                    <a:pt x="1074639" y="2094877"/>
-                  </a:lnTo>
-                  <a:lnTo>
-                    <a:pt x="1146261" y="2177444"/>
-                  </a:lnTo>
-                  <a:lnTo>
-                    <a:pt x="1217884" y="2255104"/>
-                  </a:lnTo>
-                  <a:lnTo>
-                    <a:pt x="1289506" y="2328146"/>
-                  </a:lnTo>
-                  <a:lnTo>
-                    <a:pt x="1361129" y="2396846"/>
-                  </a:lnTo>
-                  <a:lnTo>
-                    <a:pt x="1432751" y="2461462"/>
-                  </a:lnTo>
-                  <a:lnTo>
-                    <a:pt x="1504374" y="2522237"/>
-                  </a:lnTo>
-                  <a:lnTo>
-                    <a:pt x="1575996" y="2579398"/>
-                  </a:lnTo>
-                  <a:lnTo>
-                    <a:pt x="1647619" y="2633161"/>
-                  </a:lnTo>
-                  <a:lnTo>
-                    <a:pt x="1719241" y="2658734"/>
-                  </a:lnTo>
-                  <a:lnTo>
-                    <a:pt x="1790864" y="2666226"/>
-                  </a:lnTo>
-                  <a:lnTo>
-                    <a:pt x="1862486" y="2673651"/>
-                  </a:lnTo>
-                  <a:lnTo>
-                    <a:pt x="1934109" y="2681008"/>
-                  </a:lnTo>
-                  <a:lnTo>
-                    <a:pt x="2005731" y="2688298"/>
-                  </a:lnTo>
-                  <a:lnTo>
-                    <a:pt x="2077354" y="2695522"/>
-                  </a:lnTo>
-                  <a:lnTo>
-                    <a:pt x="2148977" y="2702681"/>
-                  </a:lnTo>
-                  <a:lnTo>
-                    <a:pt x="2220599" y="2709774"/>
-                  </a:lnTo>
-                  <a:lnTo>
-                    <a:pt x="2292222" y="2716803"/>
-                  </a:lnTo>
-                  <a:lnTo>
-                    <a:pt x="2363844" y="2723768"/>
-                  </a:lnTo>
-                  <a:lnTo>
-                    <a:pt x="2435467" y="2730670"/>
-                  </a:lnTo>
-                  <a:lnTo>
-                    <a:pt x="2507089" y="2737509"/>
-                  </a:lnTo>
-                  <a:lnTo>
-                    <a:pt x="2578712" y="2744286"/>
-                  </a:lnTo>
-                  <a:lnTo>
-                    <a:pt x="2650334" y="2751002"/>
-                  </a:lnTo>
-                  <a:lnTo>
-                    <a:pt x="2721957" y="2757657"/>
-                  </a:lnTo>
-                  <a:lnTo>
-                    <a:pt x="2793579" y="2764251"/>
-                  </a:lnTo>
-                  <a:lnTo>
-                    <a:pt x="2865202" y="2770785"/>
-                  </a:lnTo>
-                  <a:lnTo>
-                    <a:pt x="2936824" y="2777260"/>
-                  </a:lnTo>
-                  <a:lnTo>
-                    <a:pt x="3008447" y="2783676"/>
-                  </a:lnTo>
-                  <a:lnTo>
-                    <a:pt x="3080069" y="2790034"/>
-                  </a:lnTo>
-                  <a:lnTo>
-                    <a:pt x="3151692" y="2796334"/>
-                  </a:lnTo>
-                  <a:lnTo>
-                    <a:pt x="3223314" y="2802577"/>
-                  </a:lnTo>
-                  <a:lnTo>
-                    <a:pt x="3294937" y="2808763"/>
-                  </a:lnTo>
-                  <a:lnTo>
-                    <a:pt x="3366559" y="2814893"/>
-                  </a:lnTo>
-                  <a:lnTo>
-                    <a:pt x="3438182" y="2820968"/>
-                  </a:lnTo>
-                  <a:lnTo>
-                    <a:pt x="3509805" y="2826987"/>
-                  </a:lnTo>
-                  <a:lnTo>
-                    <a:pt x="3581427" y="2832951"/>
-                  </a:lnTo>
-                  <a:lnTo>
-                    <a:pt x="3653050" y="2838862"/>
-                  </a:lnTo>
-                  <a:lnTo>
-                    <a:pt x="3724672" y="2844718"/>
-                  </a:lnTo>
-                  <a:lnTo>
-                    <a:pt x="3796295" y="2850522"/>
-                  </a:lnTo>
-                  <a:lnTo>
-                    <a:pt x="3867917" y="2856273"/>
+                    <a:pt x="6946" y="19442"/>
+                  </a:lnTo>
+                  <a:lnTo>
+                    <a:pt x="78568" y="208951"/>
+                  </a:lnTo>
+                  <a:lnTo>
+                    <a:pt x="150191" y="388092"/>
+                  </a:lnTo>
+                  <a:lnTo>
+                    <a:pt x="221813" y="557435"/>
+                  </a:lnTo>
+                  <a:lnTo>
+                    <a:pt x="293436" y="717513"/>
+                  </a:lnTo>
+                  <a:lnTo>
+                    <a:pt x="365058" y="868835"/>
+                  </a:lnTo>
+                  <a:lnTo>
+                    <a:pt x="436681" y="1011879"/>
+                  </a:lnTo>
+                  <a:lnTo>
+                    <a:pt x="508303" y="1147098"/>
+                  </a:lnTo>
+                  <a:lnTo>
+                    <a:pt x="579926" y="1274920"/>
+                  </a:lnTo>
+                  <a:lnTo>
+                    <a:pt x="651548" y="1395750"/>
+                  </a:lnTo>
+                  <a:lnTo>
+                    <a:pt x="723171" y="1509970"/>
+                  </a:lnTo>
+                  <a:lnTo>
+                    <a:pt x="794793" y="1617942"/>
+                  </a:lnTo>
+                  <a:lnTo>
+                    <a:pt x="866416" y="1720007"/>
+                  </a:lnTo>
+                  <a:lnTo>
+                    <a:pt x="938039" y="1816489"/>
+                  </a:lnTo>
+                  <a:lnTo>
+                    <a:pt x="1009661" y="1907694"/>
+                  </a:lnTo>
+                  <a:lnTo>
+                    <a:pt x="1081284" y="1993909"/>
+                  </a:lnTo>
+                  <a:lnTo>
+                    <a:pt x="1152906" y="2075408"/>
+                  </a:lnTo>
+                  <a:lnTo>
+                    <a:pt x="1224529" y="2152448"/>
+                  </a:lnTo>
+                  <a:lnTo>
+                    <a:pt x="1296151" y="2225275"/>
+                  </a:lnTo>
+                  <a:lnTo>
+                    <a:pt x="1367774" y="2294117"/>
+                  </a:lnTo>
+                  <a:lnTo>
+                    <a:pt x="1439396" y="2359194"/>
+                  </a:lnTo>
+                  <a:lnTo>
+                    <a:pt x="1511019" y="2420710"/>
+                  </a:lnTo>
+                  <a:lnTo>
+                    <a:pt x="1582641" y="2478862"/>
+                  </a:lnTo>
+                  <a:lnTo>
+                    <a:pt x="1654264" y="2533832"/>
+                  </a:lnTo>
+                  <a:lnTo>
+                    <a:pt x="1725886" y="2585795"/>
+                  </a:lnTo>
+                  <a:lnTo>
+                    <a:pt x="1797509" y="2634916"/>
+                  </a:lnTo>
+                  <a:lnTo>
+                    <a:pt x="1869131" y="2654490"/>
+                  </a:lnTo>
+                  <a:lnTo>
+                    <a:pt x="1940754" y="2654841"/>
+                  </a:lnTo>
+                  <a:lnTo>
+                    <a:pt x="2012376" y="2655192"/>
+                  </a:lnTo>
+                  <a:lnTo>
+                    <a:pt x="2083999" y="2655543"/>
+                  </a:lnTo>
+                  <a:lnTo>
+                    <a:pt x="2155621" y="2655894"/>
+                  </a:lnTo>
+                  <a:lnTo>
+                    <a:pt x="2227244" y="2656245"/>
+                  </a:lnTo>
+                  <a:lnTo>
+                    <a:pt x="2298867" y="2656595"/>
+                  </a:lnTo>
+                  <a:lnTo>
+                    <a:pt x="2370489" y="2656946"/>
+                  </a:lnTo>
+                  <a:lnTo>
+                    <a:pt x="2442112" y="2657296"/>
+                  </a:lnTo>
+                  <a:lnTo>
+                    <a:pt x="2513734" y="2657646"/>
+                  </a:lnTo>
+                  <a:lnTo>
+                    <a:pt x="2585357" y="2657996"/>
+                  </a:lnTo>
+                  <a:lnTo>
+                    <a:pt x="2656979" y="2658346"/>
+                  </a:lnTo>
+                  <a:lnTo>
+                    <a:pt x="2728602" y="2658695"/>
+                  </a:lnTo>
+                  <a:lnTo>
+                    <a:pt x="2800224" y="2659045"/>
+                  </a:lnTo>
+                  <a:lnTo>
+                    <a:pt x="2871847" y="2659394"/>
+                  </a:lnTo>
+                  <a:lnTo>
+                    <a:pt x="2943469" y="2659743"/>
+                  </a:lnTo>
+                  <a:lnTo>
+                    <a:pt x="3015092" y="2660092"/>
+                  </a:lnTo>
+                  <a:lnTo>
+                    <a:pt x="3086714" y="2660441"/>
+                  </a:lnTo>
+                  <a:lnTo>
+                    <a:pt x="3158337" y="2660790"/>
+                  </a:lnTo>
+                  <a:lnTo>
+                    <a:pt x="3229959" y="2661139"/>
+                  </a:lnTo>
+                  <a:lnTo>
+                    <a:pt x="3301582" y="2661487"/>
+                  </a:lnTo>
+                  <a:lnTo>
+                    <a:pt x="3373204" y="2661835"/>
+                  </a:lnTo>
+                  <a:lnTo>
+                    <a:pt x="3444827" y="2662184"/>
+                  </a:lnTo>
+                  <a:lnTo>
+                    <a:pt x="3516449" y="2662532"/>
+                  </a:lnTo>
+                  <a:lnTo>
+                    <a:pt x="3588072" y="2662879"/>
+                  </a:lnTo>
+                  <a:lnTo>
+                    <a:pt x="3659695" y="2663227"/>
+                  </a:lnTo>
+                  <a:lnTo>
+                    <a:pt x="3731317" y="2663575"/>
+                  </a:lnTo>
+                  <a:lnTo>
+                    <a:pt x="3802940" y="2663922"/>
+                  </a:lnTo>
+                  <a:lnTo>
+                    <a:pt x="3874562" y="2664269"/>
+                  </a:lnTo>
+                  <a:lnTo>
+                    <a:pt x="3946185" y="2664616"/>
+                  </a:lnTo>
+                  <a:lnTo>
+                    <a:pt x="4017807" y="2664963"/>
                   </a:lnTo>
                 </a:path>
               </a:pathLst>
@@ -3697,309 +3709,309 @@
           </p:nvSpPr>
           <p:spPr>
             <a:xfrm>
-              <a:off x="1172049" y="4008967"/>
-              <a:ext cx="7090630" cy="1421061"/>
+              <a:off x="1172049" y="4703393"/>
+              <a:ext cx="7090630" cy="705455"/>
             </a:xfrm>
             <a:custGeom>
               <a:avLst/>
               <a:pathLst>
-                <a:path w="7090630" h="1421061">
+                <a:path w="7090630" h="705455">
                   <a:moveTo>
-                    <a:pt x="7090630" y="1421061"/>
+                    <a:pt x="7090630" y="705455"/>
                   </a:moveTo>
                   <a:lnTo>
-                    <a:pt x="7019007" y="1413020"/>
-                  </a:lnTo>
-                  <a:lnTo>
-                    <a:pt x="6947385" y="1404470"/>
-                  </a:lnTo>
-                  <a:lnTo>
-                    <a:pt x="6875762" y="1395380"/>
-                  </a:lnTo>
-                  <a:lnTo>
-                    <a:pt x="6804139" y="1385715"/>
-                  </a:lnTo>
-                  <a:lnTo>
-                    <a:pt x="6732517" y="1375440"/>
-                  </a:lnTo>
-                  <a:lnTo>
-                    <a:pt x="6660894" y="1364515"/>
-                  </a:lnTo>
-                  <a:lnTo>
-                    <a:pt x="6589272" y="1352900"/>
-                  </a:lnTo>
-                  <a:lnTo>
-                    <a:pt x="6517649" y="1340550"/>
-                  </a:lnTo>
-                  <a:lnTo>
-                    <a:pt x="6446027" y="1327420"/>
-                  </a:lnTo>
-                  <a:lnTo>
-                    <a:pt x="6374404" y="1313460"/>
-                  </a:lnTo>
-                  <a:lnTo>
-                    <a:pt x="6302782" y="1298617"/>
-                  </a:lnTo>
-                  <a:lnTo>
-                    <a:pt x="6231159" y="1282836"/>
-                  </a:lnTo>
-                  <a:lnTo>
-                    <a:pt x="6159537" y="1266058"/>
-                  </a:lnTo>
-                  <a:lnTo>
-                    <a:pt x="6087914" y="1248220"/>
-                  </a:lnTo>
-                  <a:lnTo>
-                    <a:pt x="6016292" y="1229253"/>
-                  </a:lnTo>
-                  <a:lnTo>
-                    <a:pt x="5944669" y="1209088"/>
-                  </a:lnTo>
-                  <a:lnTo>
-                    <a:pt x="5873047" y="1187649"/>
-                  </a:lnTo>
-                  <a:lnTo>
-                    <a:pt x="5801424" y="1164854"/>
-                  </a:lnTo>
-                  <a:lnTo>
-                    <a:pt x="5729802" y="1140619"/>
-                  </a:lnTo>
-                  <a:lnTo>
-                    <a:pt x="5658179" y="1114851"/>
-                  </a:lnTo>
-                  <a:lnTo>
-                    <a:pt x="5586557" y="1087455"/>
-                  </a:lnTo>
-                  <a:lnTo>
-                    <a:pt x="5514934" y="1058328"/>
-                  </a:lnTo>
-                  <a:lnTo>
-                    <a:pt x="5443311" y="1027359"/>
-                  </a:lnTo>
-                  <a:lnTo>
-                    <a:pt x="5371689" y="994433"/>
-                  </a:lnTo>
-                  <a:lnTo>
-                    <a:pt x="5300066" y="959425"/>
-                  </a:lnTo>
-                  <a:lnTo>
-                    <a:pt x="5228444" y="922205"/>
-                  </a:lnTo>
-                  <a:lnTo>
-                    <a:pt x="5156821" y="882632"/>
-                  </a:lnTo>
-                  <a:lnTo>
-                    <a:pt x="5085199" y="840559"/>
-                  </a:lnTo>
-                  <a:lnTo>
-                    <a:pt x="5013576" y="795825"/>
-                  </a:lnTo>
-                  <a:lnTo>
-                    <a:pt x="4941954" y="748264"/>
-                  </a:lnTo>
-                  <a:lnTo>
-                    <a:pt x="4870331" y="715708"/>
-                  </a:lnTo>
-                  <a:lnTo>
-                    <a:pt x="4798709" y="708078"/>
-                  </a:lnTo>
-                  <a:lnTo>
-                    <a:pt x="4727086" y="700377"/>
-                  </a:lnTo>
-                  <a:lnTo>
-                    <a:pt x="4655464" y="692606"/>
-                  </a:lnTo>
-                  <a:lnTo>
-                    <a:pt x="4583841" y="684764"/>
-                  </a:lnTo>
-                  <a:lnTo>
-                    <a:pt x="4512219" y="676850"/>
-                  </a:lnTo>
-                  <a:lnTo>
-                    <a:pt x="4440596" y="668863"/>
-                  </a:lnTo>
-                  <a:lnTo>
-                    <a:pt x="4368974" y="660804"/>
-                  </a:lnTo>
-                  <a:lnTo>
-                    <a:pt x="4297351" y="652670"/>
-                  </a:lnTo>
-                  <a:lnTo>
-                    <a:pt x="4225729" y="644462"/>
-                  </a:lnTo>
-                  <a:lnTo>
-                    <a:pt x="4154106" y="636178"/>
-                  </a:lnTo>
-                  <a:lnTo>
-                    <a:pt x="4082483" y="627819"/>
-                  </a:lnTo>
-                  <a:lnTo>
-                    <a:pt x="4010861" y="619383"/>
-                  </a:lnTo>
-                  <a:lnTo>
-                    <a:pt x="3939238" y="610869"/>
-                  </a:lnTo>
-                  <a:lnTo>
-                    <a:pt x="3867616" y="602278"/>
-                  </a:lnTo>
-                  <a:lnTo>
-                    <a:pt x="3795993" y="593608"/>
-                  </a:lnTo>
-                  <a:lnTo>
-                    <a:pt x="3724371" y="584858"/>
-                  </a:lnTo>
-                  <a:lnTo>
-                    <a:pt x="3652748" y="576028"/>
-                  </a:lnTo>
-                  <a:lnTo>
-                    <a:pt x="3581126" y="567118"/>
-                  </a:lnTo>
-                  <a:lnTo>
-                    <a:pt x="3509503" y="558125"/>
-                  </a:lnTo>
-                  <a:lnTo>
-                    <a:pt x="3437881" y="549051"/>
-                  </a:lnTo>
-                  <a:lnTo>
-                    <a:pt x="3366258" y="539893"/>
-                  </a:lnTo>
-                  <a:lnTo>
-                    <a:pt x="3294636" y="530651"/>
-                  </a:lnTo>
-                  <a:lnTo>
-                    <a:pt x="3223013" y="521324"/>
-                  </a:lnTo>
-                  <a:lnTo>
-                    <a:pt x="3151391" y="511912"/>
-                  </a:lnTo>
-                  <a:lnTo>
-                    <a:pt x="3079768" y="502414"/>
-                  </a:lnTo>
-                  <a:lnTo>
-                    <a:pt x="3008146" y="492829"/>
-                  </a:lnTo>
-                  <a:lnTo>
-                    <a:pt x="2936523" y="483155"/>
-                  </a:lnTo>
-                  <a:lnTo>
-                    <a:pt x="2864901" y="473394"/>
-                  </a:lnTo>
-                  <a:lnTo>
-                    <a:pt x="2793278" y="463542"/>
-                  </a:lnTo>
-                  <a:lnTo>
-                    <a:pt x="2721655" y="453601"/>
-                  </a:lnTo>
-                  <a:lnTo>
-                    <a:pt x="2650033" y="443568"/>
-                  </a:lnTo>
-                  <a:lnTo>
-                    <a:pt x="2578410" y="433443"/>
-                  </a:lnTo>
-                  <a:lnTo>
-                    <a:pt x="2506788" y="423226"/>
-                  </a:lnTo>
-                  <a:lnTo>
-                    <a:pt x="2435165" y="412915"/>
-                  </a:lnTo>
-                  <a:lnTo>
-                    <a:pt x="2363543" y="402509"/>
-                  </a:lnTo>
-                  <a:lnTo>
-                    <a:pt x="2291920" y="392008"/>
-                  </a:lnTo>
-                  <a:lnTo>
-                    <a:pt x="2220298" y="381411"/>
-                  </a:lnTo>
-                  <a:lnTo>
-                    <a:pt x="2148675" y="370716"/>
-                  </a:lnTo>
-                  <a:lnTo>
-                    <a:pt x="2077053" y="359924"/>
-                  </a:lnTo>
-                  <a:lnTo>
-                    <a:pt x="2005430" y="349033"/>
-                  </a:lnTo>
-                  <a:lnTo>
-                    <a:pt x="1933808" y="338042"/>
-                  </a:lnTo>
-                  <a:lnTo>
-                    <a:pt x="1862185" y="326950"/>
-                  </a:lnTo>
-                  <a:lnTo>
-                    <a:pt x="1790563" y="315756"/>
-                  </a:lnTo>
-                  <a:lnTo>
-                    <a:pt x="1718940" y="304460"/>
-                  </a:lnTo>
-                  <a:lnTo>
-                    <a:pt x="1647318" y="293061"/>
-                  </a:lnTo>
-                  <a:lnTo>
-                    <a:pt x="1575695" y="281557"/>
-                  </a:lnTo>
-                  <a:lnTo>
-                    <a:pt x="1504073" y="269947"/>
-                  </a:lnTo>
-                  <a:lnTo>
-                    <a:pt x="1432450" y="258231"/>
-                  </a:lnTo>
-                  <a:lnTo>
-                    <a:pt x="1360827" y="246408"/>
-                  </a:lnTo>
-                  <a:lnTo>
-                    <a:pt x="1289205" y="234476"/>
-                  </a:lnTo>
-                  <a:lnTo>
-                    <a:pt x="1217582" y="222435"/>
-                  </a:lnTo>
-                  <a:lnTo>
-                    <a:pt x="1145960" y="210284"/>
-                  </a:lnTo>
-                  <a:lnTo>
-                    <a:pt x="1074337" y="198021"/>
-                  </a:lnTo>
-                  <a:lnTo>
-                    <a:pt x="1002715" y="185646"/>
-                  </a:lnTo>
-                  <a:lnTo>
-                    <a:pt x="931092" y="173158"/>
-                  </a:lnTo>
-                  <a:lnTo>
-                    <a:pt x="859470" y="160555"/>
-                  </a:lnTo>
-                  <a:lnTo>
-                    <a:pt x="787847" y="147836"/>
-                  </a:lnTo>
-                  <a:lnTo>
-                    <a:pt x="716225" y="135001"/>
-                  </a:lnTo>
-                  <a:lnTo>
-                    <a:pt x="644602" y="122048"/>
-                  </a:lnTo>
-                  <a:lnTo>
-                    <a:pt x="572980" y="108977"/>
-                  </a:lnTo>
-                  <a:lnTo>
-                    <a:pt x="501357" y="95786"/>
-                  </a:lnTo>
-                  <a:lnTo>
-                    <a:pt x="429735" y="82474"/>
-                  </a:lnTo>
-                  <a:lnTo>
-                    <a:pt x="358112" y="69040"/>
-                  </a:lnTo>
-                  <a:lnTo>
-                    <a:pt x="286490" y="55482"/>
-                  </a:lnTo>
-                  <a:lnTo>
-                    <a:pt x="214867" y="41801"/>
-                  </a:lnTo>
-                  <a:lnTo>
-                    <a:pt x="143245" y="27994"/>
-                  </a:lnTo>
-                  <a:lnTo>
-                    <a:pt x="71622" y="14061"/>
+                    <a:pt x="7019007" y="696868"/>
+                  </a:lnTo>
+                  <a:lnTo>
+                    <a:pt x="6947385" y="687783"/>
+                  </a:lnTo>
+                  <a:lnTo>
+                    <a:pt x="6875762" y="678173"/>
+                  </a:lnTo>
+                  <a:lnTo>
+                    <a:pt x="6804139" y="668006"/>
+                  </a:lnTo>
+                  <a:lnTo>
+                    <a:pt x="6732517" y="657251"/>
+                  </a:lnTo>
+                  <a:lnTo>
+                    <a:pt x="6660894" y="645874"/>
+                  </a:lnTo>
+                  <a:lnTo>
+                    <a:pt x="6589272" y="633838"/>
+                  </a:lnTo>
+                  <a:lnTo>
+                    <a:pt x="6517649" y="621106"/>
+                  </a:lnTo>
+                  <a:lnTo>
+                    <a:pt x="6446027" y="607637"/>
+                  </a:lnTo>
+                  <a:lnTo>
+                    <a:pt x="6374404" y="593389"/>
+                  </a:lnTo>
+                  <a:lnTo>
+                    <a:pt x="6302782" y="578316"/>
+                  </a:lnTo>
+                  <a:lnTo>
+                    <a:pt x="6231159" y="562371"/>
+                  </a:lnTo>
+                  <a:lnTo>
+                    <a:pt x="6159537" y="545503"/>
+                  </a:lnTo>
+                  <a:lnTo>
+                    <a:pt x="6087914" y="527659"/>
+                  </a:lnTo>
+                  <a:lnTo>
+                    <a:pt x="6016292" y="508782"/>
+                  </a:lnTo>
+                  <a:lnTo>
+                    <a:pt x="5944669" y="488813"/>
+                  </a:lnTo>
+                  <a:lnTo>
+                    <a:pt x="5873047" y="467688"/>
+                  </a:lnTo>
+                  <a:lnTo>
+                    <a:pt x="5801424" y="445341"/>
+                  </a:lnTo>
+                  <a:lnTo>
+                    <a:pt x="5729802" y="421701"/>
+                  </a:lnTo>
+                  <a:lnTo>
+                    <a:pt x="5658179" y="396693"/>
+                  </a:lnTo>
+                  <a:lnTo>
+                    <a:pt x="5586557" y="370237"/>
+                  </a:lnTo>
+                  <a:lnTo>
+                    <a:pt x="5514934" y="342251"/>
+                  </a:lnTo>
+                  <a:lnTo>
+                    <a:pt x="5443311" y="312645"/>
+                  </a:lnTo>
+                  <a:lnTo>
+                    <a:pt x="5371689" y="281326"/>
+                  </a:lnTo>
+                  <a:lnTo>
+                    <a:pt x="5300066" y="248194"/>
+                  </a:lnTo>
+                  <a:lnTo>
+                    <a:pt x="5228444" y="213145"/>
+                  </a:lnTo>
+                  <a:lnTo>
+                    <a:pt x="5156821" y="176068"/>
+                  </a:lnTo>
+                  <a:lnTo>
+                    <a:pt x="5085199" y="136845"/>
+                  </a:lnTo>
+                  <a:lnTo>
+                    <a:pt x="5013576" y="95353"/>
+                  </a:lnTo>
+                  <a:lnTo>
+                    <a:pt x="4941954" y="51459"/>
+                  </a:lnTo>
+                  <a:lnTo>
+                    <a:pt x="4870331" y="24248"/>
+                  </a:lnTo>
+                  <a:lnTo>
+                    <a:pt x="4798709" y="23896"/>
+                  </a:lnTo>
+                  <a:lnTo>
+                    <a:pt x="4727086" y="23545"/>
+                  </a:lnTo>
+                  <a:lnTo>
+                    <a:pt x="4655464" y="23193"/>
+                  </a:lnTo>
+                  <a:lnTo>
+                    <a:pt x="4583841" y="22841"/>
+                  </a:lnTo>
+                  <a:lnTo>
+                    <a:pt x="4512219" y="22489"/>
+                  </a:lnTo>
+                  <a:lnTo>
+                    <a:pt x="4440596" y="22136"/>
+                  </a:lnTo>
+                  <a:lnTo>
+                    <a:pt x="4368974" y="21784"/>
+                  </a:lnTo>
+                  <a:lnTo>
+                    <a:pt x="4297351" y="21431"/>
+                  </a:lnTo>
+                  <a:lnTo>
+                    <a:pt x="4225729" y="21079"/>
+                  </a:lnTo>
+                  <a:lnTo>
+                    <a:pt x="4154106" y="20726"/>
+                  </a:lnTo>
+                  <a:lnTo>
+                    <a:pt x="4082483" y="20373"/>
+                  </a:lnTo>
+                  <a:lnTo>
+                    <a:pt x="4010861" y="20019"/>
+                  </a:lnTo>
+                  <a:lnTo>
+                    <a:pt x="3939238" y="19666"/>
+                  </a:lnTo>
+                  <a:lnTo>
+                    <a:pt x="3867616" y="19313"/>
+                  </a:lnTo>
+                  <a:lnTo>
+                    <a:pt x="3795993" y="18959"/>
+                  </a:lnTo>
+                  <a:lnTo>
+                    <a:pt x="3724371" y="18605"/>
+                  </a:lnTo>
+                  <a:lnTo>
+                    <a:pt x="3652748" y="18251"/>
+                  </a:lnTo>
+                  <a:lnTo>
+                    <a:pt x="3581126" y="17897"/>
+                  </a:lnTo>
+                  <a:lnTo>
+                    <a:pt x="3509503" y="17543"/>
+                  </a:lnTo>
+                  <a:lnTo>
+                    <a:pt x="3437881" y="17188"/>
+                  </a:lnTo>
+                  <a:lnTo>
+                    <a:pt x="3366258" y="16834"/>
+                  </a:lnTo>
+                  <a:lnTo>
+                    <a:pt x="3294636" y="16479"/>
+                  </a:lnTo>
+                  <a:lnTo>
+                    <a:pt x="3223013" y="16124"/>
+                  </a:lnTo>
+                  <a:lnTo>
+                    <a:pt x="3151391" y="15769"/>
+                  </a:lnTo>
+                  <a:lnTo>
+                    <a:pt x="3079768" y="15414"/>
+                  </a:lnTo>
+                  <a:lnTo>
+                    <a:pt x="3008146" y="15059"/>
+                  </a:lnTo>
+                  <a:lnTo>
+                    <a:pt x="2936523" y="14703"/>
+                  </a:lnTo>
+                  <a:lnTo>
+                    <a:pt x="2864901" y="14348"/>
+                  </a:lnTo>
+                  <a:lnTo>
+                    <a:pt x="2793278" y="13992"/>
+                  </a:lnTo>
+                  <a:lnTo>
+                    <a:pt x="2721655" y="13636"/>
+                  </a:lnTo>
+                  <a:lnTo>
+                    <a:pt x="2650033" y="13280"/>
+                  </a:lnTo>
+                  <a:lnTo>
+                    <a:pt x="2578410" y="12924"/>
+                  </a:lnTo>
+                  <a:lnTo>
+                    <a:pt x="2506788" y="12568"/>
+                  </a:lnTo>
+                  <a:lnTo>
+                    <a:pt x="2435165" y="12211"/>
+                  </a:lnTo>
+                  <a:lnTo>
+                    <a:pt x="2363543" y="11854"/>
+                  </a:lnTo>
+                  <a:lnTo>
+                    <a:pt x="2291920" y="11498"/>
+                  </a:lnTo>
+                  <a:lnTo>
+                    <a:pt x="2220298" y="11141"/>
+                  </a:lnTo>
+                  <a:lnTo>
+                    <a:pt x="2148675" y="10784"/>
+                  </a:lnTo>
+                  <a:lnTo>
+                    <a:pt x="2077053" y="10426"/>
+                  </a:lnTo>
+                  <a:lnTo>
+                    <a:pt x="2005430" y="10069"/>
+                  </a:lnTo>
+                  <a:lnTo>
+                    <a:pt x="1933808" y="9711"/>
+                  </a:lnTo>
+                  <a:lnTo>
+                    <a:pt x="1862185" y="9354"/>
+                  </a:lnTo>
+                  <a:lnTo>
+                    <a:pt x="1790563" y="8996"/>
+                  </a:lnTo>
+                  <a:lnTo>
+                    <a:pt x="1718940" y="8638"/>
+                  </a:lnTo>
+                  <a:lnTo>
+                    <a:pt x="1647318" y="8280"/>
+                  </a:lnTo>
+                  <a:lnTo>
+                    <a:pt x="1575695" y="7921"/>
+                  </a:lnTo>
+                  <a:lnTo>
+                    <a:pt x="1504073" y="7563"/>
+                  </a:lnTo>
+                  <a:lnTo>
+                    <a:pt x="1432450" y="7204"/>
+                  </a:lnTo>
+                  <a:lnTo>
+                    <a:pt x="1360827" y="6845"/>
+                  </a:lnTo>
+                  <a:lnTo>
+                    <a:pt x="1289205" y="6486"/>
+                  </a:lnTo>
+                  <a:lnTo>
+                    <a:pt x="1217582" y="6127"/>
+                  </a:lnTo>
+                  <a:lnTo>
+                    <a:pt x="1145960" y="5768"/>
+                  </a:lnTo>
+                  <a:lnTo>
+                    <a:pt x="1074337" y="5409"/>
+                  </a:lnTo>
+                  <a:lnTo>
+                    <a:pt x="1002715" y="5049"/>
+                  </a:lnTo>
+                  <a:lnTo>
+                    <a:pt x="931092" y="4689"/>
+                  </a:lnTo>
+                  <a:lnTo>
+                    <a:pt x="859470" y="4330"/>
+                  </a:lnTo>
+                  <a:lnTo>
+                    <a:pt x="787847" y="3970"/>
+                  </a:lnTo>
+                  <a:lnTo>
+                    <a:pt x="716225" y="3609"/>
+                  </a:lnTo>
+                  <a:lnTo>
+                    <a:pt x="644602" y="3249"/>
+                  </a:lnTo>
+                  <a:lnTo>
+                    <a:pt x="572980" y="2889"/>
+                  </a:lnTo>
+                  <a:lnTo>
+                    <a:pt x="501357" y="2528"/>
+                  </a:lnTo>
+                  <a:lnTo>
+                    <a:pt x="429735" y="2167"/>
+                  </a:lnTo>
+                  <a:lnTo>
+                    <a:pt x="358112" y="1806"/>
+                  </a:lnTo>
+                  <a:lnTo>
+                    <a:pt x="286490" y="1445"/>
+                  </a:lnTo>
+                  <a:lnTo>
+                    <a:pt x="214867" y="1084"/>
+                  </a:lnTo>
+                  <a:lnTo>
+                    <a:pt x="143245" y="723"/>
+                  </a:lnTo>
+                  <a:lnTo>
+                    <a:pt x="71622" y="361"/>
                   </a:lnTo>
                   <a:lnTo>
                     <a:pt x="0" y="0"/>
@@ -4022,231 +4034,261 @@
           </p:nvSpPr>
           <p:spPr>
             <a:xfrm>
-              <a:off x="3152596" y="2073503"/>
-              <a:ext cx="5110083" cy="3201208"/>
+              <a:off x="2445112" y="2073503"/>
+              <a:ext cx="5817567" cy="3135167"/>
             </a:xfrm>
             <a:custGeom>
               <a:avLst/>
               <a:pathLst>
-                <a:path w="5110083" h="3201208">
+                <a:path w="5817567" h="3135167">
                   <a:moveTo>
                     <a:pt x="0" y="0"/>
                   </a:moveTo>
                   <a:lnTo>
-                    <a:pt x="24883" y="42838"/>
-                  </a:lnTo>
-                  <a:lnTo>
-                    <a:pt x="96506" y="161873"/>
-                  </a:lnTo>
-                  <a:lnTo>
-                    <a:pt x="168128" y="276790"/>
-                  </a:lnTo>
-                  <a:lnTo>
-                    <a:pt x="239751" y="387732"/>
-                  </a:lnTo>
-                  <a:lnTo>
-                    <a:pt x="311373" y="494836"/>
-                  </a:lnTo>
-                  <a:lnTo>
-                    <a:pt x="382996" y="598235"/>
-                  </a:lnTo>
-                  <a:lnTo>
-                    <a:pt x="454618" y="698057"/>
-                  </a:lnTo>
-                  <a:lnTo>
-                    <a:pt x="526241" y="794425"/>
-                  </a:lnTo>
-                  <a:lnTo>
-                    <a:pt x="597863" y="887460"/>
-                  </a:lnTo>
-                  <a:lnTo>
-                    <a:pt x="669486" y="977276"/>
-                  </a:lnTo>
-                  <a:lnTo>
-                    <a:pt x="741108" y="1063986"/>
-                  </a:lnTo>
-                  <a:lnTo>
-                    <a:pt x="812731" y="1147695"/>
-                  </a:lnTo>
-                  <a:lnTo>
-                    <a:pt x="884354" y="1228509"/>
-                  </a:lnTo>
-                  <a:lnTo>
-                    <a:pt x="955976" y="1306527"/>
-                  </a:lnTo>
-                  <a:lnTo>
-                    <a:pt x="1027599" y="1381846"/>
-                  </a:lnTo>
-                  <a:lnTo>
-                    <a:pt x="1099221" y="1454559"/>
-                  </a:lnTo>
-                  <a:lnTo>
-                    <a:pt x="1170844" y="1524757"/>
-                  </a:lnTo>
-                  <a:lnTo>
-                    <a:pt x="1242466" y="1592527"/>
-                  </a:lnTo>
-                  <a:lnTo>
-                    <a:pt x="1314089" y="1657952"/>
-                  </a:lnTo>
-                  <a:lnTo>
-                    <a:pt x="1385711" y="1721114"/>
-                  </a:lnTo>
-                  <a:lnTo>
-                    <a:pt x="1457334" y="1782091"/>
-                  </a:lnTo>
-                  <a:lnTo>
-                    <a:pt x="1528956" y="1840958"/>
-                  </a:lnTo>
-                  <a:lnTo>
-                    <a:pt x="1600579" y="1897789"/>
-                  </a:lnTo>
-                  <a:lnTo>
-                    <a:pt x="1672201" y="1952654"/>
-                  </a:lnTo>
-                  <a:lnTo>
-                    <a:pt x="1743824" y="2005620"/>
-                  </a:lnTo>
-                  <a:lnTo>
-                    <a:pt x="1815446" y="2056755"/>
-                  </a:lnTo>
-                  <a:lnTo>
-                    <a:pt x="1887069" y="2106120"/>
-                  </a:lnTo>
-                  <a:lnTo>
-                    <a:pt x="1958691" y="2153778"/>
-                  </a:lnTo>
-                  <a:lnTo>
-                    <a:pt x="2030314" y="2199787"/>
-                  </a:lnTo>
-                  <a:lnTo>
-                    <a:pt x="2101936" y="2244205"/>
-                  </a:lnTo>
-                  <a:lnTo>
-                    <a:pt x="2173559" y="2287086"/>
-                  </a:lnTo>
-                  <a:lnTo>
-                    <a:pt x="2245182" y="2328483"/>
-                  </a:lnTo>
-                  <a:lnTo>
-                    <a:pt x="2316804" y="2368449"/>
-                  </a:lnTo>
-                  <a:lnTo>
-                    <a:pt x="2388427" y="2407031"/>
-                  </a:lnTo>
-                  <a:lnTo>
-                    <a:pt x="2460049" y="2444279"/>
-                  </a:lnTo>
-                  <a:lnTo>
-                    <a:pt x="2531672" y="2480239"/>
-                  </a:lnTo>
-                  <a:lnTo>
-                    <a:pt x="2603294" y="2514954"/>
-                  </a:lnTo>
-                  <a:lnTo>
-                    <a:pt x="2674917" y="2548469"/>
-                  </a:lnTo>
-                  <a:lnTo>
-                    <a:pt x="2746539" y="2580824"/>
-                  </a:lnTo>
-                  <a:lnTo>
-                    <a:pt x="2818162" y="2612060"/>
-                  </a:lnTo>
-                  <a:lnTo>
-                    <a:pt x="2889784" y="2642215"/>
-                  </a:lnTo>
-                  <a:lnTo>
-                    <a:pt x="2961407" y="2671327"/>
-                  </a:lnTo>
-                  <a:lnTo>
-                    <a:pt x="3033029" y="2699432"/>
-                  </a:lnTo>
-                  <a:lnTo>
-                    <a:pt x="3104652" y="2726565"/>
-                  </a:lnTo>
-                  <a:lnTo>
-                    <a:pt x="3176274" y="2752759"/>
-                  </a:lnTo>
-                  <a:lnTo>
-                    <a:pt x="3247897" y="2778047"/>
-                  </a:lnTo>
-                  <a:lnTo>
-                    <a:pt x="3319519" y="2802460"/>
-                  </a:lnTo>
-                  <a:lnTo>
-                    <a:pt x="3391142" y="2826028"/>
-                  </a:lnTo>
-                  <a:lnTo>
-                    <a:pt x="3462764" y="2848781"/>
-                  </a:lnTo>
-                  <a:lnTo>
-                    <a:pt x="3534387" y="2870748"/>
-                  </a:lnTo>
-                  <a:lnTo>
-                    <a:pt x="3606009" y="2891954"/>
-                  </a:lnTo>
-                  <a:lnTo>
-                    <a:pt x="3677632" y="2912426"/>
-                  </a:lnTo>
-                  <a:lnTo>
-                    <a:pt x="3749255" y="2932191"/>
-                  </a:lnTo>
-                  <a:lnTo>
-                    <a:pt x="3820877" y="2951271"/>
-                  </a:lnTo>
-                  <a:lnTo>
-                    <a:pt x="3892500" y="2969692"/>
-                  </a:lnTo>
-                  <a:lnTo>
-                    <a:pt x="3964122" y="2987475"/>
-                  </a:lnTo>
-                  <a:lnTo>
-                    <a:pt x="4035745" y="3004643"/>
-                  </a:lnTo>
-                  <a:lnTo>
-                    <a:pt x="4107367" y="3021217"/>
-                  </a:lnTo>
-                  <a:lnTo>
-                    <a:pt x="4178990" y="3037218"/>
-                  </a:lnTo>
-                  <a:lnTo>
-                    <a:pt x="4250612" y="3052665"/>
-                  </a:lnTo>
-                  <a:lnTo>
-                    <a:pt x="4322235" y="3067578"/>
-                  </a:lnTo>
-                  <a:lnTo>
-                    <a:pt x="4393857" y="3081975"/>
-                  </a:lnTo>
-                  <a:lnTo>
-                    <a:pt x="4465480" y="3095874"/>
-                  </a:lnTo>
-                  <a:lnTo>
-                    <a:pt x="4537102" y="3109292"/>
-                  </a:lnTo>
-                  <a:lnTo>
-                    <a:pt x="4608725" y="3122246"/>
-                  </a:lnTo>
-                  <a:lnTo>
-                    <a:pt x="4680347" y="3134752"/>
-                  </a:lnTo>
-                  <a:lnTo>
-                    <a:pt x="4751970" y="3146825"/>
-                  </a:lnTo>
-                  <a:lnTo>
-                    <a:pt x="4823592" y="3158481"/>
-                  </a:lnTo>
-                  <a:lnTo>
-                    <a:pt x="4895215" y="3169733"/>
-                  </a:lnTo>
-                  <a:lnTo>
-                    <a:pt x="4966837" y="3180596"/>
-                  </a:lnTo>
-                  <a:lnTo>
-                    <a:pt x="5038460" y="3191083"/>
-                  </a:lnTo>
-                  <a:lnTo>
-                    <a:pt x="5110083" y="3201208"/>
+                    <a:pt x="16142" y="22425"/>
+                  </a:lnTo>
+                  <a:lnTo>
+                    <a:pt x="87765" y="119141"/>
+                  </a:lnTo>
+                  <a:lnTo>
+                    <a:pt x="159387" y="213156"/>
+                  </a:lnTo>
+                  <a:lnTo>
+                    <a:pt x="231010" y="304543"/>
+                  </a:lnTo>
+                  <a:lnTo>
+                    <a:pt x="302632" y="393377"/>
+                  </a:lnTo>
+                  <a:lnTo>
+                    <a:pt x="374255" y="479729"/>
+                  </a:lnTo>
+                  <a:lnTo>
+                    <a:pt x="445877" y="563668"/>
+                  </a:lnTo>
+                  <a:lnTo>
+                    <a:pt x="517500" y="645261"/>
+                  </a:lnTo>
+                  <a:lnTo>
+                    <a:pt x="589122" y="724575"/>
+                  </a:lnTo>
+                  <a:lnTo>
+                    <a:pt x="660745" y="801672"/>
+                  </a:lnTo>
+                  <a:lnTo>
+                    <a:pt x="732367" y="876615"/>
+                  </a:lnTo>
+                  <a:lnTo>
+                    <a:pt x="803990" y="949464"/>
+                  </a:lnTo>
+                  <a:lnTo>
+                    <a:pt x="875612" y="1020277"/>
+                  </a:lnTo>
+                  <a:lnTo>
+                    <a:pt x="947235" y="1089112"/>
+                  </a:lnTo>
+                  <a:lnTo>
+                    <a:pt x="1018857" y="1156023"/>
+                  </a:lnTo>
+                  <a:lnTo>
+                    <a:pt x="1090480" y="1221065"/>
+                  </a:lnTo>
+                  <a:lnTo>
+                    <a:pt x="1162103" y="1284289"/>
+                  </a:lnTo>
+                  <a:lnTo>
+                    <a:pt x="1233725" y="1345747"/>
+                  </a:lnTo>
+                  <a:lnTo>
+                    <a:pt x="1305348" y="1405487"/>
+                  </a:lnTo>
+                  <a:lnTo>
+                    <a:pt x="1376970" y="1463558"/>
+                  </a:lnTo>
+                  <a:lnTo>
+                    <a:pt x="1448593" y="1520007"/>
+                  </a:lnTo>
+                  <a:lnTo>
+                    <a:pt x="1520215" y="1574878"/>
+                  </a:lnTo>
+                  <a:lnTo>
+                    <a:pt x="1591838" y="1628216"/>
+                  </a:lnTo>
+                  <a:lnTo>
+                    <a:pt x="1663460" y="1680063"/>
+                  </a:lnTo>
+                  <a:lnTo>
+                    <a:pt x="1735083" y="1730462"/>
+                  </a:lnTo>
+                  <a:lnTo>
+                    <a:pt x="1806705" y="1779453"/>
+                  </a:lnTo>
+                  <a:lnTo>
+                    <a:pt x="1878328" y="1827075"/>
+                  </a:lnTo>
+                  <a:lnTo>
+                    <a:pt x="1949950" y="1873366"/>
+                  </a:lnTo>
+                  <a:lnTo>
+                    <a:pt x="2021573" y="1918363"/>
+                  </a:lnTo>
+                  <a:lnTo>
+                    <a:pt x="2093195" y="1962103"/>
+                  </a:lnTo>
+                  <a:lnTo>
+                    <a:pt x="2164818" y="2004621"/>
+                  </a:lnTo>
+                  <a:lnTo>
+                    <a:pt x="2236440" y="2045951"/>
+                  </a:lnTo>
+                  <a:lnTo>
+                    <a:pt x="2308063" y="2086126"/>
+                  </a:lnTo>
+                  <a:lnTo>
+                    <a:pt x="2379685" y="2125179"/>
+                  </a:lnTo>
+                  <a:lnTo>
+                    <a:pt x="2451308" y="2163140"/>
+                  </a:lnTo>
+                  <a:lnTo>
+                    <a:pt x="2522931" y="2200041"/>
+                  </a:lnTo>
+                  <a:lnTo>
+                    <a:pt x="2594553" y="2235911"/>
+                  </a:lnTo>
+                  <a:lnTo>
+                    <a:pt x="2666176" y="2270778"/>
+                  </a:lnTo>
+                  <a:lnTo>
+                    <a:pt x="2737798" y="2304671"/>
+                  </a:lnTo>
+                  <a:lnTo>
+                    <a:pt x="2809421" y="2337617"/>
+                  </a:lnTo>
+                  <a:lnTo>
+                    <a:pt x="2881043" y="2369642"/>
+                  </a:lnTo>
+                  <a:lnTo>
+                    <a:pt x="2952666" y="2400773"/>
+                  </a:lnTo>
+                  <a:lnTo>
+                    <a:pt x="3024288" y="2431033"/>
+                  </a:lnTo>
+                  <a:lnTo>
+                    <a:pt x="3095911" y="2460448"/>
+                  </a:lnTo>
+                  <a:lnTo>
+                    <a:pt x="3167533" y="2489042"/>
+                  </a:lnTo>
+                  <a:lnTo>
+                    <a:pt x="3239156" y="2516836"/>
+                  </a:lnTo>
+                  <a:lnTo>
+                    <a:pt x="3310778" y="2543853"/>
+                  </a:lnTo>
+                  <a:lnTo>
+                    <a:pt x="3382401" y="2570116"/>
+                  </a:lnTo>
+                  <a:lnTo>
+                    <a:pt x="3454023" y="2595645"/>
+                  </a:lnTo>
+                  <a:lnTo>
+                    <a:pt x="3525646" y="2620460"/>
+                  </a:lnTo>
+                  <a:lnTo>
+                    <a:pt x="3597268" y="2644582"/>
+                  </a:lnTo>
+                  <a:lnTo>
+                    <a:pt x="3668891" y="2668031"/>
+                  </a:lnTo>
+                  <a:lnTo>
+                    <a:pt x="3740513" y="2690823"/>
+                  </a:lnTo>
+                  <a:lnTo>
+                    <a:pt x="3812136" y="2712979"/>
+                  </a:lnTo>
+                  <a:lnTo>
+                    <a:pt x="3883759" y="2734516"/>
+                  </a:lnTo>
+                  <a:lnTo>
+                    <a:pt x="3955381" y="2755451"/>
+                  </a:lnTo>
+                  <a:lnTo>
+                    <a:pt x="4027004" y="2775802"/>
+                  </a:lnTo>
+                  <a:lnTo>
+                    <a:pt x="4098626" y="2795583"/>
+                  </a:lnTo>
+                  <a:lnTo>
+                    <a:pt x="4170249" y="2814812"/>
+                  </a:lnTo>
+                  <a:lnTo>
+                    <a:pt x="4241871" y="2833503"/>
+                  </a:lnTo>
+                  <a:lnTo>
+                    <a:pt x="4313494" y="2851673"/>
+                  </a:lnTo>
+                  <a:lnTo>
+                    <a:pt x="4385116" y="2869334"/>
+                  </a:lnTo>
+                  <a:lnTo>
+                    <a:pt x="4456739" y="2886502"/>
+                  </a:lnTo>
+                  <a:lnTo>
+                    <a:pt x="4528361" y="2903190"/>
+                  </a:lnTo>
+                  <a:lnTo>
+                    <a:pt x="4599984" y="2919412"/>
+                  </a:lnTo>
+                  <a:lnTo>
+                    <a:pt x="4671606" y="2935181"/>
+                  </a:lnTo>
+                  <a:lnTo>
+                    <a:pt x="4743229" y="2950509"/>
+                  </a:lnTo>
+                  <a:lnTo>
+                    <a:pt x="4814851" y="2965409"/>
+                  </a:lnTo>
+                  <a:lnTo>
+                    <a:pt x="4886474" y="2979893"/>
+                  </a:lnTo>
+                  <a:lnTo>
+                    <a:pt x="4958096" y="2993971"/>
+                  </a:lnTo>
+                  <a:lnTo>
+                    <a:pt x="5029719" y="3007657"/>
+                  </a:lnTo>
+                  <a:lnTo>
+                    <a:pt x="5101341" y="3020960"/>
+                  </a:lnTo>
+                  <a:lnTo>
+                    <a:pt x="5172964" y="3033891"/>
+                  </a:lnTo>
+                  <a:lnTo>
+                    <a:pt x="5244587" y="3046461"/>
+                  </a:lnTo>
+                  <a:lnTo>
+                    <a:pt x="5316209" y="3058680"/>
+                  </a:lnTo>
+                  <a:lnTo>
+                    <a:pt x="5387832" y="3070557"/>
+                  </a:lnTo>
+                  <a:lnTo>
+                    <a:pt x="5459454" y="3082102"/>
+                  </a:lnTo>
+                  <a:lnTo>
+                    <a:pt x="5531077" y="3093325"/>
+                  </a:lnTo>
+                  <a:lnTo>
+                    <a:pt x="5602699" y="3104234"/>
+                  </a:lnTo>
+                  <a:lnTo>
+                    <a:pt x="5674322" y="3114839"/>
+                  </a:lnTo>
+                  <a:lnTo>
+                    <a:pt x="5745944" y="3125147"/>
+                  </a:lnTo>
+                  <a:lnTo>
+                    <a:pt x="5817567" y="3135167"/>
                   </a:lnTo>
                 </a:path>
               </a:pathLst>
@@ -4986,7 +5028,7 @@
                   <a:latin typeface="Helvetica"/>
                   <a:cs typeface="Helvetica"/>
                 </a:rPr>
-                <a:t>subHR per 1 mL/min: 0.96 (0.92-0.99)  |  per IQR (Δ = 18.2): 0.44 (0.24-0.81)  |  IQR: [-11.5, 6.7]</a:t>
+                <a:t>subHR per 1 mL/min: 0.96 (0.93-1.00)  |  per IQR (Δ = 18.2): 0.51 (0.27-0.99)  |  IQR: [-11.5, 6.7]</a:t>
               </a:r>
             </a:p>
           </p:txBody>

--- a/docs/plots/carbo/jx_carbo_linsubhr_egfrdisc_sideeffect.pptx
+++ b/docs/plots/carbo/jx_carbo_linsubhr_egfrdisc_sideeffect.pptx
@@ -3003,485 +3003,485 @@
           <p:spPr>
             <a:xfrm>
               <a:off x="1172049" y="2073503"/>
-              <a:ext cx="7090630" cy="3335346"/>
+              <a:ext cx="7090630" cy="3333685"/>
             </a:xfrm>
             <a:custGeom>
               <a:avLst/>
               <a:pathLst>
-                <a:path w="7090630" h="3335346">
+                <a:path w="7090630" h="3333685">
                   <a:moveTo>
-                    <a:pt x="3072822" y="0"/>
+                    <a:pt x="3061138" y="0"/>
                   </a:moveTo>
                   <a:lnTo>
-                    <a:pt x="3079768" y="19442"/>
-                  </a:lnTo>
-                  <a:lnTo>
-                    <a:pt x="3151391" y="208951"/>
-                  </a:lnTo>
-                  <a:lnTo>
-                    <a:pt x="3223013" y="388092"/>
-                  </a:lnTo>
-                  <a:lnTo>
-                    <a:pt x="3294636" y="557435"/>
-                  </a:lnTo>
-                  <a:lnTo>
-                    <a:pt x="3366258" y="717513"/>
-                  </a:lnTo>
-                  <a:lnTo>
-                    <a:pt x="3437881" y="868835"/>
-                  </a:lnTo>
-                  <a:lnTo>
-                    <a:pt x="3509503" y="1011879"/>
-                  </a:lnTo>
-                  <a:lnTo>
-                    <a:pt x="3581126" y="1147098"/>
-                  </a:lnTo>
-                  <a:lnTo>
-                    <a:pt x="3652748" y="1274920"/>
-                  </a:lnTo>
-                  <a:lnTo>
-                    <a:pt x="3724371" y="1395750"/>
-                  </a:lnTo>
-                  <a:lnTo>
-                    <a:pt x="3795993" y="1509970"/>
-                  </a:lnTo>
-                  <a:lnTo>
-                    <a:pt x="3867616" y="1617942"/>
-                  </a:lnTo>
-                  <a:lnTo>
-                    <a:pt x="3939238" y="1720007"/>
-                  </a:lnTo>
-                  <a:lnTo>
-                    <a:pt x="4010861" y="1816489"/>
-                  </a:lnTo>
-                  <a:lnTo>
-                    <a:pt x="4082483" y="1907694"/>
-                  </a:lnTo>
-                  <a:lnTo>
-                    <a:pt x="4154106" y="1993909"/>
-                  </a:lnTo>
-                  <a:lnTo>
-                    <a:pt x="4225729" y="2075408"/>
-                  </a:lnTo>
-                  <a:lnTo>
-                    <a:pt x="4297351" y="2152448"/>
-                  </a:lnTo>
-                  <a:lnTo>
-                    <a:pt x="4368974" y="2225275"/>
-                  </a:lnTo>
-                  <a:lnTo>
-                    <a:pt x="4440596" y="2294117"/>
-                  </a:lnTo>
-                  <a:lnTo>
-                    <a:pt x="4512219" y="2359194"/>
-                  </a:lnTo>
-                  <a:lnTo>
-                    <a:pt x="4583841" y="2420710"/>
-                  </a:lnTo>
-                  <a:lnTo>
-                    <a:pt x="4655464" y="2478862"/>
-                  </a:lnTo>
-                  <a:lnTo>
-                    <a:pt x="4727086" y="2533832"/>
-                  </a:lnTo>
-                  <a:lnTo>
-                    <a:pt x="4798709" y="2585795"/>
-                  </a:lnTo>
-                  <a:lnTo>
-                    <a:pt x="4870331" y="2634916"/>
-                  </a:lnTo>
-                  <a:lnTo>
-                    <a:pt x="4941954" y="2654490"/>
-                  </a:lnTo>
-                  <a:lnTo>
-                    <a:pt x="5013576" y="2654841"/>
-                  </a:lnTo>
-                  <a:lnTo>
-                    <a:pt x="5085199" y="2655192"/>
-                  </a:lnTo>
-                  <a:lnTo>
-                    <a:pt x="5156821" y="2655543"/>
-                  </a:lnTo>
-                  <a:lnTo>
-                    <a:pt x="5228444" y="2655894"/>
-                  </a:lnTo>
-                  <a:lnTo>
-                    <a:pt x="5300066" y="2656245"/>
-                  </a:lnTo>
-                  <a:lnTo>
-                    <a:pt x="5371689" y="2656595"/>
-                  </a:lnTo>
-                  <a:lnTo>
-                    <a:pt x="5443311" y="2656946"/>
-                  </a:lnTo>
-                  <a:lnTo>
-                    <a:pt x="5514934" y="2657296"/>
-                  </a:lnTo>
-                  <a:lnTo>
-                    <a:pt x="5586557" y="2657646"/>
-                  </a:lnTo>
-                  <a:lnTo>
-                    <a:pt x="5658179" y="2657996"/>
-                  </a:lnTo>
-                  <a:lnTo>
-                    <a:pt x="5729802" y="2658346"/>
-                  </a:lnTo>
-                  <a:lnTo>
-                    <a:pt x="5801424" y="2658695"/>
-                  </a:lnTo>
-                  <a:lnTo>
-                    <a:pt x="5873047" y="2659045"/>
-                  </a:lnTo>
-                  <a:lnTo>
-                    <a:pt x="5944669" y="2659394"/>
-                  </a:lnTo>
-                  <a:lnTo>
-                    <a:pt x="6016292" y="2659743"/>
-                  </a:lnTo>
-                  <a:lnTo>
-                    <a:pt x="6087914" y="2660092"/>
-                  </a:lnTo>
-                  <a:lnTo>
-                    <a:pt x="6159537" y="2660441"/>
-                  </a:lnTo>
-                  <a:lnTo>
-                    <a:pt x="6231159" y="2660790"/>
-                  </a:lnTo>
-                  <a:lnTo>
-                    <a:pt x="6302782" y="2661139"/>
-                  </a:lnTo>
-                  <a:lnTo>
-                    <a:pt x="6374404" y="2661487"/>
-                  </a:lnTo>
-                  <a:lnTo>
-                    <a:pt x="6446027" y="2661835"/>
-                  </a:lnTo>
-                  <a:lnTo>
-                    <a:pt x="6517649" y="2662184"/>
-                  </a:lnTo>
-                  <a:lnTo>
-                    <a:pt x="6589272" y="2662532"/>
-                  </a:lnTo>
-                  <a:lnTo>
-                    <a:pt x="6660894" y="2662879"/>
-                  </a:lnTo>
-                  <a:lnTo>
-                    <a:pt x="6732517" y="2663227"/>
-                  </a:lnTo>
-                  <a:lnTo>
-                    <a:pt x="6804139" y="2663575"/>
-                  </a:lnTo>
-                  <a:lnTo>
-                    <a:pt x="6875762" y="2663922"/>
-                  </a:lnTo>
-                  <a:lnTo>
-                    <a:pt x="6947385" y="2664269"/>
-                  </a:lnTo>
-                  <a:lnTo>
-                    <a:pt x="7019007" y="2664616"/>
-                  </a:lnTo>
-                  <a:lnTo>
-                    <a:pt x="7090630" y="2664963"/>
-                  </a:lnTo>
-                  <a:lnTo>
-                    <a:pt x="7090630" y="3335346"/>
-                  </a:lnTo>
-                  <a:lnTo>
-                    <a:pt x="7019007" y="3326758"/>
-                  </a:lnTo>
-                  <a:lnTo>
-                    <a:pt x="6947385" y="3317674"/>
-                  </a:lnTo>
-                  <a:lnTo>
-                    <a:pt x="6875762" y="3308063"/>
-                  </a:lnTo>
-                  <a:lnTo>
-                    <a:pt x="6804139" y="3297897"/>
-                  </a:lnTo>
-                  <a:lnTo>
-                    <a:pt x="6732517" y="3287142"/>
-                  </a:lnTo>
-                  <a:lnTo>
-                    <a:pt x="6660894" y="3275764"/>
-                  </a:lnTo>
-                  <a:lnTo>
-                    <a:pt x="6589272" y="3263729"/>
-                  </a:lnTo>
-                  <a:lnTo>
-                    <a:pt x="6517649" y="3250997"/>
-                  </a:lnTo>
-                  <a:lnTo>
-                    <a:pt x="6446027" y="3237528"/>
-                  </a:lnTo>
-                  <a:lnTo>
-                    <a:pt x="6374404" y="3223279"/>
-                  </a:lnTo>
-                  <a:lnTo>
-                    <a:pt x="6302782" y="3208206"/>
-                  </a:lnTo>
-                  <a:lnTo>
-                    <a:pt x="6231159" y="3192261"/>
-                  </a:lnTo>
-                  <a:lnTo>
-                    <a:pt x="6159537" y="3175393"/>
-                  </a:lnTo>
-                  <a:lnTo>
-                    <a:pt x="6087914" y="3157549"/>
-                  </a:lnTo>
-                  <a:lnTo>
-                    <a:pt x="6016292" y="3138673"/>
-                  </a:lnTo>
-                  <a:lnTo>
-                    <a:pt x="5944669" y="3118704"/>
-                  </a:lnTo>
-                  <a:lnTo>
-                    <a:pt x="5873047" y="3097579"/>
-                  </a:lnTo>
-                  <a:lnTo>
-                    <a:pt x="5801424" y="3075232"/>
-                  </a:lnTo>
-                  <a:lnTo>
-                    <a:pt x="5729802" y="3051592"/>
-                  </a:lnTo>
-                  <a:lnTo>
-                    <a:pt x="5658179" y="3026584"/>
-                  </a:lnTo>
-                  <a:lnTo>
-                    <a:pt x="5586557" y="3000128"/>
-                  </a:lnTo>
-                  <a:lnTo>
-                    <a:pt x="5514934" y="2972142"/>
-                  </a:lnTo>
-                  <a:lnTo>
-                    <a:pt x="5443311" y="2942536"/>
-                  </a:lnTo>
-                  <a:lnTo>
-                    <a:pt x="5371689" y="2911216"/>
-                  </a:lnTo>
-                  <a:lnTo>
-                    <a:pt x="5300066" y="2878085"/>
-                  </a:lnTo>
-                  <a:lnTo>
-                    <a:pt x="5228444" y="2843036"/>
-                  </a:lnTo>
-                  <a:lnTo>
-                    <a:pt x="5156821" y="2805959"/>
-                  </a:lnTo>
-                  <a:lnTo>
-                    <a:pt x="5085199" y="2766736"/>
-                  </a:lnTo>
-                  <a:lnTo>
-                    <a:pt x="5013576" y="2725244"/>
-                  </a:lnTo>
-                  <a:lnTo>
-                    <a:pt x="4941954" y="2681350"/>
-                  </a:lnTo>
-                  <a:lnTo>
-                    <a:pt x="4870331" y="2654139"/>
-                  </a:lnTo>
-                  <a:lnTo>
-                    <a:pt x="4798709" y="2653787"/>
-                  </a:lnTo>
-                  <a:lnTo>
-                    <a:pt x="4727086" y="2653435"/>
-                  </a:lnTo>
-                  <a:lnTo>
-                    <a:pt x="4655464" y="2653084"/>
-                  </a:lnTo>
-                  <a:lnTo>
-                    <a:pt x="4583841" y="2652732"/>
-                  </a:lnTo>
-                  <a:lnTo>
-                    <a:pt x="4512219" y="2652379"/>
-                  </a:lnTo>
-                  <a:lnTo>
-                    <a:pt x="4440596" y="2652027"/>
-                  </a:lnTo>
-                  <a:lnTo>
-                    <a:pt x="4368974" y="2651675"/>
-                  </a:lnTo>
-                  <a:lnTo>
-                    <a:pt x="4297351" y="2651322"/>
-                  </a:lnTo>
-                  <a:lnTo>
-                    <a:pt x="4225729" y="2650969"/>
-                  </a:lnTo>
-                  <a:lnTo>
-                    <a:pt x="4154106" y="2650616"/>
-                  </a:lnTo>
-                  <a:lnTo>
-                    <a:pt x="4082483" y="2650263"/>
-                  </a:lnTo>
-                  <a:lnTo>
-                    <a:pt x="4010861" y="2649910"/>
-                  </a:lnTo>
-                  <a:lnTo>
-                    <a:pt x="3939238" y="2649557"/>
-                  </a:lnTo>
-                  <a:lnTo>
-                    <a:pt x="3867616" y="2649203"/>
-                  </a:lnTo>
-                  <a:lnTo>
-                    <a:pt x="3795993" y="2648850"/>
-                  </a:lnTo>
-                  <a:lnTo>
-                    <a:pt x="3724371" y="2648496"/>
-                  </a:lnTo>
-                  <a:lnTo>
-                    <a:pt x="3652748" y="2648142"/>
-                  </a:lnTo>
-                  <a:lnTo>
-                    <a:pt x="3581126" y="2647788"/>
-                  </a:lnTo>
-                  <a:lnTo>
-                    <a:pt x="3509503" y="2647434"/>
-                  </a:lnTo>
-                  <a:lnTo>
-                    <a:pt x="3437881" y="2647079"/>
-                  </a:lnTo>
-                  <a:lnTo>
-                    <a:pt x="3366258" y="2646725"/>
-                  </a:lnTo>
-                  <a:lnTo>
-                    <a:pt x="3294636" y="2646370"/>
-                  </a:lnTo>
-                  <a:lnTo>
-                    <a:pt x="3223013" y="2646015"/>
-                  </a:lnTo>
-                  <a:lnTo>
-                    <a:pt x="3151391" y="2645660"/>
-                  </a:lnTo>
-                  <a:lnTo>
-                    <a:pt x="3079768" y="2645305"/>
-                  </a:lnTo>
-                  <a:lnTo>
-                    <a:pt x="3008146" y="2644950"/>
-                  </a:lnTo>
-                  <a:lnTo>
-                    <a:pt x="2936523" y="2644594"/>
-                  </a:lnTo>
-                  <a:lnTo>
-                    <a:pt x="2864901" y="2644239"/>
-                  </a:lnTo>
-                  <a:lnTo>
-                    <a:pt x="2793278" y="2643883"/>
-                  </a:lnTo>
-                  <a:lnTo>
-                    <a:pt x="2721655" y="2643527"/>
-                  </a:lnTo>
-                  <a:lnTo>
-                    <a:pt x="2650033" y="2643171"/>
-                  </a:lnTo>
-                  <a:lnTo>
-                    <a:pt x="2578410" y="2642815"/>
-                  </a:lnTo>
-                  <a:lnTo>
-                    <a:pt x="2506788" y="2642458"/>
-                  </a:lnTo>
-                  <a:lnTo>
-                    <a:pt x="2435165" y="2642102"/>
-                  </a:lnTo>
-                  <a:lnTo>
-                    <a:pt x="2363543" y="2641745"/>
-                  </a:lnTo>
-                  <a:lnTo>
-                    <a:pt x="2291920" y="2641388"/>
-                  </a:lnTo>
-                  <a:lnTo>
-                    <a:pt x="2220298" y="2641031"/>
-                  </a:lnTo>
-                  <a:lnTo>
-                    <a:pt x="2148675" y="2640674"/>
-                  </a:lnTo>
-                  <a:lnTo>
-                    <a:pt x="2077053" y="2640317"/>
-                  </a:lnTo>
-                  <a:lnTo>
-                    <a:pt x="2005430" y="2639959"/>
-                  </a:lnTo>
-                  <a:lnTo>
-                    <a:pt x="1933808" y="2639602"/>
-                  </a:lnTo>
-                  <a:lnTo>
-                    <a:pt x="1862185" y="2639244"/>
-                  </a:lnTo>
-                  <a:lnTo>
-                    <a:pt x="1790563" y="2638886"/>
-                  </a:lnTo>
-                  <a:lnTo>
-                    <a:pt x="1718940" y="2638528"/>
-                  </a:lnTo>
-                  <a:lnTo>
-                    <a:pt x="1647318" y="2638170"/>
-                  </a:lnTo>
-                  <a:lnTo>
-                    <a:pt x="1575695" y="2637812"/>
-                  </a:lnTo>
-                  <a:lnTo>
-                    <a:pt x="1504073" y="2637453"/>
-                  </a:lnTo>
-                  <a:lnTo>
-                    <a:pt x="1432450" y="2637095"/>
-                  </a:lnTo>
-                  <a:lnTo>
-                    <a:pt x="1360827" y="2636736"/>
-                  </a:lnTo>
-                  <a:lnTo>
-                    <a:pt x="1289205" y="2636377"/>
-                  </a:lnTo>
-                  <a:lnTo>
-                    <a:pt x="1217582" y="2636018"/>
-                  </a:lnTo>
-                  <a:lnTo>
-                    <a:pt x="1145960" y="2635659"/>
-                  </a:lnTo>
-                  <a:lnTo>
-                    <a:pt x="1074337" y="2635299"/>
-                  </a:lnTo>
-                  <a:lnTo>
-                    <a:pt x="1002715" y="2634940"/>
-                  </a:lnTo>
-                  <a:lnTo>
-                    <a:pt x="931092" y="2634580"/>
-                  </a:lnTo>
-                  <a:lnTo>
-                    <a:pt x="859470" y="2634220"/>
-                  </a:lnTo>
-                  <a:lnTo>
-                    <a:pt x="787847" y="2633860"/>
-                  </a:lnTo>
-                  <a:lnTo>
-                    <a:pt x="716225" y="2633500"/>
-                  </a:lnTo>
-                  <a:lnTo>
-                    <a:pt x="644602" y="2633140"/>
-                  </a:lnTo>
-                  <a:lnTo>
-                    <a:pt x="572980" y="2632779"/>
-                  </a:lnTo>
-                  <a:lnTo>
-                    <a:pt x="501357" y="2632419"/>
-                  </a:lnTo>
-                  <a:lnTo>
-                    <a:pt x="429735" y="2632058"/>
-                  </a:lnTo>
-                  <a:lnTo>
-                    <a:pt x="358112" y="2631697"/>
-                  </a:lnTo>
-                  <a:lnTo>
-                    <a:pt x="286490" y="2631336"/>
-                  </a:lnTo>
-                  <a:lnTo>
-                    <a:pt x="214867" y="2630975"/>
-                  </a:lnTo>
-                  <a:lnTo>
-                    <a:pt x="143245" y="2630613"/>
-                  </a:lnTo>
-                  <a:lnTo>
-                    <a:pt x="71622" y="2630252"/>
-                  </a:lnTo>
-                  <a:lnTo>
-                    <a:pt x="0" y="2629890"/>
+                    <a:pt x="3079768" y="51323"/>
+                  </a:lnTo>
+                  <a:lnTo>
+                    <a:pt x="3151391" y="237907"/>
+                  </a:lnTo>
+                  <a:lnTo>
+                    <a:pt x="3223013" y="414348"/>
+                  </a:lnTo>
+                  <a:lnTo>
+                    <a:pt x="3294636" y="581198"/>
+                  </a:lnTo>
+                  <a:lnTo>
+                    <a:pt x="3366258" y="738978"/>
+                  </a:lnTo>
+                  <a:lnTo>
+                    <a:pt x="3437881" y="888182"/>
+                  </a:lnTo>
+                  <a:lnTo>
+                    <a:pt x="3509503" y="1029274"/>
+                  </a:lnTo>
+                  <a:lnTo>
+                    <a:pt x="3581126" y="1162698"/>
+                  </a:lnTo>
+                  <a:lnTo>
+                    <a:pt x="3652748" y="1288868"/>
+                  </a:lnTo>
+                  <a:lnTo>
+                    <a:pt x="3724371" y="1408180"/>
+                  </a:lnTo>
+                  <a:lnTo>
+                    <a:pt x="3795993" y="1521006"/>
+                  </a:lnTo>
+                  <a:lnTo>
+                    <a:pt x="3867616" y="1627699"/>
+                  </a:lnTo>
+                  <a:lnTo>
+                    <a:pt x="3939238" y="1728592"/>
+                  </a:lnTo>
+                  <a:lnTo>
+                    <a:pt x="4010861" y="1824001"/>
+                  </a:lnTo>
+                  <a:lnTo>
+                    <a:pt x="4082483" y="1914223"/>
+                  </a:lnTo>
+                  <a:lnTo>
+                    <a:pt x="4154106" y="1999541"/>
+                  </a:lnTo>
+                  <a:lnTo>
+                    <a:pt x="4225729" y="2080221"/>
+                  </a:lnTo>
+                  <a:lnTo>
+                    <a:pt x="4297351" y="2156516"/>
+                  </a:lnTo>
+                  <a:lnTo>
+                    <a:pt x="4368974" y="2228663"/>
+                  </a:lnTo>
+                  <a:lnTo>
+                    <a:pt x="4440596" y="2296888"/>
+                  </a:lnTo>
+                  <a:lnTo>
+                    <a:pt x="4512219" y="2361405"/>
+                  </a:lnTo>
+                  <a:lnTo>
+                    <a:pt x="4583841" y="2422415"/>
+                  </a:lnTo>
+                  <a:lnTo>
+                    <a:pt x="4655464" y="2480108"/>
+                  </a:lnTo>
+                  <a:lnTo>
+                    <a:pt x="4727086" y="2534665"/>
+                  </a:lnTo>
+                  <a:lnTo>
+                    <a:pt x="4798709" y="2586256"/>
+                  </a:lnTo>
+                  <a:lnTo>
+                    <a:pt x="4870331" y="2635043"/>
+                  </a:lnTo>
+                  <a:lnTo>
+                    <a:pt x="4941954" y="2656665"/>
+                  </a:lnTo>
+                  <a:lnTo>
+                    <a:pt x="5013576" y="2660688"/>
+                  </a:lnTo>
+                  <a:lnTo>
+                    <a:pt x="5085199" y="2664692"/>
+                  </a:lnTo>
+                  <a:lnTo>
+                    <a:pt x="5156821" y="2668677"/>
+                  </a:lnTo>
+                  <a:lnTo>
+                    <a:pt x="5228444" y="2672642"/>
+                  </a:lnTo>
+                  <a:lnTo>
+                    <a:pt x="5300066" y="2676588"/>
+                  </a:lnTo>
+                  <a:lnTo>
+                    <a:pt x="5371689" y="2680515"/>
+                  </a:lnTo>
+                  <a:lnTo>
+                    <a:pt x="5443311" y="2684422"/>
+                  </a:lnTo>
+                  <a:lnTo>
+                    <a:pt x="5514934" y="2688311"/>
+                  </a:lnTo>
+                  <a:lnTo>
+                    <a:pt x="5586557" y="2692180"/>
+                  </a:lnTo>
+                  <a:lnTo>
+                    <a:pt x="5658179" y="2696031"/>
+                  </a:lnTo>
+                  <a:lnTo>
+                    <a:pt x="5729802" y="2699863"/>
+                  </a:lnTo>
+                  <a:lnTo>
+                    <a:pt x="5801424" y="2703676"/>
+                  </a:lnTo>
+                  <a:lnTo>
+                    <a:pt x="5873047" y="2707471"/>
+                  </a:lnTo>
+                  <a:lnTo>
+                    <a:pt x="5944669" y="2711248"/>
+                  </a:lnTo>
+                  <a:lnTo>
+                    <a:pt x="6016292" y="2715006"/>
+                  </a:lnTo>
+                  <a:lnTo>
+                    <a:pt x="6087914" y="2718746"/>
+                  </a:lnTo>
+                  <a:lnTo>
+                    <a:pt x="6159537" y="2722467"/>
+                  </a:lnTo>
+                  <a:lnTo>
+                    <a:pt x="6231159" y="2726171"/>
+                  </a:lnTo>
+                  <a:lnTo>
+                    <a:pt x="6302782" y="2729856"/>
+                  </a:lnTo>
+                  <a:lnTo>
+                    <a:pt x="6374404" y="2733523"/>
+                  </a:lnTo>
+                  <a:lnTo>
+                    <a:pt x="6446027" y="2737173"/>
+                  </a:lnTo>
+                  <a:lnTo>
+                    <a:pt x="6517649" y="2740805"/>
+                  </a:lnTo>
+                  <a:lnTo>
+                    <a:pt x="6589272" y="2744419"/>
+                  </a:lnTo>
+                  <a:lnTo>
+                    <a:pt x="6660894" y="2748016"/>
+                  </a:lnTo>
+                  <a:lnTo>
+                    <a:pt x="6732517" y="2751595"/>
+                  </a:lnTo>
+                  <a:lnTo>
+                    <a:pt x="6804139" y="2755157"/>
+                  </a:lnTo>
+                  <a:lnTo>
+                    <a:pt x="6875762" y="2758701"/>
+                  </a:lnTo>
+                  <a:lnTo>
+                    <a:pt x="6947385" y="2762228"/>
+                  </a:lnTo>
+                  <a:lnTo>
+                    <a:pt x="7019007" y="2765738"/>
+                  </a:lnTo>
+                  <a:lnTo>
+                    <a:pt x="7090630" y="2769231"/>
+                  </a:lnTo>
+                  <a:lnTo>
+                    <a:pt x="7090630" y="3333685"/>
+                  </a:lnTo>
+                  <a:lnTo>
+                    <a:pt x="7019007" y="3325059"/>
+                  </a:lnTo>
+                  <a:lnTo>
+                    <a:pt x="6947385" y="3315937"/>
+                  </a:lnTo>
+                  <a:lnTo>
+                    <a:pt x="6875762" y="3306291"/>
+                  </a:lnTo>
+                  <a:lnTo>
+                    <a:pt x="6804139" y="3296090"/>
+                  </a:lnTo>
+                  <a:lnTo>
+                    <a:pt x="6732517" y="3285303"/>
+                  </a:lnTo>
+                  <a:lnTo>
+                    <a:pt x="6660894" y="3273895"/>
+                  </a:lnTo>
+                  <a:lnTo>
+                    <a:pt x="6589272" y="3261832"/>
+                  </a:lnTo>
+                  <a:lnTo>
+                    <a:pt x="6517649" y="3249076"/>
+                  </a:lnTo>
+                  <a:lnTo>
+                    <a:pt x="6446027" y="3235586"/>
+                  </a:lnTo>
+                  <a:lnTo>
+                    <a:pt x="6374404" y="3221321"/>
+                  </a:lnTo>
+                  <a:lnTo>
+                    <a:pt x="6302782" y="3206235"/>
+                  </a:lnTo>
+                  <a:lnTo>
+                    <a:pt x="6231159" y="3190283"/>
+                  </a:lnTo>
+                  <a:lnTo>
+                    <a:pt x="6159537" y="3173414"/>
+                  </a:lnTo>
+                  <a:lnTo>
+                    <a:pt x="6087914" y="3155574"/>
+                  </a:lnTo>
+                  <a:lnTo>
+                    <a:pt x="6016292" y="3136710"/>
+                  </a:lnTo>
+                  <a:lnTo>
+                    <a:pt x="5944669" y="3116761"/>
+                  </a:lnTo>
+                  <a:lnTo>
+                    <a:pt x="5873047" y="3095665"/>
+                  </a:lnTo>
+                  <a:lnTo>
+                    <a:pt x="5801424" y="3073356"/>
+                  </a:lnTo>
+                  <a:lnTo>
+                    <a:pt x="5729802" y="3049766"/>
+                  </a:lnTo>
+                  <a:lnTo>
+                    <a:pt x="5658179" y="3024819"/>
+                  </a:lnTo>
+                  <a:lnTo>
+                    <a:pt x="5586557" y="2998438"/>
+                  </a:lnTo>
+                  <a:lnTo>
+                    <a:pt x="5514934" y="2970540"/>
+                  </a:lnTo>
+                  <a:lnTo>
+                    <a:pt x="5443311" y="2941039"/>
+                  </a:lnTo>
+                  <a:lnTo>
+                    <a:pt x="5371689" y="2909842"/>
+                  </a:lnTo>
+                  <a:lnTo>
+                    <a:pt x="5300066" y="2876852"/>
+                  </a:lnTo>
+                  <a:lnTo>
+                    <a:pt x="5228444" y="2841965"/>
+                  </a:lnTo>
+                  <a:lnTo>
+                    <a:pt x="5156821" y="2805073"/>
+                  </a:lnTo>
+                  <a:lnTo>
+                    <a:pt x="5085199" y="2766060"/>
+                  </a:lnTo>
+                  <a:lnTo>
+                    <a:pt x="5013576" y="2724805"/>
+                  </a:lnTo>
+                  <a:lnTo>
+                    <a:pt x="4941954" y="2681178"/>
+                  </a:lnTo>
+                  <a:lnTo>
+                    <a:pt x="4870331" y="2652622"/>
+                  </a:lnTo>
+                  <a:lnTo>
+                    <a:pt x="4798709" y="2648559"/>
+                  </a:lnTo>
+                  <a:lnTo>
+                    <a:pt x="4727086" y="2644476"/>
+                  </a:lnTo>
+                  <a:lnTo>
+                    <a:pt x="4655464" y="2640373"/>
+                  </a:lnTo>
+                  <a:lnTo>
+                    <a:pt x="4583841" y="2636250"/>
+                  </a:lnTo>
+                  <a:lnTo>
+                    <a:pt x="4512219" y="2632107"/>
+                  </a:lnTo>
+                  <a:lnTo>
+                    <a:pt x="4440596" y="2627944"/>
+                  </a:lnTo>
+                  <a:lnTo>
+                    <a:pt x="4368974" y="2623760"/>
+                  </a:lnTo>
+                  <a:lnTo>
+                    <a:pt x="4297351" y="2619556"/>
+                  </a:lnTo>
+                  <a:lnTo>
+                    <a:pt x="4225729" y="2615331"/>
+                  </a:lnTo>
+                  <a:lnTo>
+                    <a:pt x="4154106" y="2611086"/>
+                  </a:lnTo>
+                  <a:lnTo>
+                    <a:pt x="4082483" y="2606820"/>
+                  </a:lnTo>
+                  <a:lnTo>
+                    <a:pt x="4010861" y="2602533"/>
+                  </a:lnTo>
+                  <a:lnTo>
+                    <a:pt x="3939238" y="2598225"/>
+                  </a:lnTo>
+                  <a:lnTo>
+                    <a:pt x="3867616" y="2593896"/>
+                  </a:lnTo>
+                  <a:lnTo>
+                    <a:pt x="3795993" y="2589546"/>
+                  </a:lnTo>
+                  <a:lnTo>
+                    <a:pt x="3724371" y="2585175"/>
+                  </a:lnTo>
+                  <a:lnTo>
+                    <a:pt x="3652748" y="2580782"/>
+                  </a:lnTo>
+                  <a:lnTo>
+                    <a:pt x="3581126" y="2576368"/>
+                  </a:lnTo>
+                  <a:lnTo>
+                    <a:pt x="3509503" y="2571932"/>
+                  </a:lnTo>
+                  <a:lnTo>
+                    <a:pt x="3437881" y="2567475"/>
+                  </a:lnTo>
+                  <a:lnTo>
+                    <a:pt x="3366258" y="2562996"/>
+                  </a:lnTo>
+                  <a:lnTo>
+                    <a:pt x="3294636" y="2558495"/>
+                  </a:lnTo>
+                  <a:lnTo>
+                    <a:pt x="3223013" y="2553971"/>
+                  </a:lnTo>
+                  <a:lnTo>
+                    <a:pt x="3151391" y="2549426"/>
+                  </a:lnTo>
+                  <a:lnTo>
+                    <a:pt x="3079768" y="2544859"/>
+                  </a:lnTo>
+                  <a:lnTo>
+                    <a:pt x="3008146" y="2540269"/>
+                  </a:lnTo>
+                  <a:lnTo>
+                    <a:pt x="2936523" y="2535657"/>
+                  </a:lnTo>
+                  <a:lnTo>
+                    <a:pt x="2864901" y="2531022"/>
+                  </a:lnTo>
+                  <a:lnTo>
+                    <a:pt x="2793278" y="2526364"/>
+                  </a:lnTo>
+                  <a:lnTo>
+                    <a:pt x="2721655" y="2521684"/>
+                  </a:lnTo>
+                  <a:lnTo>
+                    <a:pt x="2650033" y="2516981"/>
+                  </a:lnTo>
+                  <a:lnTo>
+                    <a:pt x="2578410" y="2512255"/>
+                  </a:lnTo>
+                  <a:lnTo>
+                    <a:pt x="2506788" y="2507506"/>
+                  </a:lnTo>
+                  <a:lnTo>
+                    <a:pt x="2435165" y="2502733"/>
+                  </a:lnTo>
+                  <a:lnTo>
+                    <a:pt x="2363543" y="2497938"/>
+                  </a:lnTo>
+                  <a:lnTo>
+                    <a:pt x="2291920" y="2493119"/>
+                  </a:lnTo>
+                  <a:lnTo>
+                    <a:pt x="2220298" y="2488276"/>
+                  </a:lnTo>
+                  <a:lnTo>
+                    <a:pt x="2148675" y="2483409"/>
+                  </a:lnTo>
+                  <a:lnTo>
+                    <a:pt x="2077053" y="2478519"/>
+                  </a:lnTo>
+                  <a:lnTo>
+                    <a:pt x="2005430" y="2473605"/>
+                  </a:lnTo>
+                  <a:lnTo>
+                    <a:pt x="1933808" y="2468667"/>
+                  </a:lnTo>
+                  <a:lnTo>
+                    <a:pt x="1862185" y="2463705"/>
+                  </a:lnTo>
+                  <a:lnTo>
+                    <a:pt x="1790563" y="2458718"/>
+                  </a:lnTo>
+                  <a:lnTo>
+                    <a:pt x="1718940" y="2453707"/>
+                  </a:lnTo>
+                  <a:lnTo>
+                    <a:pt x="1647318" y="2448672"/>
+                  </a:lnTo>
+                  <a:lnTo>
+                    <a:pt x="1575695" y="2443612"/>
+                  </a:lnTo>
+                  <a:lnTo>
+                    <a:pt x="1504073" y="2438527"/>
+                  </a:lnTo>
+                  <a:lnTo>
+                    <a:pt x="1432450" y="2433418"/>
+                  </a:lnTo>
+                  <a:lnTo>
+                    <a:pt x="1360827" y="2428283"/>
+                  </a:lnTo>
+                  <a:lnTo>
+                    <a:pt x="1289205" y="2423123"/>
+                  </a:lnTo>
+                  <a:lnTo>
+                    <a:pt x="1217582" y="2417938"/>
+                  </a:lnTo>
+                  <a:lnTo>
+                    <a:pt x="1145960" y="2412728"/>
+                  </a:lnTo>
+                  <a:lnTo>
+                    <a:pt x="1074337" y="2407492"/>
+                  </a:lnTo>
+                  <a:lnTo>
+                    <a:pt x="1002715" y="2402231"/>
+                  </a:lnTo>
+                  <a:lnTo>
+                    <a:pt x="931092" y="2396944"/>
+                  </a:lnTo>
+                  <a:lnTo>
+                    <a:pt x="859470" y="2391631"/>
+                  </a:lnTo>
+                  <a:lnTo>
+                    <a:pt x="787847" y="2386292"/>
+                  </a:lnTo>
+                  <a:lnTo>
+                    <a:pt x="716225" y="2380927"/>
+                  </a:lnTo>
+                  <a:lnTo>
+                    <a:pt x="644602" y="2375536"/>
+                  </a:lnTo>
+                  <a:lnTo>
+                    <a:pt x="572980" y="2370119"/>
+                  </a:lnTo>
+                  <a:lnTo>
+                    <a:pt x="501357" y="2364675"/>
+                  </a:lnTo>
+                  <a:lnTo>
+                    <a:pt x="429735" y="2359204"/>
+                  </a:lnTo>
+                  <a:lnTo>
+                    <a:pt x="358112" y="2353707"/>
+                  </a:lnTo>
+                  <a:lnTo>
+                    <a:pt x="286490" y="2348182"/>
+                  </a:lnTo>
+                  <a:lnTo>
+                    <a:pt x="214867" y="2342631"/>
+                  </a:lnTo>
+                  <a:lnTo>
+                    <a:pt x="143245" y="2337053"/>
+                  </a:lnTo>
+                  <a:lnTo>
+                    <a:pt x="71622" y="2331447"/>
+                  </a:lnTo>
+                  <a:lnTo>
+                    <a:pt x="0" y="2325814"/>
                   </a:lnTo>
                   <a:lnTo>
                     <a:pt x="0" y="0"/>
@@ -3510,186 +3510,186 @@
           </p:nvSpPr>
           <p:spPr>
             <a:xfrm>
-              <a:off x="4244871" y="2073503"/>
-              <a:ext cx="4017807" cy="2664963"/>
+              <a:off x="4233187" y="2073503"/>
+              <a:ext cx="4029491" cy="2769231"/>
             </a:xfrm>
             <a:custGeom>
               <a:avLst/>
               <a:pathLst>
-                <a:path w="4017807" h="2664963">
+                <a:path w="4029491" h="2769231">
                   <a:moveTo>
                     <a:pt x="0" y="0"/>
                   </a:moveTo>
                   <a:lnTo>
-                    <a:pt x="6946" y="19442"/>
-                  </a:lnTo>
-                  <a:lnTo>
-                    <a:pt x="78568" y="208951"/>
-                  </a:lnTo>
-                  <a:lnTo>
-                    <a:pt x="150191" y="388092"/>
-                  </a:lnTo>
-                  <a:lnTo>
-                    <a:pt x="221813" y="557435"/>
-                  </a:lnTo>
-                  <a:lnTo>
-                    <a:pt x="293436" y="717513"/>
-                  </a:lnTo>
-                  <a:lnTo>
-                    <a:pt x="365058" y="868835"/>
-                  </a:lnTo>
-                  <a:lnTo>
-                    <a:pt x="436681" y="1011879"/>
-                  </a:lnTo>
-                  <a:lnTo>
-                    <a:pt x="508303" y="1147098"/>
-                  </a:lnTo>
-                  <a:lnTo>
-                    <a:pt x="579926" y="1274920"/>
-                  </a:lnTo>
-                  <a:lnTo>
-                    <a:pt x="651548" y="1395750"/>
-                  </a:lnTo>
-                  <a:lnTo>
-                    <a:pt x="723171" y="1509970"/>
-                  </a:lnTo>
-                  <a:lnTo>
-                    <a:pt x="794793" y="1617942"/>
-                  </a:lnTo>
-                  <a:lnTo>
-                    <a:pt x="866416" y="1720007"/>
-                  </a:lnTo>
-                  <a:lnTo>
-                    <a:pt x="938039" y="1816489"/>
-                  </a:lnTo>
-                  <a:lnTo>
-                    <a:pt x="1009661" y="1907694"/>
-                  </a:lnTo>
-                  <a:lnTo>
-                    <a:pt x="1081284" y="1993909"/>
-                  </a:lnTo>
-                  <a:lnTo>
-                    <a:pt x="1152906" y="2075408"/>
-                  </a:lnTo>
-                  <a:lnTo>
-                    <a:pt x="1224529" y="2152448"/>
-                  </a:lnTo>
-                  <a:lnTo>
-                    <a:pt x="1296151" y="2225275"/>
-                  </a:lnTo>
-                  <a:lnTo>
-                    <a:pt x="1367774" y="2294117"/>
-                  </a:lnTo>
-                  <a:lnTo>
-                    <a:pt x="1439396" y="2359194"/>
-                  </a:lnTo>
-                  <a:lnTo>
-                    <a:pt x="1511019" y="2420710"/>
-                  </a:lnTo>
-                  <a:lnTo>
-                    <a:pt x="1582641" y="2478862"/>
-                  </a:lnTo>
-                  <a:lnTo>
-                    <a:pt x="1654264" y="2533832"/>
-                  </a:lnTo>
-                  <a:lnTo>
-                    <a:pt x="1725886" y="2585795"/>
-                  </a:lnTo>
-                  <a:lnTo>
-                    <a:pt x="1797509" y="2634916"/>
-                  </a:lnTo>
-                  <a:lnTo>
-                    <a:pt x="1869131" y="2654490"/>
-                  </a:lnTo>
-                  <a:lnTo>
-                    <a:pt x="1940754" y="2654841"/>
-                  </a:lnTo>
-                  <a:lnTo>
-                    <a:pt x="2012376" y="2655192"/>
-                  </a:lnTo>
-                  <a:lnTo>
-                    <a:pt x="2083999" y="2655543"/>
-                  </a:lnTo>
-                  <a:lnTo>
-                    <a:pt x="2155621" y="2655894"/>
-                  </a:lnTo>
-                  <a:lnTo>
-                    <a:pt x="2227244" y="2656245"/>
-                  </a:lnTo>
-                  <a:lnTo>
-                    <a:pt x="2298867" y="2656595"/>
-                  </a:lnTo>
-                  <a:lnTo>
-                    <a:pt x="2370489" y="2656946"/>
-                  </a:lnTo>
-                  <a:lnTo>
-                    <a:pt x="2442112" y="2657296"/>
-                  </a:lnTo>
-                  <a:lnTo>
-                    <a:pt x="2513734" y="2657646"/>
-                  </a:lnTo>
-                  <a:lnTo>
-                    <a:pt x="2585357" y="2657996"/>
-                  </a:lnTo>
-                  <a:lnTo>
-                    <a:pt x="2656979" y="2658346"/>
-                  </a:lnTo>
-                  <a:lnTo>
-                    <a:pt x="2728602" y="2658695"/>
-                  </a:lnTo>
-                  <a:lnTo>
-                    <a:pt x="2800224" y="2659045"/>
-                  </a:lnTo>
-                  <a:lnTo>
-                    <a:pt x="2871847" y="2659394"/>
-                  </a:lnTo>
-                  <a:lnTo>
-                    <a:pt x="2943469" y="2659743"/>
-                  </a:lnTo>
-                  <a:lnTo>
-                    <a:pt x="3015092" y="2660092"/>
-                  </a:lnTo>
-                  <a:lnTo>
-                    <a:pt x="3086714" y="2660441"/>
-                  </a:lnTo>
-                  <a:lnTo>
-                    <a:pt x="3158337" y="2660790"/>
-                  </a:lnTo>
-                  <a:lnTo>
-                    <a:pt x="3229959" y="2661139"/>
-                  </a:lnTo>
-                  <a:lnTo>
-                    <a:pt x="3301582" y="2661487"/>
-                  </a:lnTo>
-                  <a:lnTo>
-                    <a:pt x="3373204" y="2661835"/>
-                  </a:lnTo>
-                  <a:lnTo>
-                    <a:pt x="3444827" y="2662184"/>
-                  </a:lnTo>
-                  <a:lnTo>
-                    <a:pt x="3516449" y="2662532"/>
-                  </a:lnTo>
-                  <a:lnTo>
-                    <a:pt x="3588072" y="2662879"/>
-                  </a:lnTo>
-                  <a:lnTo>
-                    <a:pt x="3659695" y="2663227"/>
-                  </a:lnTo>
-                  <a:lnTo>
-                    <a:pt x="3731317" y="2663575"/>
-                  </a:lnTo>
-                  <a:lnTo>
-                    <a:pt x="3802940" y="2663922"/>
-                  </a:lnTo>
-                  <a:lnTo>
-                    <a:pt x="3874562" y="2664269"/>
-                  </a:lnTo>
-                  <a:lnTo>
-                    <a:pt x="3946185" y="2664616"/>
-                  </a:lnTo>
-                  <a:lnTo>
-                    <a:pt x="4017807" y="2664963"/>
+                    <a:pt x="18630" y="51323"/>
+                  </a:lnTo>
+                  <a:lnTo>
+                    <a:pt x="90252" y="237907"/>
+                  </a:lnTo>
+                  <a:lnTo>
+                    <a:pt x="161875" y="414348"/>
+                  </a:lnTo>
+                  <a:lnTo>
+                    <a:pt x="233497" y="581198"/>
+                  </a:lnTo>
+                  <a:lnTo>
+                    <a:pt x="305120" y="738978"/>
+                  </a:lnTo>
+                  <a:lnTo>
+                    <a:pt x="376742" y="888182"/>
+                  </a:lnTo>
+                  <a:lnTo>
+                    <a:pt x="448365" y="1029274"/>
+                  </a:lnTo>
+                  <a:lnTo>
+                    <a:pt x="519988" y="1162698"/>
+                  </a:lnTo>
+                  <a:lnTo>
+                    <a:pt x="591610" y="1288868"/>
+                  </a:lnTo>
+                  <a:lnTo>
+                    <a:pt x="663233" y="1408180"/>
+                  </a:lnTo>
+                  <a:lnTo>
+                    <a:pt x="734855" y="1521006"/>
+                  </a:lnTo>
+                  <a:lnTo>
+                    <a:pt x="806478" y="1627699"/>
+                  </a:lnTo>
+                  <a:lnTo>
+                    <a:pt x="878100" y="1728592"/>
+                  </a:lnTo>
+                  <a:lnTo>
+                    <a:pt x="949723" y="1824001"/>
+                  </a:lnTo>
+                  <a:lnTo>
+                    <a:pt x="1021345" y="1914223"/>
+                  </a:lnTo>
+                  <a:lnTo>
+                    <a:pt x="1092968" y="1999541"/>
+                  </a:lnTo>
+                  <a:lnTo>
+                    <a:pt x="1164590" y="2080221"/>
+                  </a:lnTo>
+                  <a:lnTo>
+                    <a:pt x="1236213" y="2156516"/>
+                  </a:lnTo>
+                  <a:lnTo>
+                    <a:pt x="1307835" y="2228663"/>
+                  </a:lnTo>
+                  <a:lnTo>
+                    <a:pt x="1379458" y="2296888"/>
+                  </a:lnTo>
+                  <a:lnTo>
+                    <a:pt x="1451080" y="2361405"/>
+                  </a:lnTo>
+                  <a:lnTo>
+                    <a:pt x="1522703" y="2422415"/>
+                  </a:lnTo>
+                  <a:lnTo>
+                    <a:pt x="1594325" y="2480108"/>
+                  </a:lnTo>
+                  <a:lnTo>
+                    <a:pt x="1665948" y="2534665"/>
+                  </a:lnTo>
+                  <a:lnTo>
+                    <a:pt x="1737570" y="2586256"/>
+                  </a:lnTo>
+                  <a:lnTo>
+                    <a:pt x="1809193" y="2635043"/>
+                  </a:lnTo>
+                  <a:lnTo>
+                    <a:pt x="1880816" y="2656665"/>
+                  </a:lnTo>
+                  <a:lnTo>
+                    <a:pt x="1952438" y="2660688"/>
+                  </a:lnTo>
+                  <a:lnTo>
+                    <a:pt x="2024061" y="2664692"/>
+                  </a:lnTo>
+                  <a:lnTo>
+                    <a:pt x="2095683" y="2668677"/>
+                  </a:lnTo>
+                  <a:lnTo>
+                    <a:pt x="2167306" y="2672642"/>
+                  </a:lnTo>
+                  <a:lnTo>
+                    <a:pt x="2238928" y="2676588"/>
+                  </a:lnTo>
+                  <a:lnTo>
+                    <a:pt x="2310551" y="2680515"/>
+                  </a:lnTo>
+                  <a:lnTo>
+                    <a:pt x="2382173" y="2684422"/>
+                  </a:lnTo>
+                  <a:lnTo>
+                    <a:pt x="2453796" y="2688311"/>
+                  </a:lnTo>
+                  <a:lnTo>
+                    <a:pt x="2525418" y="2692180"/>
+                  </a:lnTo>
+                  <a:lnTo>
+                    <a:pt x="2597041" y="2696031"/>
+                  </a:lnTo>
+                  <a:lnTo>
+                    <a:pt x="2668663" y="2699863"/>
+                  </a:lnTo>
+                  <a:lnTo>
+                    <a:pt x="2740286" y="2703676"/>
+                  </a:lnTo>
+                  <a:lnTo>
+                    <a:pt x="2811908" y="2707471"/>
+                  </a:lnTo>
+                  <a:lnTo>
+                    <a:pt x="2883531" y="2711248"/>
+                  </a:lnTo>
+                  <a:lnTo>
+                    <a:pt x="2955153" y="2715006"/>
+                  </a:lnTo>
+                  <a:lnTo>
+                    <a:pt x="3026776" y="2718746"/>
+                  </a:lnTo>
+                  <a:lnTo>
+                    <a:pt x="3098398" y="2722467"/>
+                  </a:lnTo>
+                  <a:lnTo>
+                    <a:pt x="3170021" y="2726171"/>
+                  </a:lnTo>
+                  <a:lnTo>
+                    <a:pt x="3241644" y="2729856"/>
+                  </a:lnTo>
+                  <a:lnTo>
+                    <a:pt x="3313266" y="2733523"/>
+                  </a:lnTo>
+                  <a:lnTo>
+                    <a:pt x="3384889" y="2737173"/>
+                  </a:lnTo>
+                  <a:lnTo>
+                    <a:pt x="3456511" y="2740805"/>
+                  </a:lnTo>
+                  <a:lnTo>
+                    <a:pt x="3528134" y="2744419"/>
+                  </a:lnTo>
+                  <a:lnTo>
+                    <a:pt x="3599756" y="2748016"/>
+                  </a:lnTo>
+                  <a:lnTo>
+                    <a:pt x="3671379" y="2751595"/>
+                  </a:lnTo>
+                  <a:lnTo>
+                    <a:pt x="3743001" y="2755157"/>
+                  </a:lnTo>
+                  <a:lnTo>
+                    <a:pt x="3814624" y="2758701"/>
+                  </a:lnTo>
+                  <a:lnTo>
+                    <a:pt x="3886246" y="2762228"/>
+                  </a:lnTo>
+                  <a:lnTo>
+                    <a:pt x="3957869" y="2765738"/>
+                  </a:lnTo>
+                  <a:lnTo>
+                    <a:pt x="4029491" y="2769231"/>
                   </a:lnTo>
                 </a:path>
               </a:pathLst>
@@ -3709,309 +3709,309 @@
           </p:nvSpPr>
           <p:spPr>
             <a:xfrm>
-              <a:off x="1172049" y="4703393"/>
-              <a:ext cx="7090630" cy="705455"/>
+              <a:off x="1172049" y="4399317"/>
+              <a:ext cx="7090630" cy="1007871"/>
             </a:xfrm>
             <a:custGeom>
               <a:avLst/>
               <a:pathLst>
-                <a:path w="7090630" h="705455">
+                <a:path w="7090630" h="1007871">
                   <a:moveTo>
-                    <a:pt x="7090630" y="705455"/>
+                    <a:pt x="7090630" y="1007871"/>
                   </a:moveTo>
                   <a:lnTo>
-                    <a:pt x="7019007" y="696868"/>
-                  </a:lnTo>
-                  <a:lnTo>
-                    <a:pt x="6947385" y="687783"/>
-                  </a:lnTo>
-                  <a:lnTo>
-                    <a:pt x="6875762" y="678173"/>
-                  </a:lnTo>
-                  <a:lnTo>
-                    <a:pt x="6804139" y="668006"/>
-                  </a:lnTo>
-                  <a:lnTo>
-                    <a:pt x="6732517" y="657251"/>
-                  </a:lnTo>
-                  <a:lnTo>
-                    <a:pt x="6660894" y="645874"/>
-                  </a:lnTo>
-                  <a:lnTo>
-                    <a:pt x="6589272" y="633838"/>
-                  </a:lnTo>
-                  <a:lnTo>
-                    <a:pt x="6517649" y="621106"/>
-                  </a:lnTo>
-                  <a:lnTo>
-                    <a:pt x="6446027" y="607637"/>
-                  </a:lnTo>
-                  <a:lnTo>
-                    <a:pt x="6374404" y="593389"/>
-                  </a:lnTo>
-                  <a:lnTo>
-                    <a:pt x="6302782" y="578316"/>
-                  </a:lnTo>
-                  <a:lnTo>
-                    <a:pt x="6231159" y="562371"/>
-                  </a:lnTo>
-                  <a:lnTo>
-                    <a:pt x="6159537" y="545503"/>
-                  </a:lnTo>
-                  <a:lnTo>
-                    <a:pt x="6087914" y="527659"/>
-                  </a:lnTo>
-                  <a:lnTo>
-                    <a:pt x="6016292" y="508782"/>
-                  </a:lnTo>
-                  <a:lnTo>
-                    <a:pt x="5944669" y="488813"/>
-                  </a:lnTo>
-                  <a:lnTo>
-                    <a:pt x="5873047" y="467688"/>
-                  </a:lnTo>
-                  <a:lnTo>
-                    <a:pt x="5801424" y="445341"/>
-                  </a:lnTo>
-                  <a:lnTo>
-                    <a:pt x="5729802" y="421701"/>
-                  </a:lnTo>
-                  <a:lnTo>
-                    <a:pt x="5658179" y="396693"/>
-                  </a:lnTo>
-                  <a:lnTo>
-                    <a:pt x="5586557" y="370237"/>
-                  </a:lnTo>
-                  <a:lnTo>
-                    <a:pt x="5514934" y="342251"/>
-                  </a:lnTo>
-                  <a:lnTo>
-                    <a:pt x="5443311" y="312645"/>
-                  </a:lnTo>
-                  <a:lnTo>
-                    <a:pt x="5371689" y="281326"/>
-                  </a:lnTo>
-                  <a:lnTo>
-                    <a:pt x="5300066" y="248194"/>
-                  </a:lnTo>
-                  <a:lnTo>
-                    <a:pt x="5228444" y="213145"/>
-                  </a:lnTo>
-                  <a:lnTo>
-                    <a:pt x="5156821" y="176068"/>
-                  </a:lnTo>
-                  <a:lnTo>
-                    <a:pt x="5085199" y="136845"/>
-                  </a:lnTo>
-                  <a:lnTo>
-                    <a:pt x="5013576" y="95353"/>
-                  </a:lnTo>
-                  <a:lnTo>
-                    <a:pt x="4941954" y="51459"/>
-                  </a:lnTo>
-                  <a:lnTo>
-                    <a:pt x="4870331" y="24248"/>
-                  </a:lnTo>
-                  <a:lnTo>
-                    <a:pt x="4798709" y="23896"/>
-                  </a:lnTo>
-                  <a:lnTo>
-                    <a:pt x="4727086" y="23545"/>
-                  </a:lnTo>
-                  <a:lnTo>
-                    <a:pt x="4655464" y="23193"/>
-                  </a:lnTo>
-                  <a:lnTo>
-                    <a:pt x="4583841" y="22841"/>
-                  </a:lnTo>
-                  <a:lnTo>
-                    <a:pt x="4512219" y="22489"/>
-                  </a:lnTo>
-                  <a:lnTo>
-                    <a:pt x="4440596" y="22136"/>
-                  </a:lnTo>
-                  <a:lnTo>
-                    <a:pt x="4368974" y="21784"/>
-                  </a:lnTo>
-                  <a:lnTo>
-                    <a:pt x="4297351" y="21431"/>
-                  </a:lnTo>
-                  <a:lnTo>
-                    <a:pt x="4225729" y="21079"/>
-                  </a:lnTo>
-                  <a:lnTo>
-                    <a:pt x="4154106" y="20726"/>
-                  </a:lnTo>
-                  <a:lnTo>
-                    <a:pt x="4082483" y="20373"/>
-                  </a:lnTo>
-                  <a:lnTo>
-                    <a:pt x="4010861" y="20019"/>
-                  </a:lnTo>
-                  <a:lnTo>
-                    <a:pt x="3939238" y="19666"/>
-                  </a:lnTo>
-                  <a:lnTo>
-                    <a:pt x="3867616" y="19313"/>
-                  </a:lnTo>
-                  <a:lnTo>
-                    <a:pt x="3795993" y="18959"/>
-                  </a:lnTo>
-                  <a:lnTo>
-                    <a:pt x="3724371" y="18605"/>
-                  </a:lnTo>
-                  <a:lnTo>
-                    <a:pt x="3652748" y="18251"/>
-                  </a:lnTo>
-                  <a:lnTo>
-                    <a:pt x="3581126" y="17897"/>
-                  </a:lnTo>
-                  <a:lnTo>
-                    <a:pt x="3509503" y="17543"/>
-                  </a:lnTo>
-                  <a:lnTo>
-                    <a:pt x="3437881" y="17188"/>
-                  </a:lnTo>
-                  <a:lnTo>
-                    <a:pt x="3366258" y="16834"/>
-                  </a:lnTo>
-                  <a:lnTo>
-                    <a:pt x="3294636" y="16479"/>
-                  </a:lnTo>
-                  <a:lnTo>
-                    <a:pt x="3223013" y="16124"/>
-                  </a:lnTo>
-                  <a:lnTo>
-                    <a:pt x="3151391" y="15769"/>
-                  </a:lnTo>
-                  <a:lnTo>
-                    <a:pt x="3079768" y="15414"/>
-                  </a:lnTo>
-                  <a:lnTo>
-                    <a:pt x="3008146" y="15059"/>
-                  </a:lnTo>
-                  <a:lnTo>
-                    <a:pt x="2936523" y="14703"/>
-                  </a:lnTo>
-                  <a:lnTo>
-                    <a:pt x="2864901" y="14348"/>
-                  </a:lnTo>
-                  <a:lnTo>
-                    <a:pt x="2793278" y="13992"/>
-                  </a:lnTo>
-                  <a:lnTo>
-                    <a:pt x="2721655" y="13636"/>
-                  </a:lnTo>
-                  <a:lnTo>
-                    <a:pt x="2650033" y="13280"/>
-                  </a:lnTo>
-                  <a:lnTo>
-                    <a:pt x="2578410" y="12924"/>
-                  </a:lnTo>
-                  <a:lnTo>
-                    <a:pt x="2506788" y="12568"/>
-                  </a:lnTo>
-                  <a:lnTo>
-                    <a:pt x="2435165" y="12211"/>
-                  </a:lnTo>
-                  <a:lnTo>
-                    <a:pt x="2363543" y="11854"/>
-                  </a:lnTo>
-                  <a:lnTo>
-                    <a:pt x="2291920" y="11498"/>
-                  </a:lnTo>
-                  <a:lnTo>
-                    <a:pt x="2220298" y="11141"/>
-                  </a:lnTo>
-                  <a:lnTo>
-                    <a:pt x="2148675" y="10784"/>
-                  </a:lnTo>
-                  <a:lnTo>
-                    <a:pt x="2077053" y="10426"/>
-                  </a:lnTo>
-                  <a:lnTo>
-                    <a:pt x="2005430" y="10069"/>
-                  </a:lnTo>
-                  <a:lnTo>
-                    <a:pt x="1933808" y="9711"/>
-                  </a:lnTo>
-                  <a:lnTo>
-                    <a:pt x="1862185" y="9354"/>
-                  </a:lnTo>
-                  <a:lnTo>
-                    <a:pt x="1790563" y="8996"/>
-                  </a:lnTo>
-                  <a:lnTo>
-                    <a:pt x="1718940" y="8638"/>
-                  </a:lnTo>
-                  <a:lnTo>
-                    <a:pt x="1647318" y="8280"/>
-                  </a:lnTo>
-                  <a:lnTo>
-                    <a:pt x="1575695" y="7921"/>
-                  </a:lnTo>
-                  <a:lnTo>
-                    <a:pt x="1504073" y="7563"/>
-                  </a:lnTo>
-                  <a:lnTo>
-                    <a:pt x="1432450" y="7204"/>
-                  </a:lnTo>
-                  <a:lnTo>
-                    <a:pt x="1360827" y="6845"/>
-                  </a:lnTo>
-                  <a:lnTo>
-                    <a:pt x="1289205" y="6486"/>
-                  </a:lnTo>
-                  <a:lnTo>
-                    <a:pt x="1217582" y="6127"/>
-                  </a:lnTo>
-                  <a:lnTo>
-                    <a:pt x="1145960" y="5768"/>
-                  </a:lnTo>
-                  <a:lnTo>
-                    <a:pt x="1074337" y="5409"/>
-                  </a:lnTo>
-                  <a:lnTo>
-                    <a:pt x="1002715" y="5049"/>
-                  </a:lnTo>
-                  <a:lnTo>
-                    <a:pt x="931092" y="4689"/>
-                  </a:lnTo>
-                  <a:lnTo>
-                    <a:pt x="859470" y="4330"/>
-                  </a:lnTo>
-                  <a:lnTo>
-                    <a:pt x="787847" y="3970"/>
-                  </a:lnTo>
-                  <a:lnTo>
-                    <a:pt x="716225" y="3609"/>
-                  </a:lnTo>
-                  <a:lnTo>
-                    <a:pt x="644602" y="3249"/>
-                  </a:lnTo>
-                  <a:lnTo>
-                    <a:pt x="572980" y="2889"/>
-                  </a:lnTo>
-                  <a:lnTo>
-                    <a:pt x="501357" y="2528"/>
-                  </a:lnTo>
-                  <a:lnTo>
-                    <a:pt x="429735" y="2167"/>
-                  </a:lnTo>
-                  <a:lnTo>
-                    <a:pt x="358112" y="1806"/>
-                  </a:lnTo>
-                  <a:lnTo>
-                    <a:pt x="286490" y="1445"/>
-                  </a:lnTo>
-                  <a:lnTo>
-                    <a:pt x="214867" y="1084"/>
-                  </a:lnTo>
-                  <a:lnTo>
-                    <a:pt x="143245" y="723"/>
-                  </a:lnTo>
-                  <a:lnTo>
-                    <a:pt x="71622" y="361"/>
+                    <a:pt x="7019007" y="999245"/>
+                  </a:lnTo>
+                  <a:lnTo>
+                    <a:pt x="6947385" y="990123"/>
+                  </a:lnTo>
+                  <a:lnTo>
+                    <a:pt x="6875762" y="980476"/>
+                  </a:lnTo>
+                  <a:lnTo>
+                    <a:pt x="6804139" y="970275"/>
+                  </a:lnTo>
+                  <a:lnTo>
+                    <a:pt x="6732517" y="959488"/>
+                  </a:lnTo>
+                  <a:lnTo>
+                    <a:pt x="6660894" y="948081"/>
+                  </a:lnTo>
+                  <a:lnTo>
+                    <a:pt x="6589272" y="936018"/>
+                  </a:lnTo>
+                  <a:lnTo>
+                    <a:pt x="6517649" y="923261"/>
+                  </a:lnTo>
+                  <a:lnTo>
+                    <a:pt x="6446027" y="909772"/>
+                  </a:lnTo>
+                  <a:lnTo>
+                    <a:pt x="6374404" y="895506"/>
+                  </a:lnTo>
+                  <a:lnTo>
+                    <a:pt x="6302782" y="880421"/>
+                  </a:lnTo>
+                  <a:lnTo>
+                    <a:pt x="6231159" y="864469"/>
+                  </a:lnTo>
+                  <a:lnTo>
+                    <a:pt x="6159537" y="847599"/>
+                  </a:lnTo>
+                  <a:lnTo>
+                    <a:pt x="6087914" y="829760"/>
+                  </a:lnTo>
+                  <a:lnTo>
+                    <a:pt x="6016292" y="810895"/>
+                  </a:lnTo>
+                  <a:lnTo>
+                    <a:pt x="5944669" y="790946"/>
+                  </a:lnTo>
+                  <a:lnTo>
+                    <a:pt x="5873047" y="769850"/>
+                  </a:lnTo>
+                  <a:lnTo>
+                    <a:pt x="5801424" y="747542"/>
+                  </a:lnTo>
+                  <a:lnTo>
+                    <a:pt x="5729802" y="723951"/>
+                  </a:lnTo>
+                  <a:lnTo>
+                    <a:pt x="5658179" y="699004"/>
+                  </a:lnTo>
+                  <a:lnTo>
+                    <a:pt x="5586557" y="672623"/>
+                  </a:lnTo>
+                  <a:lnTo>
+                    <a:pt x="5514934" y="644726"/>
+                  </a:lnTo>
+                  <a:lnTo>
+                    <a:pt x="5443311" y="615225"/>
+                  </a:lnTo>
+                  <a:lnTo>
+                    <a:pt x="5371689" y="584028"/>
+                  </a:lnTo>
+                  <a:lnTo>
+                    <a:pt x="5300066" y="551037"/>
+                  </a:lnTo>
+                  <a:lnTo>
+                    <a:pt x="5228444" y="516151"/>
+                  </a:lnTo>
+                  <a:lnTo>
+                    <a:pt x="5156821" y="479259"/>
+                  </a:lnTo>
+                  <a:lnTo>
+                    <a:pt x="5085199" y="440246"/>
+                  </a:lnTo>
+                  <a:lnTo>
+                    <a:pt x="5013576" y="398990"/>
+                  </a:lnTo>
+                  <a:lnTo>
+                    <a:pt x="4941954" y="355363"/>
+                  </a:lnTo>
+                  <a:lnTo>
+                    <a:pt x="4870331" y="326807"/>
+                  </a:lnTo>
+                  <a:lnTo>
+                    <a:pt x="4798709" y="322744"/>
+                  </a:lnTo>
+                  <a:lnTo>
+                    <a:pt x="4727086" y="318661"/>
+                  </a:lnTo>
+                  <a:lnTo>
+                    <a:pt x="4655464" y="314559"/>
+                  </a:lnTo>
+                  <a:lnTo>
+                    <a:pt x="4583841" y="310436"/>
+                  </a:lnTo>
+                  <a:lnTo>
+                    <a:pt x="4512219" y="306293"/>
+                  </a:lnTo>
+                  <a:lnTo>
+                    <a:pt x="4440596" y="302129"/>
+                  </a:lnTo>
+                  <a:lnTo>
+                    <a:pt x="4368974" y="297946"/>
+                  </a:lnTo>
+                  <a:lnTo>
+                    <a:pt x="4297351" y="293742"/>
+                  </a:lnTo>
+                  <a:lnTo>
+                    <a:pt x="4225729" y="289517"/>
+                  </a:lnTo>
+                  <a:lnTo>
+                    <a:pt x="4154106" y="285272"/>
+                  </a:lnTo>
+                  <a:lnTo>
+                    <a:pt x="4082483" y="281006"/>
+                  </a:lnTo>
+                  <a:lnTo>
+                    <a:pt x="4010861" y="276719"/>
+                  </a:lnTo>
+                  <a:lnTo>
+                    <a:pt x="3939238" y="272411"/>
+                  </a:lnTo>
+                  <a:lnTo>
+                    <a:pt x="3867616" y="268082"/>
+                  </a:lnTo>
+                  <a:lnTo>
+                    <a:pt x="3795993" y="263732"/>
+                  </a:lnTo>
+                  <a:lnTo>
+                    <a:pt x="3724371" y="259361"/>
+                  </a:lnTo>
+                  <a:lnTo>
+                    <a:pt x="3652748" y="254968"/>
+                  </a:lnTo>
+                  <a:lnTo>
+                    <a:pt x="3581126" y="250554"/>
+                  </a:lnTo>
+                  <a:lnTo>
+                    <a:pt x="3509503" y="246118"/>
+                  </a:lnTo>
+                  <a:lnTo>
+                    <a:pt x="3437881" y="241661"/>
+                  </a:lnTo>
+                  <a:lnTo>
+                    <a:pt x="3366258" y="237181"/>
+                  </a:lnTo>
+                  <a:lnTo>
+                    <a:pt x="3294636" y="232680"/>
+                  </a:lnTo>
+                  <a:lnTo>
+                    <a:pt x="3223013" y="228157"/>
+                  </a:lnTo>
+                  <a:lnTo>
+                    <a:pt x="3151391" y="223612"/>
+                  </a:lnTo>
+                  <a:lnTo>
+                    <a:pt x="3079768" y="219044"/>
+                  </a:lnTo>
+                  <a:lnTo>
+                    <a:pt x="3008146" y="214454"/>
+                  </a:lnTo>
+                  <a:lnTo>
+                    <a:pt x="2936523" y="209842"/>
+                  </a:lnTo>
+                  <a:lnTo>
+                    <a:pt x="2864901" y="205207"/>
+                  </a:lnTo>
+                  <a:lnTo>
+                    <a:pt x="2793278" y="200550"/>
+                  </a:lnTo>
+                  <a:lnTo>
+                    <a:pt x="2721655" y="195870"/>
+                  </a:lnTo>
+                  <a:lnTo>
+                    <a:pt x="2650033" y="191167"/>
+                  </a:lnTo>
+                  <a:lnTo>
+                    <a:pt x="2578410" y="186441"/>
+                  </a:lnTo>
+                  <a:lnTo>
+                    <a:pt x="2506788" y="181691"/>
+                  </a:lnTo>
+                  <a:lnTo>
+                    <a:pt x="2435165" y="176919"/>
+                  </a:lnTo>
+                  <a:lnTo>
+                    <a:pt x="2363543" y="172123"/>
+                  </a:lnTo>
+                  <a:lnTo>
+                    <a:pt x="2291920" y="167304"/>
+                  </a:lnTo>
+                  <a:lnTo>
+                    <a:pt x="2220298" y="162461"/>
+                  </a:lnTo>
+                  <a:lnTo>
+                    <a:pt x="2148675" y="157595"/>
+                  </a:lnTo>
+                  <a:lnTo>
+                    <a:pt x="2077053" y="152705"/>
+                  </a:lnTo>
+                  <a:lnTo>
+                    <a:pt x="2005430" y="147791"/>
+                  </a:lnTo>
+                  <a:lnTo>
+                    <a:pt x="1933808" y="142853"/>
+                  </a:lnTo>
+                  <a:lnTo>
+                    <a:pt x="1862185" y="137890"/>
+                  </a:lnTo>
+                  <a:lnTo>
+                    <a:pt x="1790563" y="132904"/>
+                  </a:lnTo>
+                  <a:lnTo>
+                    <a:pt x="1718940" y="127893"/>
+                  </a:lnTo>
+                  <a:lnTo>
+                    <a:pt x="1647318" y="122858"/>
+                  </a:lnTo>
+                  <a:lnTo>
+                    <a:pt x="1575695" y="117798"/>
+                  </a:lnTo>
+                  <a:lnTo>
+                    <a:pt x="1504073" y="112713"/>
+                  </a:lnTo>
+                  <a:lnTo>
+                    <a:pt x="1432450" y="107603"/>
+                  </a:lnTo>
+                  <a:lnTo>
+                    <a:pt x="1360827" y="102469"/>
+                  </a:lnTo>
+                  <a:lnTo>
+                    <a:pt x="1289205" y="97309"/>
+                  </a:lnTo>
+                  <a:lnTo>
+                    <a:pt x="1217582" y="92124"/>
+                  </a:lnTo>
+                  <a:lnTo>
+                    <a:pt x="1145960" y="86914"/>
+                  </a:lnTo>
+                  <a:lnTo>
+                    <a:pt x="1074337" y="81678"/>
+                  </a:lnTo>
+                  <a:lnTo>
+                    <a:pt x="1002715" y="76417"/>
+                  </a:lnTo>
+                  <a:lnTo>
+                    <a:pt x="931092" y="71130"/>
+                  </a:lnTo>
+                  <a:lnTo>
+                    <a:pt x="859470" y="65817"/>
+                  </a:lnTo>
+                  <a:lnTo>
+                    <a:pt x="787847" y="60478"/>
+                  </a:lnTo>
+                  <a:lnTo>
+                    <a:pt x="716225" y="55113"/>
+                  </a:lnTo>
+                  <a:lnTo>
+                    <a:pt x="644602" y="49722"/>
+                  </a:lnTo>
+                  <a:lnTo>
+                    <a:pt x="572980" y="44304"/>
+                  </a:lnTo>
+                  <a:lnTo>
+                    <a:pt x="501357" y="38860"/>
+                  </a:lnTo>
+                  <a:lnTo>
+                    <a:pt x="429735" y="33390"/>
+                  </a:lnTo>
+                  <a:lnTo>
+                    <a:pt x="358112" y="27892"/>
+                  </a:lnTo>
+                  <a:lnTo>
+                    <a:pt x="286490" y="22368"/>
+                  </a:lnTo>
+                  <a:lnTo>
+                    <a:pt x="214867" y="16817"/>
+                  </a:lnTo>
+                  <a:lnTo>
+                    <a:pt x="143245" y="11238"/>
+                  </a:lnTo>
+                  <a:lnTo>
+                    <a:pt x="71622" y="5633"/>
                   </a:lnTo>
                   <a:lnTo>
                     <a:pt x="0" y="0"/>
@@ -4034,261 +4034,249 @@
           </p:nvSpPr>
           <p:spPr>
             <a:xfrm>
-              <a:off x="2445112" y="2073503"/>
-              <a:ext cx="5817567" cy="3135167"/>
+              <a:off x="2689142" y="2073503"/>
+              <a:ext cx="5573536" cy="3156300"/>
             </a:xfrm>
             <a:custGeom>
               <a:avLst/>
               <a:pathLst>
-                <a:path w="5817567" h="3135167">
+                <a:path w="5573536" h="3156300">
                   <a:moveTo>
                     <a:pt x="0" y="0"/>
                   </a:moveTo>
                   <a:lnTo>
-                    <a:pt x="16142" y="22425"/>
-                  </a:lnTo>
-                  <a:lnTo>
-                    <a:pt x="87765" y="119141"/>
-                  </a:lnTo>
-                  <a:lnTo>
-                    <a:pt x="159387" y="213156"/>
-                  </a:lnTo>
-                  <a:lnTo>
-                    <a:pt x="231010" y="304543"/>
-                  </a:lnTo>
-                  <a:lnTo>
-                    <a:pt x="302632" y="393377"/>
-                  </a:lnTo>
-                  <a:lnTo>
-                    <a:pt x="374255" y="479729"/>
-                  </a:lnTo>
-                  <a:lnTo>
-                    <a:pt x="445877" y="563668"/>
-                  </a:lnTo>
-                  <a:lnTo>
-                    <a:pt x="517500" y="645261"/>
-                  </a:lnTo>
-                  <a:lnTo>
-                    <a:pt x="589122" y="724575"/>
-                  </a:lnTo>
-                  <a:lnTo>
-                    <a:pt x="660745" y="801672"/>
-                  </a:lnTo>
-                  <a:lnTo>
-                    <a:pt x="732367" y="876615"/>
-                  </a:lnTo>
-                  <a:lnTo>
-                    <a:pt x="803990" y="949464"/>
-                  </a:lnTo>
-                  <a:lnTo>
-                    <a:pt x="875612" y="1020277"/>
-                  </a:lnTo>
-                  <a:lnTo>
-                    <a:pt x="947235" y="1089112"/>
-                  </a:lnTo>
-                  <a:lnTo>
-                    <a:pt x="1018857" y="1156023"/>
-                  </a:lnTo>
-                  <a:lnTo>
-                    <a:pt x="1090480" y="1221065"/>
-                  </a:lnTo>
-                  <a:lnTo>
-                    <a:pt x="1162103" y="1284289"/>
-                  </a:lnTo>
-                  <a:lnTo>
-                    <a:pt x="1233725" y="1345747"/>
-                  </a:lnTo>
-                  <a:lnTo>
-                    <a:pt x="1305348" y="1405487"/>
-                  </a:lnTo>
-                  <a:lnTo>
-                    <a:pt x="1376970" y="1463558"/>
-                  </a:lnTo>
-                  <a:lnTo>
-                    <a:pt x="1448593" y="1520007"/>
-                  </a:lnTo>
-                  <a:lnTo>
-                    <a:pt x="1520215" y="1574878"/>
-                  </a:lnTo>
-                  <a:lnTo>
-                    <a:pt x="1591838" y="1628216"/>
-                  </a:lnTo>
-                  <a:lnTo>
-                    <a:pt x="1663460" y="1680063"/>
-                  </a:lnTo>
-                  <a:lnTo>
-                    <a:pt x="1735083" y="1730462"/>
-                  </a:lnTo>
-                  <a:lnTo>
-                    <a:pt x="1806705" y="1779453"/>
-                  </a:lnTo>
-                  <a:lnTo>
-                    <a:pt x="1878328" y="1827075"/>
-                  </a:lnTo>
-                  <a:lnTo>
-                    <a:pt x="1949950" y="1873366"/>
-                  </a:lnTo>
-                  <a:lnTo>
-                    <a:pt x="2021573" y="1918363"/>
-                  </a:lnTo>
-                  <a:lnTo>
-                    <a:pt x="2093195" y="1962103"/>
-                  </a:lnTo>
-                  <a:lnTo>
-                    <a:pt x="2164818" y="2004621"/>
-                  </a:lnTo>
-                  <a:lnTo>
-                    <a:pt x="2236440" y="2045951"/>
-                  </a:lnTo>
-                  <a:lnTo>
-                    <a:pt x="2308063" y="2086126"/>
-                  </a:lnTo>
-                  <a:lnTo>
-                    <a:pt x="2379685" y="2125179"/>
-                  </a:lnTo>
-                  <a:lnTo>
-                    <a:pt x="2451308" y="2163140"/>
-                  </a:lnTo>
-                  <a:lnTo>
-                    <a:pt x="2522931" y="2200041"/>
-                  </a:lnTo>
-                  <a:lnTo>
-                    <a:pt x="2594553" y="2235911"/>
-                  </a:lnTo>
-                  <a:lnTo>
-                    <a:pt x="2666176" y="2270778"/>
-                  </a:lnTo>
-                  <a:lnTo>
-                    <a:pt x="2737798" y="2304671"/>
-                  </a:lnTo>
-                  <a:lnTo>
-                    <a:pt x="2809421" y="2337617"/>
-                  </a:lnTo>
-                  <a:lnTo>
-                    <a:pt x="2881043" y="2369642"/>
-                  </a:lnTo>
-                  <a:lnTo>
-                    <a:pt x="2952666" y="2400773"/>
-                  </a:lnTo>
-                  <a:lnTo>
-                    <a:pt x="3024288" y="2431033"/>
-                  </a:lnTo>
-                  <a:lnTo>
-                    <a:pt x="3095911" y="2460448"/>
-                  </a:lnTo>
-                  <a:lnTo>
-                    <a:pt x="3167533" y="2489042"/>
-                  </a:lnTo>
-                  <a:lnTo>
-                    <a:pt x="3239156" y="2516836"/>
-                  </a:lnTo>
-                  <a:lnTo>
-                    <a:pt x="3310778" y="2543853"/>
-                  </a:lnTo>
-                  <a:lnTo>
-                    <a:pt x="3382401" y="2570116"/>
-                  </a:lnTo>
-                  <a:lnTo>
-                    <a:pt x="3454023" y="2595645"/>
-                  </a:lnTo>
-                  <a:lnTo>
-                    <a:pt x="3525646" y="2620460"/>
-                  </a:lnTo>
-                  <a:lnTo>
-                    <a:pt x="3597268" y="2644582"/>
-                  </a:lnTo>
-                  <a:lnTo>
-                    <a:pt x="3668891" y="2668031"/>
-                  </a:lnTo>
-                  <a:lnTo>
-                    <a:pt x="3740513" y="2690823"/>
-                  </a:lnTo>
-                  <a:lnTo>
-                    <a:pt x="3812136" y="2712979"/>
-                  </a:lnTo>
-                  <a:lnTo>
-                    <a:pt x="3883759" y="2734516"/>
-                  </a:lnTo>
-                  <a:lnTo>
-                    <a:pt x="3955381" y="2755451"/>
-                  </a:lnTo>
-                  <a:lnTo>
-                    <a:pt x="4027004" y="2775802"/>
-                  </a:lnTo>
-                  <a:lnTo>
-                    <a:pt x="4098626" y="2795583"/>
-                  </a:lnTo>
-                  <a:lnTo>
-                    <a:pt x="4170249" y="2814812"/>
-                  </a:lnTo>
-                  <a:lnTo>
-                    <a:pt x="4241871" y="2833503"/>
-                  </a:lnTo>
-                  <a:lnTo>
-                    <a:pt x="4313494" y="2851673"/>
-                  </a:lnTo>
-                  <a:lnTo>
-                    <a:pt x="4385116" y="2869334"/>
-                  </a:lnTo>
-                  <a:lnTo>
-                    <a:pt x="4456739" y="2886502"/>
-                  </a:lnTo>
-                  <a:lnTo>
-                    <a:pt x="4528361" y="2903190"/>
-                  </a:lnTo>
-                  <a:lnTo>
-                    <a:pt x="4599984" y="2919412"/>
-                  </a:lnTo>
-                  <a:lnTo>
-                    <a:pt x="4671606" y="2935181"/>
-                  </a:lnTo>
-                  <a:lnTo>
-                    <a:pt x="4743229" y="2950509"/>
-                  </a:lnTo>
-                  <a:lnTo>
-                    <a:pt x="4814851" y="2965409"/>
-                  </a:lnTo>
-                  <a:lnTo>
-                    <a:pt x="4886474" y="2979893"/>
-                  </a:lnTo>
-                  <a:lnTo>
-                    <a:pt x="4958096" y="2993971"/>
-                  </a:lnTo>
-                  <a:lnTo>
-                    <a:pt x="5029719" y="3007657"/>
-                  </a:lnTo>
-                  <a:lnTo>
-                    <a:pt x="5101341" y="3020960"/>
-                  </a:lnTo>
-                  <a:lnTo>
-                    <a:pt x="5172964" y="3033891"/>
-                  </a:lnTo>
-                  <a:lnTo>
-                    <a:pt x="5244587" y="3046461"/>
-                  </a:lnTo>
-                  <a:lnTo>
-                    <a:pt x="5316209" y="3058680"/>
-                  </a:lnTo>
-                  <a:lnTo>
-                    <a:pt x="5387832" y="3070557"/>
-                  </a:lnTo>
-                  <a:lnTo>
-                    <a:pt x="5459454" y="3082102"/>
-                  </a:lnTo>
-                  <a:lnTo>
-                    <a:pt x="5531077" y="3093325"/>
-                  </a:lnTo>
-                  <a:lnTo>
-                    <a:pt x="5602699" y="3104234"/>
-                  </a:lnTo>
-                  <a:lnTo>
-                    <a:pt x="5674322" y="3114839"/>
-                  </a:lnTo>
-                  <a:lnTo>
-                    <a:pt x="5745944" y="3125147"/>
-                  </a:lnTo>
-                  <a:lnTo>
-                    <a:pt x="5817567" y="3135167"/>
+                    <a:pt x="58602" y="85773"/>
+                  </a:lnTo>
+                  <a:lnTo>
+                    <a:pt x="130224" y="187466"/>
+                  </a:lnTo>
+                  <a:lnTo>
+                    <a:pt x="201847" y="286116"/>
+                  </a:lnTo>
+                  <a:lnTo>
+                    <a:pt x="273470" y="381813"/>
+                  </a:lnTo>
+                  <a:lnTo>
+                    <a:pt x="345092" y="474647"/>
+                  </a:lnTo>
+                  <a:lnTo>
+                    <a:pt x="416715" y="564702"/>
+                  </a:lnTo>
+                  <a:lnTo>
+                    <a:pt x="488337" y="652062"/>
+                  </a:lnTo>
+                  <a:lnTo>
+                    <a:pt x="559960" y="736807"/>
+                  </a:lnTo>
+                  <a:lnTo>
+                    <a:pt x="631582" y="819016"/>
+                  </a:lnTo>
+                  <a:lnTo>
+                    <a:pt x="703205" y="898765"/>
+                  </a:lnTo>
+                  <a:lnTo>
+                    <a:pt x="774827" y="976128"/>
+                  </a:lnTo>
+                  <a:lnTo>
+                    <a:pt x="846450" y="1051175"/>
+                  </a:lnTo>
+                  <a:lnTo>
+                    <a:pt x="918072" y="1123976"/>
+                  </a:lnTo>
+                  <a:lnTo>
+                    <a:pt x="989695" y="1194598"/>
+                  </a:lnTo>
+                  <a:lnTo>
+                    <a:pt x="1061317" y="1263106"/>
+                  </a:lnTo>
+                  <a:lnTo>
+                    <a:pt x="1132940" y="1329565"/>
+                  </a:lnTo>
+                  <a:lnTo>
+                    <a:pt x="1204562" y="1394034"/>
+                  </a:lnTo>
+                  <a:lnTo>
+                    <a:pt x="1276185" y="1456574"/>
+                  </a:lnTo>
+                  <a:lnTo>
+                    <a:pt x="1347807" y="1517243"/>
+                  </a:lnTo>
+                  <a:lnTo>
+                    <a:pt x="1419430" y="1576095"/>
+                  </a:lnTo>
+                  <a:lnTo>
+                    <a:pt x="1491052" y="1633187"/>
+                  </a:lnTo>
+                  <a:lnTo>
+                    <a:pt x="1562675" y="1688570"/>
+                  </a:lnTo>
+                  <a:lnTo>
+                    <a:pt x="1634298" y="1742295"/>
+                  </a:lnTo>
+                  <a:lnTo>
+                    <a:pt x="1705920" y="1794412"/>
+                  </a:lnTo>
+                  <a:lnTo>
+                    <a:pt x="1777543" y="1844970"/>
+                  </a:lnTo>
+                  <a:lnTo>
+                    <a:pt x="1849165" y="1894015"/>
+                  </a:lnTo>
+                  <a:lnTo>
+                    <a:pt x="1920788" y="1941591"/>
+                  </a:lnTo>
+                  <a:lnTo>
+                    <a:pt x="1992410" y="1987744"/>
+                  </a:lnTo>
+                  <a:lnTo>
+                    <a:pt x="2064033" y="2032516"/>
+                  </a:lnTo>
+                  <a:lnTo>
+                    <a:pt x="2135655" y="2075948"/>
+                  </a:lnTo>
+                  <a:lnTo>
+                    <a:pt x="2207278" y="2118080"/>
+                  </a:lnTo>
+                  <a:lnTo>
+                    <a:pt x="2278900" y="2158951"/>
+                  </a:lnTo>
+                  <a:lnTo>
+                    <a:pt x="2350523" y="2198599"/>
+                  </a:lnTo>
+                  <a:lnTo>
+                    <a:pt x="2422145" y="2237060"/>
+                  </a:lnTo>
+                  <a:lnTo>
+                    <a:pt x="2493768" y="2274371"/>
+                  </a:lnTo>
+                  <a:lnTo>
+                    <a:pt x="2565390" y="2310564"/>
+                  </a:lnTo>
+                  <a:lnTo>
+                    <a:pt x="2637013" y="2345675"/>
+                  </a:lnTo>
+                  <a:lnTo>
+                    <a:pt x="2708635" y="2379735"/>
+                  </a:lnTo>
+                  <a:lnTo>
+                    <a:pt x="2780258" y="2412775"/>
+                  </a:lnTo>
+                  <a:lnTo>
+                    <a:pt x="2851880" y="2444827"/>
+                  </a:lnTo>
+                  <a:lnTo>
+                    <a:pt x="2923503" y="2475919"/>
+                  </a:lnTo>
+                  <a:lnTo>
+                    <a:pt x="2995126" y="2506081"/>
+                  </a:lnTo>
+                  <a:lnTo>
+                    <a:pt x="3066748" y="2535340"/>
+                  </a:lnTo>
+                  <a:lnTo>
+                    <a:pt x="3138371" y="2563723"/>
+                  </a:lnTo>
+                  <a:lnTo>
+                    <a:pt x="3209993" y="2591258"/>
+                  </a:lnTo>
+                  <a:lnTo>
+                    <a:pt x="3281616" y="2617968"/>
+                  </a:lnTo>
+                  <a:lnTo>
+                    <a:pt x="3353238" y="2643878"/>
+                  </a:lnTo>
+                  <a:lnTo>
+                    <a:pt x="3424861" y="2669013"/>
+                  </a:lnTo>
+                  <a:lnTo>
+                    <a:pt x="3496483" y="2693396"/>
+                  </a:lnTo>
+                  <a:lnTo>
+                    <a:pt x="3568106" y="2717050"/>
+                  </a:lnTo>
+                  <a:lnTo>
+                    <a:pt x="3639728" y="2739995"/>
+                  </a:lnTo>
+                  <a:lnTo>
+                    <a:pt x="3711351" y="2762254"/>
+                  </a:lnTo>
+                  <a:lnTo>
+                    <a:pt x="3782973" y="2783846"/>
+                  </a:lnTo>
+                  <a:lnTo>
+                    <a:pt x="3854596" y="2804793"/>
+                  </a:lnTo>
+                  <a:lnTo>
+                    <a:pt x="3926218" y="2825112"/>
+                  </a:lnTo>
+                  <a:lnTo>
+                    <a:pt x="3997841" y="2844823"/>
+                  </a:lnTo>
+                  <a:lnTo>
+                    <a:pt x="4069463" y="2863945"/>
+                  </a:lnTo>
+                  <a:lnTo>
+                    <a:pt x="4141086" y="2882494"/>
+                  </a:lnTo>
+                  <a:lnTo>
+                    <a:pt x="4212708" y="2900488"/>
+                  </a:lnTo>
+                  <a:lnTo>
+                    <a:pt x="4284331" y="2917944"/>
+                  </a:lnTo>
+                  <a:lnTo>
+                    <a:pt x="4355954" y="2934877"/>
+                  </a:lnTo>
+                  <a:lnTo>
+                    <a:pt x="4427576" y="2951303"/>
+                  </a:lnTo>
+                  <a:lnTo>
+                    <a:pt x="4499199" y="2967238"/>
+                  </a:lnTo>
+                  <a:lnTo>
+                    <a:pt x="4570821" y="2982696"/>
+                  </a:lnTo>
+                  <a:lnTo>
+                    <a:pt x="4642444" y="2997691"/>
+                  </a:lnTo>
+                  <a:lnTo>
+                    <a:pt x="4714066" y="3012237"/>
+                  </a:lnTo>
+                  <a:lnTo>
+                    <a:pt x="4785689" y="3026348"/>
+                  </a:lnTo>
+                  <a:lnTo>
+                    <a:pt x="4857311" y="3040037"/>
+                  </a:lnTo>
+                  <a:lnTo>
+                    <a:pt x="4928934" y="3053316"/>
+                  </a:lnTo>
+                  <a:lnTo>
+                    <a:pt x="5000556" y="3066198"/>
+                  </a:lnTo>
+                  <a:lnTo>
+                    <a:pt x="5072179" y="3078694"/>
+                  </a:lnTo>
+                  <a:lnTo>
+                    <a:pt x="5143801" y="3090817"/>
+                  </a:lnTo>
+                  <a:lnTo>
+                    <a:pt x="5215424" y="3102576"/>
+                  </a:lnTo>
+                  <a:lnTo>
+                    <a:pt x="5287046" y="3113984"/>
+                  </a:lnTo>
+                  <a:lnTo>
+                    <a:pt x="5358669" y="3125050"/>
+                  </a:lnTo>
+                  <a:lnTo>
+                    <a:pt x="5430291" y="3135785"/>
+                  </a:lnTo>
+                  <a:lnTo>
+                    <a:pt x="5501914" y="3146198"/>
+                  </a:lnTo>
+                  <a:lnTo>
+                    <a:pt x="5573536" y="3156300"/>
                   </a:lnTo>
                 </a:path>
               </a:pathLst>
@@ -5028,7 +5016,7 @@
                   <a:latin typeface="Helvetica"/>
                   <a:cs typeface="Helvetica"/>
                 </a:rPr>
-                <a:t>subHR per 1 mL/min: 0.96 (0.93-1.00)  |  per IQR (Δ = 18.2): 0.51 (0.27-0.99)  |  IQR: [-11.5, 6.7]</a:t>
+                <a:t>subHR per 1 mL/min: 0.96 (0.93-0.99)  |  per IQR (Δ = 18.2): 0.49 (0.27-0.89)  |  IQR: [-11.5, 6.7]</a:t>
               </a:r>
             </a:p>
           </p:txBody>

--- a/docs/plots/carbo/jx_carbo_linsubhr_egfrdisc_sideeffect.pptx
+++ b/docs/plots/carbo/jx_carbo_linsubhr_egfrdisc_sideeffect.pptx
@@ -3003,485 +3003,485 @@
           <p:spPr>
             <a:xfrm>
               <a:off x="1172049" y="2073503"/>
-              <a:ext cx="7090630" cy="3333685"/>
+              <a:ext cx="7090630" cy="3335346"/>
             </a:xfrm>
             <a:custGeom>
               <a:avLst/>
               <a:pathLst>
-                <a:path w="7090630" h="3333685">
+                <a:path w="7090630" h="3335346">
                   <a:moveTo>
-                    <a:pt x="3061138" y="0"/>
+                    <a:pt x="3072822" y="0"/>
                   </a:moveTo>
                   <a:lnTo>
-                    <a:pt x="3079768" y="51323"/>
-                  </a:lnTo>
-                  <a:lnTo>
-                    <a:pt x="3151391" y="237907"/>
-                  </a:lnTo>
-                  <a:lnTo>
-                    <a:pt x="3223013" y="414348"/>
-                  </a:lnTo>
-                  <a:lnTo>
-                    <a:pt x="3294636" y="581198"/>
-                  </a:lnTo>
-                  <a:lnTo>
-                    <a:pt x="3366258" y="738978"/>
-                  </a:lnTo>
-                  <a:lnTo>
-                    <a:pt x="3437881" y="888182"/>
-                  </a:lnTo>
-                  <a:lnTo>
-                    <a:pt x="3509503" y="1029274"/>
-                  </a:lnTo>
-                  <a:lnTo>
-                    <a:pt x="3581126" y="1162698"/>
-                  </a:lnTo>
-                  <a:lnTo>
-                    <a:pt x="3652748" y="1288868"/>
-                  </a:lnTo>
-                  <a:lnTo>
-                    <a:pt x="3724371" y="1408180"/>
-                  </a:lnTo>
-                  <a:lnTo>
-                    <a:pt x="3795993" y="1521006"/>
-                  </a:lnTo>
-                  <a:lnTo>
-                    <a:pt x="3867616" y="1627699"/>
-                  </a:lnTo>
-                  <a:lnTo>
-                    <a:pt x="3939238" y="1728592"/>
-                  </a:lnTo>
-                  <a:lnTo>
-                    <a:pt x="4010861" y="1824001"/>
-                  </a:lnTo>
-                  <a:lnTo>
-                    <a:pt x="4082483" y="1914223"/>
-                  </a:lnTo>
-                  <a:lnTo>
-                    <a:pt x="4154106" y="1999541"/>
-                  </a:lnTo>
-                  <a:lnTo>
-                    <a:pt x="4225729" y="2080221"/>
-                  </a:lnTo>
-                  <a:lnTo>
-                    <a:pt x="4297351" y="2156516"/>
-                  </a:lnTo>
-                  <a:lnTo>
-                    <a:pt x="4368974" y="2228663"/>
-                  </a:lnTo>
-                  <a:lnTo>
-                    <a:pt x="4440596" y="2296888"/>
-                  </a:lnTo>
-                  <a:lnTo>
-                    <a:pt x="4512219" y="2361405"/>
-                  </a:lnTo>
-                  <a:lnTo>
-                    <a:pt x="4583841" y="2422415"/>
-                  </a:lnTo>
-                  <a:lnTo>
-                    <a:pt x="4655464" y="2480108"/>
-                  </a:lnTo>
-                  <a:lnTo>
-                    <a:pt x="4727086" y="2534665"/>
-                  </a:lnTo>
-                  <a:lnTo>
-                    <a:pt x="4798709" y="2586256"/>
-                  </a:lnTo>
-                  <a:lnTo>
-                    <a:pt x="4870331" y="2635043"/>
-                  </a:lnTo>
-                  <a:lnTo>
-                    <a:pt x="4941954" y="2656665"/>
-                  </a:lnTo>
-                  <a:lnTo>
-                    <a:pt x="5013576" y="2660688"/>
-                  </a:lnTo>
-                  <a:lnTo>
-                    <a:pt x="5085199" y="2664692"/>
-                  </a:lnTo>
-                  <a:lnTo>
-                    <a:pt x="5156821" y="2668677"/>
-                  </a:lnTo>
-                  <a:lnTo>
-                    <a:pt x="5228444" y="2672642"/>
-                  </a:lnTo>
-                  <a:lnTo>
-                    <a:pt x="5300066" y="2676588"/>
-                  </a:lnTo>
-                  <a:lnTo>
-                    <a:pt x="5371689" y="2680515"/>
-                  </a:lnTo>
-                  <a:lnTo>
-                    <a:pt x="5443311" y="2684422"/>
-                  </a:lnTo>
-                  <a:lnTo>
-                    <a:pt x="5514934" y="2688311"/>
-                  </a:lnTo>
-                  <a:lnTo>
-                    <a:pt x="5586557" y="2692180"/>
-                  </a:lnTo>
-                  <a:lnTo>
-                    <a:pt x="5658179" y="2696031"/>
-                  </a:lnTo>
-                  <a:lnTo>
-                    <a:pt x="5729802" y="2699863"/>
-                  </a:lnTo>
-                  <a:lnTo>
-                    <a:pt x="5801424" y="2703676"/>
-                  </a:lnTo>
-                  <a:lnTo>
-                    <a:pt x="5873047" y="2707471"/>
-                  </a:lnTo>
-                  <a:lnTo>
-                    <a:pt x="5944669" y="2711248"/>
-                  </a:lnTo>
-                  <a:lnTo>
-                    <a:pt x="6016292" y="2715006"/>
-                  </a:lnTo>
-                  <a:lnTo>
-                    <a:pt x="6087914" y="2718746"/>
-                  </a:lnTo>
-                  <a:lnTo>
-                    <a:pt x="6159537" y="2722467"/>
-                  </a:lnTo>
-                  <a:lnTo>
-                    <a:pt x="6231159" y="2726171"/>
-                  </a:lnTo>
-                  <a:lnTo>
-                    <a:pt x="6302782" y="2729856"/>
-                  </a:lnTo>
-                  <a:lnTo>
-                    <a:pt x="6374404" y="2733523"/>
-                  </a:lnTo>
-                  <a:lnTo>
-                    <a:pt x="6446027" y="2737173"/>
-                  </a:lnTo>
-                  <a:lnTo>
-                    <a:pt x="6517649" y="2740805"/>
-                  </a:lnTo>
-                  <a:lnTo>
-                    <a:pt x="6589272" y="2744419"/>
-                  </a:lnTo>
-                  <a:lnTo>
-                    <a:pt x="6660894" y="2748016"/>
-                  </a:lnTo>
-                  <a:lnTo>
-                    <a:pt x="6732517" y="2751595"/>
-                  </a:lnTo>
-                  <a:lnTo>
-                    <a:pt x="6804139" y="2755157"/>
-                  </a:lnTo>
-                  <a:lnTo>
-                    <a:pt x="6875762" y="2758701"/>
-                  </a:lnTo>
-                  <a:lnTo>
-                    <a:pt x="6947385" y="2762228"/>
-                  </a:lnTo>
-                  <a:lnTo>
-                    <a:pt x="7019007" y="2765738"/>
-                  </a:lnTo>
-                  <a:lnTo>
-                    <a:pt x="7090630" y="2769231"/>
-                  </a:lnTo>
-                  <a:lnTo>
-                    <a:pt x="7090630" y="3333685"/>
-                  </a:lnTo>
-                  <a:lnTo>
-                    <a:pt x="7019007" y="3325059"/>
-                  </a:lnTo>
-                  <a:lnTo>
-                    <a:pt x="6947385" y="3315937"/>
-                  </a:lnTo>
-                  <a:lnTo>
-                    <a:pt x="6875762" y="3306291"/>
-                  </a:lnTo>
-                  <a:lnTo>
-                    <a:pt x="6804139" y="3296090"/>
-                  </a:lnTo>
-                  <a:lnTo>
-                    <a:pt x="6732517" y="3285303"/>
-                  </a:lnTo>
-                  <a:lnTo>
-                    <a:pt x="6660894" y="3273895"/>
-                  </a:lnTo>
-                  <a:lnTo>
-                    <a:pt x="6589272" y="3261832"/>
-                  </a:lnTo>
-                  <a:lnTo>
-                    <a:pt x="6517649" y="3249076"/>
-                  </a:lnTo>
-                  <a:lnTo>
-                    <a:pt x="6446027" y="3235586"/>
-                  </a:lnTo>
-                  <a:lnTo>
-                    <a:pt x="6374404" y="3221321"/>
-                  </a:lnTo>
-                  <a:lnTo>
-                    <a:pt x="6302782" y="3206235"/>
-                  </a:lnTo>
-                  <a:lnTo>
-                    <a:pt x="6231159" y="3190283"/>
-                  </a:lnTo>
-                  <a:lnTo>
-                    <a:pt x="6159537" y="3173414"/>
-                  </a:lnTo>
-                  <a:lnTo>
-                    <a:pt x="6087914" y="3155574"/>
-                  </a:lnTo>
-                  <a:lnTo>
-                    <a:pt x="6016292" y="3136710"/>
-                  </a:lnTo>
-                  <a:lnTo>
-                    <a:pt x="5944669" y="3116761"/>
-                  </a:lnTo>
-                  <a:lnTo>
-                    <a:pt x="5873047" y="3095665"/>
-                  </a:lnTo>
-                  <a:lnTo>
-                    <a:pt x="5801424" y="3073356"/>
-                  </a:lnTo>
-                  <a:lnTo>
-                    <a:pt x="5729802" y="3049766"/>
-                  </a:lnTo>
-                  <a:lnTo>
-                    <a:pt x="5658179" y="3024819"/>
-                  </a:lnTo>
-                  <a:lnTo>
-                    <a:pt x="5586557" y="2998438"/>
-                  </a:lnTo>
-                  <a:lnTo>
-                    <a:pt x="5514934" y="2970540"/>
-                  </a:lnTo>
-                  <a:lnTo>
-                    <a:pt x="5443311" y="2941039"/>
-                  </a:lnTo>
-                  <a:lnTo>
-                    <a:pt x="5371689" y="2909842"/>
-                  </a:lnTo>
-                  <a:lnTo>
-                    <a:pt x="5300066" y="2876852"/>
-                  </a:lnTo>
-                  <a:lnTo>
-                    <a:pt x="5228444" y="2841965"/>
-                  </a:lnTo>
-                  <a:lnTo>
-                    <a:pt x="5156821" y="2805073"/>
-                  </a:lnTo>
-                  <a:lnTo>
-                    <a:pt x="5085199" y="2766060"/>
-                  </a:lnTo>
-                  <a:lnTo>
-                    <a:pt x="5013576" y="2724805"/>
-                  </a:lnTo>
-                  <a:lnTo>
-                    <a:pt x="4941954" y="2681178"/>
-                  </a:lnTo>
-                  <a:lnTo>
-                    <a:pt x="4870331" y="2652622"/>
-                  </a:lnTo>
-                  <a:lnTo>
-                    <a:pt x="4798709" y="2648559"/>
-                  </a:lnTo>
-                  <a:lnTo>
-                    <a:pt x="4727086" y="2644476"/>
-                  </a:lnTo>
-                  <a:lnTo>
-                    <a:pt x="4655464" y="2640373"/>
-                  </a:lnTo>
-                  <a:lnTo>
-                    <a:pt x="4583841" y="2636250"/>
-                  </a:lnTo>
-                  <a:lnTo>
-                    <a:pt x="4512219" y="2632107"/>
-                  </a:lnTo>
-                  <a:lnTo>
-                    <a:pt x="4440596" y="2627944"/>
-                  </a:lnTo>
-                  <a:lnTo>
-                    <a:pt x="4368974" y="2623760"/>
-                  </a:lnTo>
-                  <a:lnTo>
-                    <a:pt x="4297351" y="2619556"/>
-                  </a:lnTo>
-                  <a:lnTo>
-                    <a:pt x="4225729" y="2615331"/>
-                  </a:lnTo>
-                  <a:lnTo>
-                    <a:pt x="4154106" y="2611086"/>
-                  </a:lnTo>
-                  <a:lnTo>
-                    <a:pt x="4082483" y="2606820"/>
-                  </a:lnTo>
-                  <a:lnTo>
-                    <a:pt x="4010861" y="2602533"/>
-                  </a:lnTo>
-                  <a:lnTo>
-                    <a:pt x="3939238" y="2598225"/>
-                  </a:lnTo>
-                  <a:lnTo>
-                    <a:pt x="3867616" y="2593896"/>
-                  </a:lnTo>
-                  <a:lnTo>
-                    <a:pt x="3795993" y="2589546"/>
-                  </a:lnTo>
-                  <a:lnTo>
-                    <a:pt x="3724371" y="2585175"/>
-                  </a:lnTo>
-                  <a:lnTo>
-                    <a:pt x="3652748" y="2580782"/>
-                  </a:lnTo>
-                  <a:lnTo>
-                    <a:pt x="3581126" y="2576368"/>
-                  </a:lnTo>
-                  <a:lnTo>
-                    <a:pt x="3509503" y="2571932"/>
-                  </a:lnTo>
-                  <a:lnTo>
-                    <a:pt x="3437881" y="2567475"/>
-                  </a:lnTo>
-                  <a:lnTo>
-                    <a:pt x="3366258" y="2562996"/>
-                  </a:lnTo>
-                  <a:lnTo>
-                    <a:pt x="3294636" y="2558495"/>
-                  </a:lnTo>
-                  <a:lnTo>
-                    <a:pt x="3223013" y="2553971"/>
-                  </a:lnTo>
-                  <a:lnTo>
-                    <a:pt x="3151391" y="2549426"/>
-                  </a:lnTo>
-                  <a:lnTo>
-                    <a:pt x="3079768" y="2544859"/>
-                  </a:lnTo>
-                  <a:lnTo>
-                    <a:pt x="3008146" y="2540269"/>
-                  </a:lnTo>
-                  <a:lnTo>
-                    <a:pt x="2936523" y="2535657"/>
-                  </a:lnTo>
-                  <a:lnTo>
-                    <a:pt x="2864901" y="2531022"/>
-                  </a:lnTo>
-                  <a:lnTo>
-                    <a:pt x="2793278" y="2526364"/>
-                  </a:lnTo>
-                  <a:lnTo>
-                    <a:pt x="2721655" y="2521684"/>
-                  </a:lnTo>
-                  <a:lnTo>
-                    <a:pt x="2650033" y="2516981"/>
-                  </a:lnTo>
-                  <a:lnTo>
-                    <a:pt x="2578410" y="2512255"/>
-                  </a:lnTo>
-                  <a:lnTo>
-                    <a:pt x="2506788" y="2507506"/>
-                  </a:lnTo>
-                  <a:lnTo>
-                    <a:pt x="2435165" y="2502733"/>
-                  </a:lnTo>
-                  <a:lnTo>
-                    <a:pt x="2363543" y="2497938"/>
-                  </a:lnTo>
-                  <a:lnTo>
-                    <a:pt x="2291920" y="2493119"/>
-                  </a:lnTo>
-                  <a:lnTo>
-                    <a:pt x="2220298" y="2488276"/>
-                  </a:lnTo>
-                  <a:lnTo>
-                    <a:pt x="2148675" y="2483409"/>
-                  </a:lnTo>
-                  <a:lnTo>
-                    <a:pt x="2077053" y="2478519"/>
-                  </a:lnTo>
-                  <a:lnTo>
-                    <a:pt x="2005430" y="2473605"/>
-                  </a:lnTo>
-                  <a:lnTo>
-                    <a:pt x="1933808" y="2468667"/>
-                  </a:lnTo>
-                  <a:lnTo>
-                    <a:pt x="1862185" y="2463705"/>
-                  </a:lnTo>
-                  <a:lnTo>
-                    <a:pt x="1790563" y="2458718"/>
-                  </a:lnTo>
-                  <a:lnTo>
-                    <a:pt x="1718940" y="2453707"/>
-                  </a:lnTo>
-                  <a:lnTo>
-                    <a:pt x="1647318" y="2448672"/>
-                  </a:lnTo>
-                  <a:lnTo>
-                    <a:pt x="1575695" y="2443612"/>
-                  </a:lnTo>
-                  <a:lnTo>
-                    <a:pt x="1504073" y="2438527"/>
-                  </a:lnTo>
-                  <a:lnTo>
-                    <a:pt x="1432450" y="2433418"/>
-                  </a:lnTo>
-                  <a:lnTo>
-                    <a:pt x="1360827" y="2428283"/>
-                  </a:lnTo>
-                  <a:lnTo>
-                    <a:pt x="1289205" y="2423123"/>
-                  </a:lnTo>
-                  <a:lnTo>
-                    <a:pt x="1217582" y="2417938"/>
-                  </a:lnTo>
-                  <a:lnTo>
-                    <a:pt x="1145960" y="2412728"/>
-                  </a:lnTo>
-                  <a:lnTo>
-                    <a:pt x="1074337" y="2407492"/>
-                  </a:lnTo>
-                  <a:lnTo>
-                    <a:pt x="1002715" y="2402231"/>
-                  </a:lnTo>
-                  <a:lnTo>
-                    <a:pt x="931092" y="2396944"/>
-                  </a:lnTo>
-                  <a:lnTo>
-                    <a:pt x="859470" y="2391631"/>
-                  </a:lnTo>
-                  <a:lnTo>
-                    <a:pt x="787847" y="2386292"/>
-                  </a:lnTo>
-                  <a:lnTo>
-                    <a:pt x="716225" y="2380927"/>
-                  </a:lnTo>
-                  <a:lnTo>
-                    <a:pt x="644602" y="2375536"/>
-                  </a:lnTo>
-                  <a:lnTo>
-                    <a:pt x="572980" y="2370119"/>
-                  </a:lnTo>
-                  <a:lnTo>
-                    <a:pt x="501357" y="2364675"/>
-                  </a:lnTo>
-                  <a:lnTo>
-                    <a:pt x="429735" y="2359204"/>
-                  </a:lnTo>
-                  <a:lnTo>
-                    <a:pt x="358112" y="2353707"/>
-                  </a:lnTo>
-                  <a:lnTo>
-                    <a:pt x="286490" y="2348182"/>
-                  </a:lnTo>
-                  <a:lnTo>
-                    <a:pt x="214867" y="2342631"/>
-                  </a:lnTo>
-                  <a:lnTo>
-                    <a:pt x="143245" y="2337053"/>
-                  </a:lnTo>
-                  <a:lnTo>
-                    <a:pt x="71622" y="2331447"/>
-                  </a:lnTo>
-                  <a:lnTo>
-                    <a:pt x="0" y="2325814"/>
+                    <a:pt x="3079768" y="19442"/>
+                  </a:lnTo>
+                  <a:lnTo>
+                    <a:pt x="3151391" y="208951"/>
+                  </a:lnTo>
+                  <a:lnTo>
+                    <a:pt x="3223013" y="388092"/>
+                  </a:lnTo>
+                  <a:lnTo>
+                    <a:pt x="3294636" y="557435"/>
+                  </a:lnTo>
+                  <a:lnTo>
+                    <a:pt x="3366258" y="717513"/>
+                  </a:lnTo>
+                  <a:lnTo>
+                    <a:pt x="3437881" y="868835"/>
+                  </a:lnTo>
+                  <a:lnTo>
+                    <a:pt x="3509503" y="1011879"/>
+                  </a:lnTo>
+                  <a:lnTo>
+                    <a:pt x="3581126" y="1147098"/>
+                  </a:lnTo>
+                  <a:lnTo>
+                    <a:pt x="3652748" y="1274920"/>
+                  </a:lnTo>
+                  <a:lnTo>
+                    <a:pt x="3724371" y="1395750"/>
+                  </a:lnTo>
+                  <a:lnTo>
+                    <a:pt x="3795993" y="1509970"/>
+                  </a:lnTo>
+                  <a:lnTo>
+                    <a:pt x="3867616" y="1617942"/>
+                  </a:lnTo>
+                  <a:lnTo>
+                    <a:pt x="3939238" y="1720007"/>
+                  </a:lnTo>
+                  <a:lnTo>
+                    <a:pt x="4010861" y="1816489"/>
+                  </a:lnTo>
+                  <a:lnTo>
+                    <a:pt x="4082483" y="1907694"/>
+                  </a:lnTo>
+                  <a:lnTo>
+                    <a:pt x="4154106" y="1993909"/>
+                  </a:lnTo>
+                  <a:lnTo>
+                    <a:pt x="4225729" y="2075408"/>
+                  </a:lnTo>
+                  <a:lnTo>
+                    <a:pt x="4297351" y="2152448"/>
+                  </a:lnTo>
+                  <a:lnTo>
+                    <a:pt x="4368974" y="2225275"/>
+                  </a:lnTo>
+                  <a:lnTo>
+                    <a:pt x="4440596" y="2294117"/>
+                  </a:lnTo>
+                  <a:lnTo>
+                    <a:pt x="4512219" y="2359194"/>
+                  </a:lnTo>
+                  <a:lnTo>
+                    <a:pt x="4583841" y="2420710"/>
+                  </a:lnTo>
+                  <a:lnTo>
+                    <a:pt x="4655464" y="2478862"/>
+                  </a:lnTo>
+                  <a:lnTo>
+                    <a:pt x="4727086" y="2533832"/>
+                  </a:lnTo>
+                  <a:lnTo>
+                    <a:pt x="4798709" y="2585795"/>
+                  </a:lnTo>
+                  <a:lnTo>
+                    <a:pt x="4870331" y="2634916"/>
+                  </a:lnTo>
+                  <a:lnTo>
+                    <a:pt x="4941954" y="2654490"/>
+                  </a:lnTo>
+                  <a:lnTo>
+                    <a:pt x="5013576" y="2654841"/>
+                  </a:lnTo>
+                  <a:lnTo>
+                    <a:pt x="5085199" y="2655192"/>
+                  </a:lnTo>
+                  <a:lnTo>
+                    <a:pt x="5156821" y="2655543"/>
+                  </a:lnTo>
+                  <a:lnTo>
+                    <a:pt x="5228444" y="2655894"/>
+                  </a:lnTo>
+                  <a:lnTo>
+                    <a:pt x="5300066" y="2656245"/>
+                  </a:lnTo>
+                  <a:lnTo>
+                    <a:pt x="5371689" y="2656595"/>
+                  </a:lnTo>
+                  <a:lnTo>
+                    <a:pt x="5443311" y="2656946"/>
+                  </a:lnTo>
+                  <a:lnTo>
+                    <a:pt x="5514934" y="2657296"/>
+                  </a:lnTo>
+                  <a:lnTo>
+                    <a:pt x="5586557" y="2657646"/>
+                  </a:lnTo>
+                  <a:lnTo>
+                    <a:pt x="5658179" y="2657996"/>
+                  </a:lnTo>
+                  <a:lnTo>
+                    <a:pt x="5729802" y="2658346"/>
+                  </a:lnTo>
+                  <a:lnTo>
+                    <a:pt x="5801424" y="2658695"/>
+                  </a:lnTo>
+                  <a:lnTo>
+                    <a:pt x="5873047" y="2659045"/>
+                  </a:lnTo>
+                  <a:lnTo>
+                    <a:pt x="5944669" y="2659394"/>
+                  </a:lnTo>
+                  <a:lnTo>
+                    <a:pt x="6016292" y="2659743"/>
+                  </a:lnTo>
+                  <a:lnTo>
+                    <a:pt x="6087914" y="2660092"/>
+                  </a:lnTo>
+                  <a:lnTo>
+                    <a:pt x="6159537" y="2660441"/>
+                  </a:lnTo>
+                  <a:lnTo>
+                    <a:pt x="6231159" y="2660790"/>
+                  </a:lnTo>
+                  <a:lnTo>
+                    <a:pt x="6302782" y="2661139"/>
+                  </a:lnTo>
+                  <a:lnTo>
+                    <a:pt x="6374404" y="2661487"/>
+                  </a:lnTo>
+                  <a:lnTo>
+                    <a:pt x="6446027" y="2661835"/>
+                  </a:lnTo>
+                  <a:lnTo>
+                    <a:pt x="6517649" y="2662184"/>
+                  </a:lnTo>
+                  <a:lnTo>
+                    <a:pt x="6589272" y="2662532"/>
+                  </a:lnTo>
+                  <a:lnTo>
+                    <a:pt x="6660894" y="2662879"/>
+                  </a:lnTo>
+                  <a:lnTo>
+                    <a:pt x="6732517" y="2663227"/>
+                  </a:lnTo>
+                  <a:lnTo>
+                    <a:pt x="6804139" y="2663575"/>
+                  </a:lnTo>
+                  <a:lnTo>
+                    <a:pt x="6875762" y="2663922"/>
+                  </a:lnTo>
+                  <a:lnTo>
+                    <a:pt x="6947385" y="2664269"/>
+                  </a:lnTo>
+                  <a:lnTo>
+                    <a:pt x="7019007" y="2664616"/>
+                  </a:lnTo>
+                  <a:lnTo>
+                    <a:pt x="7090630" y="2664963"/>
+                  </a:lnTo>
+                  <a:lnTo>
+                    <a:pt x="7090630" y="3335346"/>
+                  </a:lnTo>
+                  <a:lnTo>
+                    <a:pt x="7019007" y="3326758"/>
+                  </a:lnTo>
+                  <a:lnTo>
+                    <a:pt x="6947385" y="3317674"/>
+                  </a:lnTo>
+                  <a:lnTo>
+                    <a:pt x="6875762" y="3308063"/>
+                  </a:lnTo>
+                  <a:lnTo>
+                    <a:pt x="6804139" y="3297897"/>
+                  </a:lnTo>
+                  <a:lnTo>
+                    <a:pt x="6732517" y="3287142"/>
+                  </a:lnTo>
+                  <a:lnTo>
+                    <a:pt x="6660894" y="3275764"/>
+                  </a:lnTo>
+                  <a:lnTo>
+                    <a:pt x="6589272" y="3263729"/>
+                  </a:lnTo>
+                  <a:lnTo>
+                    <a:pt x="6517649" y="3250997"/>
+                  </a:lnTo>
+                  <a:lnTo>
+                    <a:pt x="6446027" y="3237528"/>
+                  </a:lnTo>
+                  <a:lnTo>
+                    <a:pt x="6374404" y="3223279"/>
+                  </a:lnTo>
+                  <a:lnTo>
+                    <a:pt x="6302782" y="3208206"/>
+                  </a:lnTo>
+                  <a:lnTo>
+                    <a:pt x="6231159" y="3192261"/>
+                  </a:lnTo>
+                  <a:lnTo>
+                    <a:pt x="6159537" y="3175393"/>
+                  </a:lnTo>
+                  <a:lnTo>
+                    <a:pt x="6087914" y="3157549"/>
+                  </a:lnTo>
+                  <a:lnTo>
+                    <a:pt x="6016292" y="3138673"/>
+                  </a:lnTo>
+                  <a:lnTo>
+                    <a:pt x="5944669" y="3118704"/>
+                  </a:lnTo>
+                  <a:lnTo>
+                    <a:pt x="5873047" y="3097579"/>
+                  </a:lnTo>
+                  <a:lnTo>
+                    <a:pt x="5801424" y="3075232"/>
+                  </a:lnTo>
+                  <a:lnTo>
+                    <a:pt x="5729802" y="3051592"/>
+                  </a:lnTo>
+                  <a:lnTo>
+                    <a:pt x="5658179" y="3026584"/>
+                  </a:lnTo>
+                  <a:lnTo>
+                    <a:pt x="5586557" y="3000128"/>
+                  </a:lnTo>
+                  <a:lnTo>
+                    <a:pt x="5514934" y="2972142"/>
+                  </a:lnTo>
+                  <a:lnTo>
+                    <a:pt x="5443311" y="2942536"/>
+                  </a:lnTo>
+                  <a:lnTo>
+                    <a:pt x="5371689" y="2911216"/>
+                  </a:lnTo>
+                  <a:lnTo>
+                    <a:pt x="5300066" y="2878085"/>
+                  </a:lnTo>
+                  <a:lnTo>
+                    <a:pt x="5228444" y="2843036"/>
+                  </a:lnTo>
+                  <a:lnTo>
+                    <a:pt x="5156821" y="2805959"/>
+                  </a:lnTo>
+                  <a:lnTo>
+                    <a:pt x="5085199" y="2766736"/>
+                  </a:lnTo>
+                  <a:lnTo>
+                    <a:pt x="5013576" y="2725244"/>
+                  </a:lnTo>
+                  <a:lnTo>
+                    <a:pt x="4941954" y="2681350"/>
+                  </a:lnTo>
+                  <a:lnTo>
+                    <a:pt x="4870331" y="2654139"/>
+                  </a:lnTo>
+                  <a:lnTo>
+                    <a:pt x="4798709" y="2653787"/>
+                  </a:lnTo>
+                  <a:lnTo>
+                    <a:pt x="4727086" y="2653435"/>
+                  </a:lnTo>
+                  <a:lnTo>
+                    <a:pt x="4655464" y="2653084"/>
+                  </a:lnTo>
+                  <a:lnTo>
+                    <a:pt x="4583841" y="2652732"/>
+                  </a:lnTo>
+                  <a:lnTo>
+                    <a:pt x="4512219" y="2652379"/>
+                  </a:lnTo>
+                  <a:lnTo>
+                    <a:pt x="4440596" y="2652027"/>
+                  </a:lnTo>
+                  <a:lnTo>
+                    <a:pt x="4368974" y="2651675"/>
+                  </a:lnTo>
+                  <a:lnTo>
+                    <a:pt x="4297351" y="2651322"/>
+                  </a:lnTo>
+                  <a:lnTo>
+                    <a:pt x="4225729" y="2650969"/>
+                  </a:lnTo>
+                  <a:lnTo>
+                    <a:pt x="4154106" y="2650616"/>
+                  </a:lnTo>
+                  <a:lnTo>
+                    <a:pt x="4082483" y="2650263"/>
+                  </a:lnTo>
+                  <a:lnTo>
+                    <a:pt x="4010861" y="2649910"/>
+                  </a:lnTo>
+                  <a:lnTo>
+                    <a:pt x="3939238" y="2649557"/>
+                  </a:lnTo>
+                  <a:lnTo>
+                    <a:pt x="3867616" y="2649203"/>
+                  </a:lnTo>
+                  <a:lnTo>
+                    <a:pt x="3795993" y="2648850"/>
+                  </a:lnTo>
+                  <a:lnTo>
+                    <a:pt x="3724371" y="2648496"/>
+                  </a:lnTo>
+                  <a:lnTo>
+                    <a:pt x="3652748" y="2648142"/>
+                  </a:lnTo>
+                  <a:lnTo>
+                    <a:pt x="3581126" y="2647788"/>
+                  </a:lnTo>
+                  <a:lnTo>
+                    <a:pt x="3509503" y="2647434"/>
+                  </a:lnTo>
+                  <a:lnTo>
+                    <a:pt x="3437881" y="2647079"/>
+                  </a:lnTo>
+                  <a:lnTo>
+                    <a:pt x="3366258" y="2646725"/>
+                  </a:lnTo>
+                  <a:lnTo>
+                    <a:pt x="3294636" y="2646370"/>
+                  </a:lnTo>
+                  <a:lnTo>
+                    <a:pt x="3223013" y="2646015"/>
+                  </a:lnTo>
+                  <a:lnTo>
+                    <a:pt x="3151391" y="2645660"/>
+                  </a:lnTo>
+                  <a:lnTo>
+                    <a:pt x="3079768" y="2645305"/>
+                  </a:lnTo>
+                  <a:lnTo>
+                    <a:pt x="3008146" y="2644950"/>
+                  </a:lnTo>
+                  <a:lnTo>
+                    <a:pt x="2936523" y="2644594"/>
+                  </a:lnTo>
+                  <a:lnTo>
+                    <a:pt x="2864901" y="2644239"/>
+                  </a:lnTo>
+                  <a:lnTo>
+                    <a:pt x="2793278" y="2643883"/>
+                  </a:lnTo>
+                  <a:lnTo>
+                    <a:pt x="2721655" y="2643527"/>
+                  </a:lnTo>
+                  <a:lnTo>
+                    <a:pt x="2650033" y="2643171"/>
+                  </a:lnTo>
+                  <a:lnTo>
+                    <a:pt x="2578410" y="2642815"/>
+                  </a:lnTo>
+                  <a:lnTo>
+                    <a:pt x="2506788" y="2642458"/>
+                  </a:lnTo>
+                  <a:lnTo>
+                    <a:pt x="2435165" y="2642102"/>
+                  </a:lnTo>
+                  <a:lnTo>
+                    <a:pt x="2363543" y="2641745"/>
+                  </a:lnTo>
+                  <a:lnTo>
+                    <a:pt x="2291920" y="2641388"/>
+                  </a:lnTo>
+                  <a:lnTo>
+                    <a:pt x="2220298" y="2641031"/>
+                  </a:lnTo>
+                  <a:lnTo>
+                    <a:pt x="2148675" y="2640674"/>
+                  </a:lnTo>
+                  <a:lnTo>
+                    <a:pt x="2077053" y="2640317"/>
+                  </a:lnTo>
+                  <a:lnTo>
+                    <a:pt x="2005430" y="2639959"/>
+                  </a:lnTo>
+                  <a:lnTo>
+                    <a:pt x="1933808" y="2639602"/>
+                  </a:lnTo>
+                  <a:lnTo>
+                    <a:pt x="1862185" y="2639244"/>
+                  </a:lnTo>
+                  <a:lnTo>
+                    <a:pt x="1790563" y="2638886"/>
+                  </a:lnTo>
+                  <a:lnTo>
+                    <a:pt x="1718940" y="2638528"/>
+                  </a:lnTo>
+                  <a:lnTo>
+                    <a:pt x="1647318" y="2638170"/>
+                  </a:lnTo>
+                  <a:lnTo>
+                    <a:pt x="1575695" y="2637812"/>
+                  </a:lnTo>
+                  <a:lnTo>
+                    <a:pt x="1504073" y="2637453"/>
+                  </a:lnTo>
+                  <a:lnTo>
+                    <a:pt x="1432450" y="2637095"/>
+                  </a:lnTo>
+                  <a:lnTo>
+                    <a:pt x="1360827" y="2636736"/>
+                  </a:lnTo>
+                  <a:lnTo>
+                    <a:pt x="1289205" y="2636377"/>
+                  </a:lnTo>
+                  <a:lnTo>
+                    <a:pt x="1217582" y="2636018"/>
+                  </a:lnTo>
+                  <a:lnTo>
+                    <a:pt x="1145960" y="2635659"/>
+                  </a:lnTo>
+                  <a:lnTo>
+                    <a:pt x="1074337" y="2635299"/>
+                  </a:lnTo>
+                  <a:lnTo>
+                    <a:pt x="1002715" y="2634940"/>
+                  </a:lnTo>
+                  <a:lnTo>
+                    <a:pt x="931092" y="2634580"/>
+                  </a:lnTo>
+                  <a:lnTo>
+                    <a:pt x="859470" y="2634220"/>
+                  </a:lnTo>
+                  <a:lnTo>
+                    <a:pt x="787847" y="2633860"/>
+                  </a:lnTo>
+                  <a:lnTo>
+                    <a:pt x="716225" y="2633500"/>
+                  </a:lnTo>
+                  <a:lnTo>
+                    <a:pt x="644602" y="2633140"/>
+                  </a:lnTo>
+                  <a:lnTo>
+                    <a:pt x="572980" y="2632779"/>
+                  </a:lnTo>
+                  <a:lnTo>
+                    <a:pt x="501357" y="2632419"/>
+                  </a:lnTo>
+                  <a:lnTo>
+                    <a:pt x="429735" y="2632058"/>
+                  </a:lnTo>
+                  <a:lnTo>
+                    <a:pt x="358112" y="2631697"/>
+                  </a:lnTo>
+                  <a:lnTo>
+                    <a:pt x="286490" y="2631336"/>
+                  </a:lnTo>
+                  <a:lnTo>
+                    <a:pt x="214867" y="2630975"/>
+                  </a:lnTo>
+                  <a:lnTo>
+                    <a:pt x="143245" y="2630613"/>
+                  </a:lnTo>
+                  <a:lnTo>
+                    <a:pt x="71622" y="2630252"/>
+                  </a:lnTo>
+                  <a:lnTo>
+                    <a:pt x="0" y="2629890"/>
                   </a:lnTo>
                   <a:lnTo>
                     <a:pt x="0" y="0"/>
@@ -3510,186 +3510,186 @@
           </p:nvSpPr>
           <p:spPr>
             <a:xfrm>
-              <a:off x="4233187" y="2073503"/>
-              <a:ext cx="4029491" cy="2769231"/>
+              <a:off x="4244871" y="2073503"/>
+              <a:ext cx="4017807" cy="2664963"/>
             </a:xfrm>
             <a:custGeom>
               <a:avLst/>
               <a:pathLst>
-                <a:path w="4029491" h="2769231">
+                <a:path w="4017807" h="2664963">
                   <a:moveTo>
                     <a:pt x="0" y="0"/>
                   </a:moveTo>
                   <a:lnTo>
-                    <a:pt x="18630" y="51323"/>
-                  </a:lnTo>
-                  <a:lnTo>
-                    <a:pt x="90252" y="237907"/>
-                  </a:lnTo>
-                  <a:lnTo>
-                    <a:pt x="161875" y="414348"/>
-                  </a:lnTo>
-                  <a:lnTo>
-                    <a:pt x="233497" y="581198"/>
-                  </a:lnTo>
-                  <a:lnTo>
-                    <a:pt x="305120" y="738978"/>
-                  </a:lnTo>
-                  <a:lnTo>
-                    <a:pt x="376742" y="888182"/>
-                  </a:lnTo>
-                  <a:lnTo>
-                    <a:pt x="448365" y="1029274"/>
-                  </a:lnTo>
-                  <a:lnTo>
-                    <a:pt x="519988" y="1162698"/>
-                  </a:lnTo>
-                  <a:lnTo>
-                    <a:pt x="591610" y="1288868"/>
-                  </a:lnTo>
-                  <a:lnTo>
-                    <a:pt x="663233" y="1408180"/>
-                  </a:lnTo>
-                  <a:lnTo>
-                    <a:pt x="734855" y="1521006"/>
-                  </a:lnTo>
-                  <a:lnTo>
-                    <a:pt x="806478" y="1627699"/>
-                  </a:lnTo>
-                  <a:lnTo>
-                    <a:pt x="878100" y="1728592"/>
-                  </a:lnTo>
-                  <a:lnTo>
-                    <a:pt x="949723" y="1824001"/>
-                  </a:lnTo>
-                  <a:lnTo>
-                    <a:pt x="1021345" y="1914223"/>
-                  </a:lnTo>
-                  <a:lnTo>
-                    <a:pt x="1092968" y="1999541"/>
-                  </a:lnTo>
-                  <a:lnTo>
-                    <a:pt x="1164590" y="2080221"/>
-                  </a:lnTo>
-                  <a:lnTo>
-                    <a:pt x="1236213" y="2156516"/>
-                  </a:lnTo>
-                  <a:lnTo>
-                    <a:pt x="1307835" y="2228663"/>
-                  </a:lnTo>
-                  <a:lnTo>
-                    <a:pt x="1379458" y="2296888"/>
-                  </a:lnTo>
-                  <a:lnTo>
-                    <a:pt x="1451080" y="2361405"/>
-                  </a:lnTo>
-                  <a:lnTo>
-                    <a:pt x="1522703" y="2422415"/>
-                  </a:lnTo>
-                  <a:lnTo>
-                    <a:pt x="1594325" y="2480108"/>
-                  </a:lnTo>
-                  <a:lnTo>
-                    <a:pt x="1665948" y="2534665"/>
-                  </a:lnTo>
-                  <a:lnTo>
-                    <a:pt x="1737570" y="2586256"/>
-                  </a:lnTo>
-                  <a:lnTo>
-                    <a:pt x="1809193" y="2635043"/>
-                  </a:lnTo>
-                  <a:lnTo>
-                    <a:pt x="1880816" y="2656665"/>
-                  </a:lnTo>
-                  <a:lnTo>
-                    <a:pt x="1952438" y="2660688"/>
-                  </a:lnTo>
-                  <a:lnTo>
-                    <a:pt x="2024061" y="2664692"/>
-                  </a:lnTo>
-                  <a:lnTo>
-                    <a:pt x="2095683" y="2668677"/>
-                  </a:lnTo>
-                  <a:lnTo>
-                    <a:pt x="2167306" y="2672642"/>
-                  </a:lnTo>
-                  <a:lnTo>
-                    <a:pt x="2238928" y="2676588"/>
-                  </a:lnTo>
-                  <a:lnTo>
-                    <a:pt x="2310551" y="2680515"/>
-                  </a:lnTo>
-                  <a:lnTo>
-                    <a:pt x="2382173" y="2684422"/>
-                  </a:lnTo>
-                  <a:lnTo>
-                    <a:pt x="2453796" y="2688311"/>
-                  </a:lnTo>
-                  <a:lnTo>
-                    <a:pt x="2525418" y="2692180"/>
-                  </a:lnTo>
-                  <a:lnTo>
-                    <a:pt x="2597041" y="2696031"/>
-                  </a:lnTo>
-                  <a:lnTo>
-                    <a:pt x="2668663" y="2699863"/>
-                  </a:lnTo>
-                  <a:lnTo>
-                    <a:pt x="2740286" y="2703676"/>
-                  </a:lnTo>
-                  <a:lnTo>
-                    <a:pt x="2811908" y="2707471"/>
-                  </a:lnTo>
-                  <a:lnTo>
-                    <a:pt x="2883531" y="2711248"/>
-                  </a:lnTo>
-                  <a:lnTo>
-                    <a:pt x="2955153" y="2715006"/>
-                  </a:lnTo>
-                  <a:lnTo>
-                    <a:pt x="3026776" y="2718746"/>
-                  </a:lnTo>
-                  <a:lnTo>
-                    <a:pt x="3098398" y="2722467"/>
-                  </a:lnTo>
-                  <a:lnTo>
-                    <a:pt x="3170021" y="2726171"/>
-                  </a:lnTo>
-                  <a:lnTo>
-                    <a:pt x="3241644" y="2729856"/>
-                  </a:lnTo>
-                  <a:lnTo>
-                    <a:pt x="3313266" y="2733523"/>
-                  </a:lnTo>
-                  <a:lnTo>
-                    <a:pt x="3384889" y="2737173"/>
-                  </a:lnTo>
-                  <a:lnTo>
-                    <a:pt x="3456511" y="2740805"/>
-                  </a:lnTo>
-                  <a:lnTo>
-                    <a:pt x="3528134" y="2744419"/>
-                  </a:lnTo>
-                  <a:lnTo>
-                    <a:pt x="3599756" y="2748016"/>
-                  </a:lnTo>
-                  <a:lnTo>
-                    <a:pt x="3671379" y="2751595"/>
-                  </a:lnTo>
-                  <a:lnTo>
-                    <a:pt x="3743001" y="2755157"/>
-                  </a:lnTo>
-                  <a:lnTo>
-                    <a:pt x="3814624" y="2758701"/>
-                  </a:lnTo>
-                  <a:lnTo>
-                    <a:pt x="3886246" y="2762228"/>
-                  </a:lnTo>
-                  <a:lnTo>
-                    <a:pt x="3957869" y="2765738"/>
-                  </a:lnTo>
-                  <a:lnTo>
-                    <a:pt x="4029491" y="2769231"/>
+                    <a:pt x="6946" y="19442"/>
+                  </a:lnTo>
+                  <a:lnTo>
+                    <a:pt x="78568" y="208951"/>
+                  </a:lnTo>
+                  <a:lnTo>
+                    <a:pt x="150191" y="388092"/>
+                  </a:lnTo>
+                  <a:lnTo>
+                    <a:pt x="221813" y="557435"/>
+                  </a:lnTo>
+                  <a:lnTo>
+                    <a:pt x="293436" y="717513"/>
+                  </a:lnTo>
+                  <a:lnTo>
+                    <a:pt x="365058" y="868835"/>
+                  </a:lnTo>
+                  <a:lnTo>
+                    <a:pt x="436681" y="1011879"/>
+                  </a:lnTo>
+                  <a:lnTo>
+                    <a:pt x="508303" y="1147098"/>
+                  </a:lnTo>
+                  <a:lnTo>
+                    <a:pt x="579926" y="1274920"/>
+                  </a:lnTo>
+                  <a:lnTo>
+                    <a:pt x="651548" y="1395750"/>
+                  </a:lnTo>
+                  <a:lnTo>
+                    <a:pt x="723171" y="1509970"/>
+                  </a:lnTo>
+                  <a:lnTo>
+                    <a:pt x="794793" y="1617942"/>
+                  </a:lnTo>
+                  <a:lnTo>
+                    <a:pt x="866416" y="1720007"/>
+                  </a:lnTo>
+                  <a:lnTo>
+                    <a:pt x="938039" y="1816489"/>
+                  </a:lnTo>
+                  <a:lnTo>
+                    <a:pt x="1009661" y="1907694"/>
+                  </a:lnTo>
+                  <a:lnTo>
+                    <a:pt x="1081284" y="1993909"/>
+                  </a:lnTo>
+                  <a:lnTo>
+                    <a:pt x="1152906" y="2075408"/>
+                  </a:lnTo>
+                  <a:lnTo>
+                    <a:pt x="1224529" y="2152448"/>
+                  </a:lnTo>
+                  <a:lnTo>
+                    <a:pt x="1296151" y="2225275"/>
+                  </a:lnTo>
+                  <a:lnTo>
+                    <a:pt x="1367774" y="2294117"/>
+                  </a:lnTo>
+                  <a:lnTo>
+                    <a:pt x="1439396" y="2359194"/>
+                  </a:lnTo>
+                  <a:lnTo>
+                    <a:pt x="1511019" y="2420710"/>
+                  </a:lnTo>
+                  <a:lnTo>
+                    <a:pt x="1582641" y="2478862"/>
+                  </a:lnTo>
+                  <a:lnTo>
+                    <a:pt x="1654264" y="2533832"/>
+                  </a:lnTo>
+                  <a:lnTo>
+                    <a:pt x="1725886" y="2585795"/>
+                  </a:lnTo>
+                  <a:lnTo>
+                    <a:pt x="1797509" y="2634916"/>
+                  </a:lnTo>
+                  <a:lnTo>
+                    <a:pt x="1869131" y="2654490"/>
+                  </a:lnTo>
+                  <a:lnTo>
+                    <a:pt x="1940754" y="2654841"/>
+                  </a:lnTo>
+                  <a:lnTo>
+                    <a:pt x="2012376" y="2655192"/>
+                  </a:lnTo>
+                  <a:lnTo>
+                    <a:pt x="2083999" y="2655543"/>
+                  </a:lnTo>
+                  <a:lnTo>
+                    <a:pt x="2155621" y="2655894"/>
+                  </a:lnTo>
+                  <a:lnTo>
+                    <a:pt x="2227244" y="2656245"/>
+                  </a:lnTo>
+                  <a:lnTo>
+                    <a:pt x="2298867" y="2656595"/>
+                  </a:lnTo>
+                  <a:lnTo>
+                    <a:pt x="2370489" y="2656946"/>
+                  </a:lnTo>
+                  <a:lnTo>
+                    <a:pt x="2442112" y="2657296"/>
+                  </a:lnTo>
+                  <a:lnTo>
+                    <a:pt x="2513734" y="2657646"/>
+                  </a:lnTo>
+                  <a:lnTo>
+                    <a:pt x="2585357" y="2657996"/>
+                  </a:lnTo>
+                  <a:lnTo>
+                    <a:pt x="2656979" y="2658346"/>
+                  </a:lnTo>
+                  <a:lnTo>
+                    <a:pt x="2728602" y="2658695"/>
+                  </a:lnTo>
+                  <a:lnTo>
+                    <a:pt x="2800224" y="2659045"/>
+                  </a:lnTo>
+                  <a:lnTo>
+                    <a:pt x="2871847" y="2659394"/>
+                  </a:lnTo>
+                  <a:lnTo>
+                    <a:pt x="2943469" y="2659743"/>
+                  </a:lnTo>
+                  <a:lnTo>
+                    <a:pt x="3015092" y="2660092"/>
+                  </a:lnTo>
+                  <a:lnTo>
+                    <a:pt x="3086714" y="2660441"/>
+                  </a:lnTo>
+                  <a:lnTo>
+                    <a:pt x="3158337" y="2660790"/>
+                  </a:lnTo>
+                  <a:lnTo>
+                    <a:pt x="3229959" y="2661139"/>
+                  </a:lnTo>
+                  <a:lnTo>
+                    <a:pt x="3301582" y="2661487"/>
+                  </a:lnTo>
+                  <a:lnTo>
+                    <a:pt x="3373204" y="2661835"/>
+                  </a:lnTo>
+                  <a:lnTo>
+                    <a:pt x="3444827" y="2662184"/>
+                  </a:lnTo>
+                  <a:lnTo>
+                    <a:pt x="3516449" y="2662532"/>
+                  </a:lnTo>
+                  <a:lnTo>
+                    <a:pt x="3588072" y="2662879"/>
+                  </a:lnTo>
+                  <a:lnTo>
+                    <a:pt x="3659695" y="2663227"/>
+                  </a:lnTo>
+                  <a:lnTo>
+                    <a:pt x="3731317" y="2663575"/>
+                  </a:lnTo>
+                  <a:lnTo>
+                    <a:pt x="3802940" y="2663922"/>
+                  </a:lnTo>
+                  <a:lnTo>
+                    <a:pt x="3874562" y="2664269"/>
+                  </a:lnTo>
+                  <a:lnTo>
+                    <a:pt x="3946185" y="2664616"/>
+                  </a:lnTo>
+                  <a:lnTo>
+                    <a:pt x="4017807" y="2664963"/>
                   </a:lnTo>
                 </a:path>
               </a:pathLst>
@@ -3709,309 +3709,309 @@
           </p:nvSpPr>
           <p:spPr>
             <a:xfrm>
-              <a:off x="1172049" y="4399317"/>
-              <a:ext cx="7090630" cy="1007871"/>
+              <a:off x="1172049" y="4703393"/>
+              <a:ext cx="7090630" cy="705455"/>
             </a:xfrm>
             <a:custGeom>
               <a:avLst/>
               <a:pathLst>
-                <a:path w="7090630" h="1007871">
+                <a:path w="7090630" h="705455">
                   <a:moveTo>
-                    <a:pt x="7090630" y="1007871"/>
+                    <a:pt x="7090630" y="705455"/>
                   </a:moveTo>
                   <a:lnTo>
-                    <a:pt x="7019007" y="999245"/>
-                  </a:lnTo>
-                  <a:lnTo>
-                    <a:pt x="6947385" y="990123"/>
-                  </a:lnTo>
-                  <a:lnTo>
-                    <a:pt x="6875762" y="980476"/>
-                  </a:lnTo>
-                  <a:lnTo>
-                    <a:pt x="6804139" y="970275"/>
-                  </a:lnTo>
-                  <a:lnTo>
-                    <a:pt x="6732517" y="959488"/>
-                  </a:lnTo>
-                  <a:lnTo>
-                    <a:pt x="6660894" y="948081"/>
-                  </a:lnTo>
-                  <a:lnTo>
-                    <a:pt x="6589272" y="936018"/>
-                  </a:lnTo>
-                  <a:lnTo>
-                    <a:pt x="6517649" y="923261"/>
-                  </a:lnTo>
-                  <a:lnTo>
-                    <a:pt x="6446027" y="909772"/>
-                  </a:lnTo>
-                  <a:lnTo>
-                    <a:pt x="6374404" y="895506"/>
-                  </a:lnTo>
-                  <a:lnTo>
-                    <a:pt x="6302782" y="880421"/>
-                  </a:lnTo>
-                  <a:lnTo>
-                    <a:pt x="6231159" y="864469"/>
-                  </a:lnTo>
-                  <a:lnTo>
-                    <a:pt x="6159537" y="847599"/>
-                  </a:lnTo>
-                  <a:lnTo>
-                    <a:pt x="6087914" y="829760"/>
-                  </a:lnTo>
-                  <a:lnTo>
-                    <a:pt x="6016292" y="810895"/>
-                  </a:lnTo>
-                  <a:lnTo>
-                    <a:pt x="5944669" y="790946"/>
-                  </a:lnTo>
-                  <a:lnTo>
-                    <a:pt x="5873047" y="769850"/>
-                  </a:lnTo>
-                  <a:lnTo>
-                    <a:pt x="5801424" y="747542"/>
-                  </a:lnTo>
-                  <a:lnTo>
-                    <a:pt x="5729802" y="723951"/>
-                  </a:lnTo>
-                  <a:lnTo>
-                    <a:pt x="5658179" y="699004"/>
-                  </a:lnTo>
-                  <a:lnTo>
-                    <a:pt x="5586557" y="672623"/>
-                  </a:lnTo>
-                  <a:lnTo>
-                    <a:pt x="5514934" y="644726"/>
-                  </a:lnTo>
-                  <a:lnTo>
-                    <a:pt x="5443311" y="615225"/>
-                  </a:lnTo>
-                  <a:lnTo>
-                    <a:pt x="5371689" y="584028"/>
-                  </a:lnTo>
-                  <a:lnTo>
-                    <a:pt x="5300066" y="551037"/>
-                  </a:lnTo>
-                  <a:lnTo>
-                    <a:pt x="5228444" y="516151"/>
-                  </a:lnTo>
-                  <a:lnTo>
-                    <a:pt x="5156821" y="479259"/>
-                  </a:lnTo>
-                  <a:lnTo>
-                    <a:pt x="5085199" y="440246"/>
-                  </a:lnTo>
-                  <a:lnTo>
-                    <a:pt x="5013576" y="398990"/>
-                  </a:lnTo>
-                  <a:lnTo>
-                    <a:pt x="4941954" y="355363"/>
-                  </a:lnTo>
-                  <a:lnTo>
-                    <a:pt x="4870331" y="326807"/>
-                  </a:lnTo>
-                  <a:lnTo>
-                    <a:pt x="4798709" y="322744"/>
-                  </a:lnTo>
-                  <a:lnTo>
-                    <a:pt x="4727086" y="318661"/>
-                  </a:lnTo>
-                  <a:lnTo>
-                    <a:pt x="4655464" y="314559"/>
-                  </a:lnTo>
-                  <a:lnTo>
-                    <a:pt x="4583841" y="310436"/>
-                  </a:lnTo>
-                  <a:lnTo>
-                    <a:pt x="4512219" y="306293"/>
-                  </a:lnTo>
-                  <a:lnTo>
-                    <a:pt x="4440596" y="302129"/>
-                  </a:lnTo>
-                  <a:lnTo>
-                    <a:pt x="4368974" y="297946"/>
-                  </a:lnTo>
-                  <a:lnTo>
-                    <a:pt x="4297351" y="293742"/>
-                  </a:lnTo>
-                  <a:lnTo>
-                    <a:pt x="4225729" y="289517"/>
-                  </a:lnTo>
-                  <a:lnTo>
-                    <a:pt x="4154106" y="285272"/>
-                  </a:lnTo>
-                  <a:lnTo>
-                    <a:pt x="4082483" y="281006"/>
-                  </a:lnTo>
-                  <a:lnTo>
-                    <a:pt x="4010861" y="276719"/>
-                  </a:lnTo>
-                  <a:lnTo>
-                    <a:pt x="3939238" y="272411"/>
-                  </a:lnTo>
-                  <a:lnTo>
-                    <a:pt x="3867616" y="268082"/>
-                  </a:lnTo>
-                  <a:lnTo>
-                    <a:pt x="3795993" y="263732"/>
-                  </a:lnTo>
-                  <a:lnTo>
-                    <a:pt x="3724371" y="259361"/>
-                  </a:lnTo>
-                  <a:lnTo>
-                    <a:pt x="3652748" y="254968"/>
-                  </a:lnTo>
-                  <a:lnTo>
-                    <a:pt x="3581126" y="250554"/>
-                  </a:lnTo>
-                  <a:lnTo>
-                    <a:pt x="3509503" y="246118"/>
-                  </a:lnTo>
-                  <a:lnTo>
-                    <a:pt x="3437881" y="241661"/>
-                  </a:lnTo>
-                  <a:lnTo>
-                    <a:pt x="3366258" y="237181"/>
-                  </a:lnTo>
-                  <a:lnTo>
-                    <a:pt x="3294636" y="232680"/>
-                  </a:lnTo>
-                  <a:lnTo>
-                    <a:pt x="3223013" y="228157"/>
-                  </a:lnTo>
-                  <a:lnTo>
-                    <a:pt x="3151391" y="223612"/>
-                  </a:lnTo>
-                  <a:lnTo>
-                    <a:pt x="3079768" y="219044"/>
-                  </a:lnTo>
-                  <a:lnTo>
-                    <a:pt x="3008146" y="214454"/>
-                  </a:lnTo>
-                  <a:lnTo>
-                    <a:pt x="2936523" y="209842"/>
-                  </a:lnTo>
-                  <a:lnTo>
-                    <a:pt x="2864901" y="205207"/>
-                  </a:lnTo>
-                  <a:lnTo>
-                    <a:pt x="2793278" y="200550"/>
-                  </a:lnTo>
-                  <a:lnTo>
-                    <a:pt x="2721655" y="195870"/>
-                  </a:lnTo>
-                  <a:lnTo>
-                    <a:pt x="2650033" y="191167"/>
-                  </a:lnTo>
-                  <a:lnTo>
-                    <a:pt x="2578410" y="186441"/>
-                  </a:lnTo>
-                  <a:lnTo>
-                    <a:pt x="2506788" y="181691"/>
-                  </a:lnTo>
-                  <a:lnTo>
-                    <a:pt x="2435165" y="176919"/>
-                  </a:lnTo>
-                  <a:lnTo>
-                    <a:pt x="2363543" y="172123"/>
-                  </a:lnTo>
-                  <a:lnTo>
-                    <a:pt x="2291920" y="167304"/>
-                  </a:lnTo>
-                  <a:lnTo>
-                    <a:pt x="2220298" y="162461"/>
-                  </a:lnTo>
-                  <a:lnTo>
-                    <a:pt x="2148675" y="157595"/>
-                  </a:lnTo>
-                  <a:lnTo>
-                    <a:pt x="2077053" y="152705"/>
-                  </a:lnTo>
-                  <a:lnTo>
-                    <a:pt x="2005430" y="147791"/>
-                  </a:lnTo>
-                  <a:lnTo>
-                    <a:pt x="1933808" y="142853"/>
-                  </a:lnTo>
-                  <a:lnTo>
-                    <a:pt x="1862185" y="137890"/>
-                  </a:lnTo>
-                  <a:lnTo>
-                    <a:pt x="1790563" y="132904"/>
-                  </a:lnTo>
-                  <a:lnTo>
-                    <a:pt x="1718940" y="127893"/>
-                  </a:lnTo>
-                  <a:lnTo>
-                    <a:pt x="1647318" y="122858"/>
-                  </a:lnTo>
-                  <a:lnTo>
-                    <a:pt x="1575695" y="117798"/>
-                  </a:lnTo>
-                  <a:lnTo>
-                    <a:pt x="1504073" y="112713"/>
-                  </a:lnTo>
-                  <a:lnTo>
-                    <a:pt x="1432450" y="107603"/>
-                  </a:lnTo>
-                  <a:lnTo>
-                    <a:pt x="1360827" y="102469"/>
-                  </a:lnTo>
-                  <a:lnTo>
-                    <a:pt x="1289205" y="97309"/>
-                  </a:lnTo>
-                  <a:lnTo>
-                    <a:pt x="1217582" y="92124"/>
-                  </a:lnTo>
-                  <a:lnTo>
-                    <a:pt x="1145960" y="86914"/>
-                  </a:lnTo>
-                  <a:lnTo>
-                    <a:pt x="1074337" y="81678"/>
-                  </a:lnTo>
-                  <a:lnTo>
-                    <a:pt x="1002715" y="76417"/>
-                  </a:lnTo>
-                  <a:lnTo>
-                    <a:pt x="931092" y="71130"/>
-                  </a:lnTo>
-                  <a:lnTo>
-                    <a:pt x="859470" y="65817"/>
-                  </a:lnTo>
-                  <a:lnTo>
-                    <a:pt x="787847" y="60478"/>
-                  </a:lnTo>
-                  <a:lnTo>
-                    <a:pt x="716225" y="55113"/>
-                  </a:lnTo>
-                  <a:lnTo>
-                    <a:pt x="644602" y="49722"/>
-                  </a:lnTo>
-                  <a:lnTo>
-                    <a:pt x="572980" y="44304"/>
-                  </a:lnTo>
-                  <a:lnTo>
-                    <a:pt x="501357" y="38860"/>
-                  </a:lnTo>
-                  <a:lnTo>
-                    <a:pt x="429735" y="33390"/>
-                  </a:lnTo>
-                  <a:lnTo>
-                    <a:pt x="358112" y="27892"/>
-                  </a:lnTo>
-                  <a:lnTo>
-                    <a:pt x="286490" y="22368"/>
-                  </a:lnTo>
-                  <a:lnTo>
-                    <a:pt x="214867" y="16817"/>
-                  </a:lnTo>
-                  <a:lnTo>
-                    <a:pt x="143245" y="11238"/>
-                  </a:lnTo>
-                  <a:lnTo>
-                    <a:pt x="71622" y="5633"/>
+                    <a:pt x="7019007" y="696868"/>
+                  </a:lnTo>
+                  <a:lnTo>
+                    <a:pt x="6947385" y="687783"/>
+                  </a:lnTo>
+                  <a:lnTo>
+                    <a:pt x="6875762" y="678173"/>
+                  </a:lnTo>
+                  <a:lnTo>
+                    <a:pt x="6804139" y="668006"/>
+                  </a:lnTo>
+                  <a:lnTo>
+                    <a:pt x="6732517" y="657251"/>
+                  </a:lnTo>
+                  <a:lnTo>
+                    <a:pt x="6660894" y="645874"/>
+                  </a:lnTo>
+                  <a:lnTo>
+                    <a:pt x="6589272" y="633838"/>
+                  </a:lnTo>
+                  <a:lnTo>
+                    <a:pt x="6517649" y="621106"/>
+                  </a:lnTo>
+                  <a:lnTo>
+                    <a:pt x="6446027" y="607637"/>
+                  </a:lnTo>
+                  <a:lnTo>
+                    <a:pt x="6374404" y="593389"/>
+                  </a:lnTo>
+                  <a:lnTo>
+                    <a:pt x="6302782" y="578316"/>
+                  </a:lnTo>
+                  <a:lnTo>
+                    <a:pt x="6231159" y="562371"/>
+                  </a:lnTo>
+                  <a:lnTo>
+                    <a:pt x="6159537" y="545503"/>
+                  </a:lnTo>
+                  <a:lnTo>
+                    <a:pt x="6087914" y="527659"/>
+                  </a:lnTo>
+                  <a:lnTo>
+                    <a:pt x="6016292" y="508782"/>
+                  </a:lnTo>
+                  <a:lnTo>
+                    <a:pt x="5944669" y="488813"/>
+                  </a:lnTo>
+                  <a:lnTo>
+                    <a:pt x="5873047" y="467688"/>
+                  </a:lnTo>
+                  <a:lnTo>
+                    <a:pt x="5801424" y="445341"/>
+                  </a:lnTo>
+                  <a:lnTo>
+                    <a:pt x="5729802" y="421701"/>
+                  </a:lnTo>
+                  <a:lnTo>
+                    <a:pt x="5658179" y="396693"/>
+                  </a:lnTo>
+                  <a:lnTo>
+                    <a:pt x="5586557" y="370237"/>
+                  </a:lnTo>
+                  <a:lnTo>
+                    <a:pt x="5514934" y="342251"/>
+                  </a:lnTo>
+                  <a:lnTo>
+                    <a:pt x="5443311" y="312645"/>
+                  </a:lnTo>
+                  <a:lnTo>
+                    <a:pt x="5371689" y="281326"/>
+                  </a:lnTo>
+                  <a:lnTo>
+                    <a:pt x="5300066" y="248194"/>
+                  </a:lnTo>
+                  <a:lnTo>
+                    <a:pt x="5228444" y="213145"/>
+                  </a:lnTo>
+                  <a:lnTo>
+                    <a:pt x="5156821" y="176068"/>
+                  </a:lnTo>
+                  <a:lnTo>
+                    <a:pt x="5085199" y="136845"/>
+                  </a:lnTo>
+                  <a:lnTo>
+                    <a:pt x="5013576" y="95353"/>
+                  </a:lnTo>
+                  <a:lnTo>
+                    <a:pt x="4941954" y="51459"/>
+                  </a:lnTo>
+                  <a:lnTo>
+                    <a:pt x="4870331" y="24248"/>
+                  </a:lnTo>
+                  <a:lnTo>
+                    <a:pt x="4798709" y="23896"/>
+                  </a:lnTo>
+                  <a:lnTo>
+                    <a:pt x="4727086" y="23545"/>
+                  </a:lnTo>
+                  <a:lnTo>
+                    <a:pt x="4655464" y="23193"/>
+                  </a:lnTo>
+                  <a:lnTo>
+                    <a:pt x="4583841" y="22841"/>
+                  </a:lnTo>
+                  <a:lnTo>
+                    <a:pt x="4512219" y="22489"/>
+                  </a:lnTo>
+                  <a:lnTo>
+                    <a:pt x="4440596" y="22136"/>
+                  </a:lnTo>
+                  <a:lnTo>
+                    <a:pt x="4368974" y="21784"/>
+                  </a:lnTo>
+                  <a:lnTo>
+                    <a:pt x="4297351" y="21431"/>
+                  </a:lnTo>
+                  <a:lnTo>
+                    <a:pt x="4225729" y="21079"/>
+                  </a:lnTo>
+                  <a:lnTo>
+                    <a:pt x="4154106" y="20726"/>
+                  </a:lnTo>
+                  <a:lnTo>
+                    <a:pt x="4082483" y="20373"/>
+                  </a:lnTo>
+                  <a:lnTo>
+                    <a:pt x="4010861" y="20019"/>
+                  </a:lnTo>
+                  <a:lnTo>
+                    <a:pt x="3939238" y="19666"/>
+                  </a:lnTo>
+                  <a:lnTo>
+                    <a:pt x="3867616" y="19313"/>
+                  </a:lnTo>
+                  <a:lnTo>
+                    <a:pt x="3795993" y="18959"/>
+                  </a:lnTo>
+                  <a:lnTo>
+                    <a:pt x="3724371" y="18605"/>
+                  </a:lnTo>
+                  <a:lnTo>
+                    <a:pt x="3652748" y="18251"/>
+                  </a:lnTo>
+                  <a:lnTo>
+                    <a:pt x="3581126" y="17897"/>
+                  </a:lnTo>
+                  <a:lnTo>
+                    <a:pt x="3509503" y="17543"/>
+                  </a:lnTo>
+                  <a:lnTo>
+                    <a:pt x="3437881" y="17188"/>
+                  </a:lnTo>
+                  <a:lnTo>
+                    <a:pt x="3366258" y="16834"/>
+                  </a:lnTo>
+                  <a:lnTo>
+                    <a:pt x="3294636" y="16479"/>
+                  </a:lnTo>
+                  <a:lnTo>
+                    <a:pt x="3223013" y="16124"/>
+                  </a:lnTo>
+                  <a:lnTo>
+                    <a:pt x="3151391" y="15769"/>
+                  </a:lnTo>
+                  <a:lnTo>
+                    <a:pt x="3079768" y="15414"/>
+                  </a:lnTo>
+                  <a:lnTo>
+                    <a:pt x="3008146" y="15059"/>
+                  </a:lnTo>
+                  <a:lnTo>
+                    <a:pt x="2936523" y="14703"/>
+                  </a:lnTo>
+                  <a:lnTo>
+                    <a:pt x="2864901" y="14348"/>
+                  </a:lnTo>
+                  <a:lnTo>
+                    <a:pt x="2793278" y="13992"/>
+                  </a:lnTo>
+                  <a:lnTo>
+                    <a:pt x="2721655" y="13636"/>
+                  </a:lnTo>
+                  <a:lnTo>
+                    <a:pt x="2650033" y="13280"/>
+                  </a:lnTo>
+                  <a:lnTo>
+                    <a:pt x="2578410" y="12924"/>
+                  </a:lnTo>
+                  <a:lnTo>
+                    <a:pt x="2506788" y="12568"/>
+                  </a:lnTo>
+                  <a:lnTo>
+                    <a:pt x="2435165" y="12211"/>
+                  </a:lnTo>
+                  <a:lnTo>
+                    <a:pt x="2363543" y="11854"/>
+                  </a:lnTo>
+                  <a:lnTo>
+                    <a:pt x="2291920" y="11498"/>
+                  </a:lnTo>
+                  <a:lnTo>
+                    <a:pt x="2220298" y="11141"/>
+                  </a:lnTo>
+                  <a:lnTo>
+                    <a:pt x="2148675" y="10784"/>
+                  </a:lnTo>
+                  <a:lnTo>
+                    <a:pt x="2077053" y="10426"/>
+                  </a:lnTo>
+                  <a:lnTo>
+                    <a:pt x="2005430" y="10069"/>
+                  </a:lnTo>
+                  <a:lnTo>
+                    <a:pt x="1933808" y="9711"/>
+                  </a:lnTo>
+                  <a:lnTo>
+                    <a:pt x="1862185" y="9354"/>
+                  </a:lnTo>
+                  <a:lnTo>
+                    <a:pt x="1790563" y="8996"/>
+                  </a:lnTo>
+                  <a:lnTo>
+                    <a:pt x="1718940" y="8638"/>
+                  </a:lnTo>
+                  <a:lnTo>
+                    <a:pt x="1647318" y="8280"/>
+                  </a:lnTo>
+                  <a:lnTo>
+                    <a:pt x="1575695" y="7921"/>
+                  </a:lnTo>
+                  <a:lnTo>
+                    <a:pt x="1504073" y="7563"/>
+                  </a:lnTo>
+                  <a:lnTo>
+                    <a:pt x="1432450" y="7204"/>
+                  </a:lnTo>
+                  <a:lnTo>
+                    <a:pt x="1360827" y="6845"/>
+                  </a:lnTo>
+                  <a:lnTo>
+                    <a:pt x="1289205" y="6486"/>
+                  </a:lnTo>
+                  <a:lnTo>
+                    <a:pt x="1217582" y="6127"/>
+                  </a:lnTo>
+                  <a:lnTo>
+                    <a:pt x="1145960" y="5768"/>
+                  </a:lnTo>
+                  <a:lnTo>
+                    <a:pt x="1074337" y="5409"/>
+                  </a:lnTo>
+                  <a:lnTo>
+                    <a:pt x="1002715" y="5049"/>
+                  </a:lnTo>
+                  <a:lnTo>
+                    <a:pt x="931092" y="4689"/>
+                  </a:lnTo>
+                  <a:lnTo>
+                    <a:pt x="859470" y="4330"/>
+                  </a:lnTo>
+                  <a:lnTo>
+                    <a:pt x="787847" y="3970"/>
+                  </a:lnTo>
+                  <a:lnTo>
+                    <a:pt x="716225" y="3609"/>
+                  </a:lnTo>
+                  <a:lnTo>
+                    <a:pt x="644602" y="3249"/>
+                  </a:lnTo>
+                  <a:lnTo>
+                    <a:pt x="572980" y="2889"/>
+                  </a:lnTo>
+                  <a:lnTo>
+                    <a:pt x="501357" y="2528"/>
+                  </a:lnTo>
+                  <a:lnTo>
+                    <a:pt x="429735" y="2167"/>
+                  </a:lnTo>
+                  <a:lnTo>
+                    <a:pt x="358112" y="1806"/>
+                  </a:lnTo>
+                  <a:lnTo>
+                    <a:pt x="286490" y="1445"/>
+                  </a:lnTo>
+                  <a:lnTo>
+                    <a:pt x="214867" y="1084"/>
+                  </a:lnTo>
+                  <a:lnTo>
+                    <a:pt x="143245" y="723"/>
+                  </a:lnTo>
+                  <a:lnTo>
+                    <a:pt x="71622" y="361"/>
                   </a:lnTo>
                   <a:lnTo>
                     <a:pt x="0" y="0"/>
@@ -4034,249 +4034,261 @@
           </p:nvSpPr>
           <p:spPr>
             <a:xfrm>
-              <a:off x="2689142" y="2073503"/>
-              <a:ext cx="5573536" cy="3156300"/>
+              <a:off x="2445112" y="2073503"/>
+              <a:ext cx="5817567" cy="3135167"/>
             </a:xfrm>
             <a:custGeom>
               <a:avLst/>
               <a:pathLst>
-                <a:path w="5573536" h="3156300">
+                <a:path w="5817567" h="3135167">
                   <a:moveTo>
                     <a:pt x="0" y="0"/>
                   </a:moveTo>
                   <a:lnTo>
-                    <a:pt x="58602" y="85773"/>
-                  </a:lnTo>
-                  <a:lnTo>
-                    <a:pt x="130224" y="187466"/>
-                  </a:lnTo>
-                  <a:lnTo>
-                    <a:pt x="201847" y="286116"/>
-                  </a:lnTo>
-                  <a:lnTo>
-                    <a:pt x="273470" y="381813"/>
-                  </a:lnTo>
-                  <a:lnTo>
-                    <a:pt x="345092" y="474647"/>
-                  </a:lnTo>
-                  <a:lnTo>
-                    <a:pt x="416715" y="564702"/>
-                  </a:lnTo>
-                  <a:lnTo>
-                    <a:pt x="488337" y="652062"/>
-                  </a:lnTo>
-                  <a:lnTo>
-                    <a:pt x="559960" y="736807"/>
-                  </a:lnTo>
-                  <a:lnTo>
-                    <a:pt x="631582" y="819016"/>
-                  </a:lnTo>
-                  <a:lnTo>
-                    <a:pt x="703205" y="898765"/>
-                  </a:lnTo>
-                  <a:lnTo>
-                    <a:pt x="774827" y="976128"/>
-                  </a:lnTo>
-                  <a:lnTo>
-                    <a:pt x="846450" y="1051175"/>
-                  </a:lnTo>
-                  <a:lnTo>
-                    <a:pt x="918072" y="1123976"/>
-                  </a:lnTo>
-                  <a:lnTo>
-                    <a:pt x="989695" y="1194598"/>
-                  </a:lnTo>
-                  <a:lnTo>
-                    <a:pt x="1061317" y="1263106"/>
-                  </a:lnTo>
-                  <a:lnTo>
-                    <a:pt x="1132940" y="1329565"/>
-                  </a:lnTo>
-                  <a:lnTo>
-                    <a:pt x="1204562" y="1394034"/>
-                  </a:lnTo>
-                  <a:lnTo>
-                    <a:pt x="1276185" y="1456574"/>
-                  </a:lnTo>
-                  <a:lnTo>
-                    <a:pt x="1347807" y="1517243"/>
-                  </a:lnTo>
-                  <a:lnTo>
-                    <a:pt x="1419430" y="1576095"/>
-                  </a:lnTo>
-                  <a:lnTo>
-                    <a:pt x="1491052" y="1633187"/>
-                  </a:lnTo>
-                  <a:lnTo>
-                    <a:pt x="1562675" y="1688570"/>
-                  </a:lnTo>
-                  <a:lnTo>
-                    <a:pt x="1634298" y="1742295"/>
-                  </a:lnTo>
-                  <a:lnTo>
-                    <a:pt x="1705920" y="1794412"/>
-                  </a:lnTo>
-                  <a:lnTo>
-                    <a:pt x="1777543" y="1844970"/>
-                  </a:lnTo>
-                  <a:lnTo>
-                    <a:pt x="1849165" y="1894015"/>
-                  </a:lnTo>
-                  <a:lnTo>
-                    <a:pt x="1920788" y="1941591"/>
-                  </a:lnTo>
-                  <a:lnTo>
-                    <a:pt x="1992410" y="1987744"/>
-                  </a:lnTo>
-                  <a:lnTo>
-                    <a:pt x="2064033" y="2032516"/>
-                  </a:lnTo>
-                  <a:lnTo>
-                    <a:pt x="2135655" y="2075948"/>
-                  </a:lnTo>
-                  <a:lnTo>
-                    <a:pt x="2207278" y="2118080"/>
-                  </a:lnTo>
-                  <a:lnTo>
-                    <a:pt x="2278900" y="2158951"/>
-                  </a:lnTo>
-                  <a:lnTo>
-                    <a:pt x="2350523" y="2198599"/>
-                  </a:lnTo>
-                  <a:lnTo>
-                    <a:pt x="2422145" y="2237060"/>
-                  </a:lnTo>
-                  <a:lnTo>
-                    <a:pt x="2493768" y="2274371"/>
-                  </a:lnTo>
-                  <a:lnTo>
-                    <a:pt x="2565390" y="2310564"/>
-                  </a:lnTo>
-                  <a:lnTo>
-                    <a:pt x="2637013" y="2345675"/>
-                  </a:lnTo>
-                  <a:lnTo>
-                    <a:pt x="2708635" y="2379735"/>
-                  </a:lnTo>
-                  <a:lnTo>
-                    <a:pt x="2780258" y="2412775"/>
-                  </a:lnTo>
-                  <a:lnTo>
-                    <a:pt x="2851880" y="2444827"/>
-                  </a:lnTo>
-                  <a:lnTo>
-                    <a:pt x="2923503" y="2475919"/>
-                  </a:lnTo>
-                  <a:lnTo>
-                    <a:pt x="2995126" y="2506081"/>
-                  </a:lnTo>
-                  <a:lnTo>
-                    <a:pt x="3066748" y="2535340"/>
-                  </a:lnTo>
-                  <a:lnTo>
-                    <a:pt x="3138371" y="2563723"/>
-                  </a:lnTo>
-                  <a:lnTo>
-                    <a:pt x="3209993" y="2591258"/>
-                  </a:lnTo>
-                  <a:lnTo>
-                    <a:pt x="3281616" y="2617968"/>
-                  </a:lnTo>
-                  <a:lnTo>
-                    <a:pt x="3353238" y="2643878"/>
-                  </a:lnTo>
-                  <a:lnTo>
-                    <a:pt x="3424861" y="2669013"/>
-                  </a:lnTo>
-                  <a:lnTo>
-                    <a:pt x="3496483" y="2693396"/>
-                  </a:lnTo>
-                  <a:lnTo>
-                    <a:pt x="3568106" y="2717050"/>
-                  </a:lnTo>
-                  <a:lnTo>
-                    <a:pt x="3639728" y="2739995"/>
-                  </a:lnTo>
-                  <a:lnTo>
-                    <a:pt x="3711351" y="2762254"/>
-                  </a:lnTo>
-                  <a:lnTo>
-                    <a:pt x="3782973" y="2783846"/>
-                  </a:lnTo>
-                  <a:lnTo>
-                    <a:pt x="3854596" y="2804793"/>
-                  </a:lnTo>
-                  <a:lnTo>
-                    <a:pt x="3926218" y="2825112"/>
-                  </a:lnTo>
-                  <a:lnTo>
-                    <a:pt x="3997841" y="2844823"/>
-                  </a:lnTo>
-                  <a:lnTo>
-                    <a:pt x="4069463" y="2863945"/>
-                  </a:lnTo>
-                  <a:lnTo>
-                    <a:pt x="4141086" y="2882494"/>
-                  </a:lnTo>
-                  <a:lnTo>
-                    <a:pt x="4212708" y="2900488"/>
-                  </a:lnTo>
-                  <a:lnTo>
-                    <a:pt x="4284331" y="2917944"/>
-                  </a:lnTo>
-                  <a:lnTo>
-                    <a:pt x="4355954" y="2934877"/>
-                  </a:lnTo>
-                  <a:lnTo>
-                    <a:pt x="4427576" y="2951303"/>
-                  </a:lnTo>
-                  <a:lnTo>
-                    <a:pt x="4499199" y="2967238"/>
-                  </a:lnTo>
-                  <a:lnTo>
-                    <a:pt x="4570821" y="2982696"/>
-                  </a:lnTo>
-                  <a:lnTo>
-                    <a:pt x="4642444" y="2997691"/>
-                  </a:lnTo>
-                  <a:lnTo>
-                    <a:pt x="4714066" y="3012237"/>
-                  </a:lnTo>
-                  <a:lnTo>
-                    <a:pt x="4785689" y="3026348"/>
-                  </a:lnTo>
-                  <a:lnTo>
-                    <a:pt x="4857311" y="3040037"/>
-                  </a:lnTo>
-                  <a:lnTo>
-                    <a:pt x="4928934" y="3053316"/>
-                  </a:lnTo>
-                  <a:lnTo>
-                    <a:pt x="5000556" y="3066198"/>
-                  </a:lnTo>
-                  <a:lnTo>
-                    <a:pt x="5072179" y="3078694"/>
-                  </a:lnTo>
-                  <a:lnTo>
-                    <a:pt x="5143801" y="3090817"/>
-                  </a:lnTo>
-                  <a:lnTo>
-                    <a:pt x="5215424" y="3102576"/>
-                  </a:lnTo>
-                  <a:lnTo>
-                    <a:pt x="5287046" y="3113984"/>
-                  </a:lnTo>
-                  <a:lnTo>
-                    <a:pt x="5358669" y="3125050"/>
-                  </a:lnTo>
-                  <a:lnTo>
-                    <a:pt x="5430291" y="3135785"/>
-                  </a:lnTo>
-                  <a:lnTo>
-                    <a:pt x="5501914" y="3146198"/>
-                  </a:lnTo>
-                  <a:lnTo>
-                    <a:pt x="5573536" y="3156300"/>
+                    <a:pt x="16142" y="22425"/>
+                  </a:lnTo>
+                  <a:lnTo>
+                    <a:pt x="87765" y="119141"/>
+                  </a:lnTo>
+                  <a:lnTo>
+                    <a:pt x="159387" y="213156"/>
+                  </a:lnTo>
+                  <a:lnTo>
+                    <a:pt x="231010" y="304543"/>
+                  </a:lnTo>
+                  <a:lnTo>
+                    <a:pt x="302632" y="393377"/>
+                  </a:lnTo>
+                  <a:lnTo>
+                    <a:pt x="374255" y="479729"/>
+                  </a:lnTo>
+                  <a:lnTo>
+                    <a:pt x="445877" y="563668"/>
+                  </a:lnTo>
+                  <a:lnTo>
+                    <a:pt x="517500" y="645261"/>
+                  </a:lnTo>
+                  <a:lnTo>
+                    <a:pt x="589122" y="724575"/>
+                  </a:lnTo>
+                  <a:lnTo>
+                    <a:pt x="660745" y="801672"/>
+                  </a:lnTo>
+                  <a:lnTo>
+                    <a:pt x="732367" y="876615"/>
+                  </a:lnTo>
+                  <a:lnTo>
+                    <a:pt x="803990" y="949464"/>
+                  </a:lnTo>
+                  <a:lnTo>
+                    <a:pt x="875612" y="1020277"/>
+                  </a:lnTo>
+                  <a:lnTo>
+                    <a:pt x="947235" y="1089112"/>
+                  </a:lnTo>
+                  <a:lnTo>
+                    <a:pt x="1018857" y="1156023"/>
+                  </a:lnTo>
+                  <a:lnTo>
+                    <a:pt x="1090480" y="1221065"/>
+                  </a:lnTo>
+                  <a:lnTo>
+                    <a:pt x="1162103" y="1284289"/>
+                  </a:lnTo>
+                  <a:lnTo>
+                    <a:pt x="1233725" y="1345747"/>
+                  </a:lnTo>
+                  <a:lnTo>
+                    <a:pt x="1305348" y="1405487"/>
+                  </a:lnTo>
+                  <a:lnTo>
+                    <a:pt x="1376970" y="1463558"/>
+                  </a:lnTo>
+                  <a:lnTo>
+                    <a:pt x="1448593" y="1520007"/>
+                  </a:lnTo>
+                  <a:lnTo>
+                    <a:pt x="1520215" y="1574878"/>
+                  </a:lnTo>
+                  <a:lnTo>
+                    <a:pt x="1591838" y="1628216"/>
+                  </a:lnTo>
+                  <a:lnTo>
+                    <a:pt x="1663460" y="1680063"/>
+                  </a:lnTo>
+                  <a:lnTo>
+                    <a:pt x="1735083" y="1730462"/>
+                  </a:lnTo>
+                  <a:lnTo>
+                    <a:pt x="1806705" y="1779453"/>
+                  </a:lnTo>
+                  <a:lnTo>
+                    <a:pt x="1878328" y="1827075"/>
+                  </a:lnTo>
+                  <a:lnTo>
+                    <a:pt x="1949950" y="1873366"/>
+                  </a:lnTo>
+                  <a:lnTo>
+                    <a:pt x="2021573" y="1918363"/>
+                  </a:lnTo>
+                  <a:lnTo>
+                    <a:pt x="2093195" y="1962103"/>
+                  </a:lnTo>
+                  <a:lnTo>
+                    <a:pt x="2164818" y="2004621"/>
+                  </a:lnTo>
+                  <a:lnTo>
+                    <a:pt x="2236440" y="2045951"/>
+                  </a:lnTo>
+                  <a:lnTo>
+                    <a:pt x="2308063" y="2086126"/>
+                  </a:lnTo>
+                  <a:lnTo>
+                    <a:pt x="2379685" y="2125179"/>
+                  </a:lnTo>
+                  <a:lnTo>
+                    <a:pt x="2451308" y="2163140"/>
+                  </a:lnTo>
+                  <a:lnTo>
+                    <a:pt x="2522931" y="2200041"/>
+                  </a:lnTo>
+                  <a:lnTo>
+                    <a:pt x="2594553" y="2235911"/>
+                  </a:lnTo>
+                  <a:lnTo>
+                    <a:pt x="2666176" y="2270778"/>
+                  </a:lnTo>
+                  <a:lnTo>
+                    <a:pt x="2737798" y="2304671"/>
+                  </a:lnTo>
+                  <a:lnTo>
+                    <a:pt x="2809421" y="2337617"/>
+                  </a:lnTo>
+                  <a:lnTo>
+                    <a:pt x="2881043" y="2369642"/>
+                  </a:lnTo>
+                  <a:lnTo>
+                    <a:pt x="2952666" y="2400773"/>
+                  </a:lnTo>
+                  <a:lnTo>
+                    <a:pt x="3024288" y="2431033"/>
+                  </a:lnTo>
+                  <a:lnTo>
+                    <a:pt x="3095911" y="2460448"/>
+                  </a:lnTo>
+                  <a:lnTo>
+                    <a:pt x="3167533" y="2489042"/>
+                  </a:lnTo>
+                  <a:lnTo>
+                    <a:pt x="3239156" y="2516836"/>
+                  </a:lnTo>
+                  <a:lnTo>
+                    <a:pt x="3310778" y="2543853"/>
+                  </a:lnTo>
+                  <a:lnTo>
+                    <a:pt x="3382401" y="2570116"/>
+                  </a:lnTo>
+                  <a:lnTo>
+                    <a:pt x="3454023" y="2595645"/>
+                  </a:lnTo>
+                  <a:lnTo>
+                    <a:pt x="3525646" y="2620460"/>
+                  </a:lnTo>
+                  <a:lnTo>
+                    <a:pt x="3597268" y="2644582"/>
+                  </a:lnTo>
+                  <a:lnTo>
+                    <a:pt x="3668891" y="2668031"/>
+                  </a:lnTo>
+                  <a:lnTo>
+                    <a:pt x="3740513" y="2690823"/>
+                  </a:lnTo>
+                  <a:lnTo>
+                    <a:pt x="3812136" y="2712979"/>
+                  </a:lnTo>
+                  <a:lnTo>
+                    <a:pt x="3883759" y="2734516"/>
+                  </a:lnTo>
+                  <a:lnTo>
+                    <a:pt x="3955381" y="2755451"/>
+                  </a:lnTo>
+                  <a:lnTo>
+                    <a:pt x="4027004" y="2775802"/>
+                  </a:lnTo>
+                  <a:lnTo>
+                    <a:pt x="4098626" y="2795583"/>
+                  </a:lnTo>
+                  <a:lnTo>
+                    <a:pt x="4170249" y="2814812"/>
+                  </a:lnTo>
+                  <a:lnTo>
+                    <a:pt x="4241871" y="2833503"/>
+                  </a:lnTo>
+                  <a:lnTo>
+                    <a:pt x="4313494" y="2851673"/>
+                  </a:lnTo>
+                  <a:lnTo>
+                    <a:pt x="4385116" y="2869334"/>
+                  </a:lnTo>
+                  <a:lnTo>
+                    <a:pt x="4456739" y="2886502"/>
+                  </a:lnTo>
+                  <a:lnTo>
+                    <a:pt x="4528361" y="2903190"/>
+                  </a:lnTo>
+                  <a:lnTo>
+                    <a:pt x="4599984" y="2919412"/>
+                  </a:lnTo>
+                  <a:lnTo>
+                    <a:pt x="4671606" y="2935181"/>
+                  </a:lnTo>
+                  <a:lnTo>
+                    <a:pt x="4743229" y="2950509"/>
+                  </a:lnTo>
+                  <a:lnTo>
+                    <a:pt x="4814851" y="2965409"/>
+                  </a:lnTo>
+                  <a:lnTo>
+                    <a:pt x="4886474" y="2979893"/>
+                  </a:lnTo>
+                  <a:lnTo>
+                    <a:pt x="4958096" y="2993971"/>
+                  </a:lnTo>
+                  <a:lnTo>
+                    <a:pt x="5029719" y="3007657"/>
+                  </a:lnTo>
+                  <a:lnTo>
+                    <a:pt x="5101341" y="3020960"/>
+                  </a:lnTo>
+                  <a:lnTo>
+                    <a:pt x="5172964" y="3033891"/>
+                  </a:lnTo>
+                  <a:lnTo>
+                    <a:pt x="5244587" y="3046461"/>
+                  </a:lnTo>
+                  <a:lnTo>
+                    <a:pt x="5316209" y="3058680"/>
+                  </a:lnTo>
+                  <a:lnTo>
+                    <a:pt x="5387832" y="3070557"/>
+                  </a:lnTo>
+                  <a:lnTo>
+                    <a:pt x="5459454" y="3082102"/>
+                  </a:lnTo>
+                  <a:lnTo>
+                    <a:pt x="5531077" y="3093325"/>
+                  </a:lnTo>
+                  <a:lnTo>
+                    <a:pt x="5602699" y="3104234"/>
+                  </a:lnTo>
+                  <a:lnTo>
+                    <a:pt x="5674322" y="3114839"/>
+                  </a:lnTo>
+                  <a:lnTo>
+                    <a:pt x="5745944" y="3125147"/>
+                  </a:lnTo>
+                  <a:lnTo>
+                    <a:pt x="5817567" y="3135167"/>
                   </a:lnTo>
                 </a:path>
               </a:pathLst>
@@ -5016,7 +5028,7 @@
                   <a:latin typeface="Helvetica"/>
                   <a:cs typeface="Helvetica"/>
                 </a:rPr>
-                <a:t>subHR per 1 mL/min: 0.96 (0.93-0.99)  |  per IQR (Δ = 18.2): 0.49 (0.27-0.89)  |  IQR: [-11.5, 6.7]</a:t>
+                <a:t>subHR per 1 mL/min: 0.96 (0.93-1.00)  |  per IQR (Δ = 18.2): 0.51 (0.27-0.99)  |  IQR: [-11.5, 6.7]</a:t>
               </a:r>
             </a:p>
           </p:txBody>

--- a/docs/plots/carbo/jx_carbo_linsubhr_egfrdisc_sideeffect.pptx
+++ b/docs/plots/carbo/jx_carbo_linsubhr_egfrdisc_sideeffect.pptx
@@ -3019,7 +3019,7 @@
                     <a:pt x="3151391" y="208951"/>
                   </a:lnTo>
                   <a:lnTo>
-                    <a:pt x="3223013" y="388092"/>
+                    <a:pt x="3223013" y="388093"/>
                   </a:lnTo>
                   <a:lnTo>
                     <a:pt x="3294636" y="557435"/>
@@ -3334,7 +3334,7 @@
                     <a:pt x="3581126" y="2647788"/>
                   </a:lnTo>
                   <a:lnTo>
-                    <a:pt x="3509503" y="2647434"/>
+                    <a:pt x="3509503" y="2647433"/>
                   </a:lnTo>
                   <a:lnTo>
                     <a:pt x="3437881" y="2647079"/>
@@ -3361,7 +3361,7 @@
                     <a:pt x="2936523" y="2644594"/>
                   </a:lnTo>
                   <a:lnTo>
-                    <a:pt x="2864901" y="2644239"/>
+                    <a:pt x="2864901" y="2644238"/>
                   </a:lnTo>
                   <a:lnTo>
                     <a:pt x="2793278" y="2643883"/>
@@ -3527,7 +3527,7 @@
                     <a:pt x="78568" y="208951"/>
                   </a:lnTo>
                   <a:lnTo>
-                    <a:pt x="150191" y="388092"/>
+                    <a:pt x="150191" y="388093"/>
                   </a:lnTo>
                   <a:lnTo>
                     <a:pt x="221813" y="557435"/>
@@ -3710,14 +3710,14 @@
           <p:spPr>
             <a:xfrm>
               <a:off x="1172049" y="4703393"/>
-              <a:ext cx="7090630" cy="705455"/>
+              <a:ext cx="7090630" cy="705456"/>
             </a:xfrm>
             <a:custGeom>
               <a:avLst/>
               <a:pathLst>
-                <a:path w="7090630" h="705455">
+                <a:path w="7090630" h="705456">
                   <a:moveTo>
-                    <a:pt x="7090630" y="705455"/>
+                    <a:pt x="7090630" y="705456"/>
                   </a:moveTo>
                   <a:lnTo>
                     <a:pt x="7019007" y="696868"/>
@@ -3813,7 +3813,7 @@
                     <a:pt x="4870331" y="24248"/>
                   </a:lnTo>
                   <a:lnTo>
-                    <a:pt x="4798709" y="23896"/>
+                    <a:pt x="4798709" y="23897"/>
                   </a:lnTo>
                   <a:lnTo>
                     <a:pt x="4727086" y="23545"/>
@@ -3828,7 +3828,7 @@
                     <a:pt x="4512219" y="22489"/>
                   </a:lnTo>
                   <a:lnTo>
-                    <a:pt x="4440596" y="22136"/>
+                    <a:pt x="4440596" y="22137"/>
                   </a:lnTo>
                   <a:lnTo>
                     <a:pt x="4368974" y="21784"/>
@@ -3846,7 +3846,7 @@
                     <a:pt x="4082483" y="20373"/>
                   </a:lnTo>
                   <a:lnTo>
-                    <a:pt x="4010861" y="20019"/>
+                    <a:pt x="4010861" y="20020"/>
                   </a:lnTo>
                   <a:lnTo>
                     <a:pt x="3939238" y="19666"/>
@@ -3870,7 +3870,7 @@
                     <a:pt x="3509503" y="17543"/>
                   </a:lnTo>
                   <a:lnTo>
-                    <a:pt x="3437881" y="17188"/>
+                    <a:pt x="3437881" y="17189"/>
                   </a:lnTo>
                   <a:lnTo>
                     <a:pt x="3366258" y="16834"/>
@@ -3891,7 +3891,7 @@
                     <a:pt x="3008146" y="15059"/>
                   </a:lnTo>
                   <a:lnTo>
-                    <a:pt x="2936523" y="14703"/>
+                    <a:pt x="2936523" y="14704"/>
                   </a:lnTo>
                   <a:lnTo>
                     <a:pt x="2864901" y="14348"/>
@@ -4069,7 +4069,7 @@
                     <a:pt x="517500" y="645261"/>
                   </a:lnTo>
                   <a:lnTo>
-                    <a:pt x="589122" y="724575"/>
+                    <a:pt x="589122" y="724574"/>
                   </a:lnTo>
                   <a:lnTo>
                     <a:pt x="660745" y="801672"/>
@@ -4093,7 +4093,7 @@
                     <a:pt x="1090480" y="1221065"/>
                   </a:lnTo>
                   <a:lnTo>
-                    <a:pt x="1162103" y="1284289"/>
+                    <a:pt x="1162102" y="1284289"/>
                   </a:lnTo>
                   <a:lnTo>
                     <a:pt x="1233725" y="1345747"/>
@@ -4150,7 +4150,7 @@
                     <a:pt x="2451308" y="2163140"/>
                   </a:lnTo>
                   <a:lnTo>
-                    <a:pt x="2522931" y="2200041"/>
+                    <a:pt x="2522930" y="2200041"/>
                   </a:lnTo>
                   <a:lnTo>
                     <a:pt x="2594553" y="2235911"/>
@@ -4207,7 +4207,7 @@
                     <a:pt x="3812136" y="2712979"/>
                   </a:lnTo>
                   <a:lnTo>
-                    <a:pt x="3883759" y="2734516"/>
+                    <a:pt x="3883758" y="2734516"/>
                   </a:lnTo>
                   <a:lnTo>
                     <a:pt x="3955381" y="2755451"/>
@@ -4264,7 +4264,7 @@
                     <a:pt x="5172964" y="3033891"/>
                   </a:lnTo>
                   <a:lnTo>
-                    <a:pt x="5244587" y="3046461"/>
+                    <a:pt x="5244586" y="3046461"/>
                   </a:lnTo>
                   <a:lnTo>
                     <a:pt x="5316209" y="3058680"/>

--- a/docs/plots/carbo/jx_carbo_linsubhr_egfrdisc_sideeffect.pptx
+++ b/docs/plots/carbo/jx_carbo_linsubhr_egfrdisc_sideeffect.pptx
@@ -4996,7 +4996,7 @@
           <p:spPr>
             <a:xfrm>
               <a:off x="817517" y="1896563"/>
-              <a:ext cx="4869911" cy="82021"/>
+              <a:ext cx="5413065" cy="82021"/>
             </a:xfrm>
             <a:prstGeom prst="rect">
               <a:avLst/>
@@ -5028,7 +5028,7 @@
                   <a:latin typeface="Helvetica"/>
                   <a:cs typeface="Helvetica"/>
                 </a:rPr>
-                <a:t>subHR per 1 mL/min: 0.96 (0.93-1.00)  |  per IQR (Δ = 18.2): 0.51 (0.27-0.99)  |  IQR: [-11.5, 6.7]</a:t>
+                <a:t>subHR per 1 mL/min: 0.96 (0.93-1.00), p = 0.047  |  per IQR (Δ = 18.2): 0.51 (0.27-0.99)  |  IQR: [-11.5, 6.7]</a:t>
               </a:r>
             </a:p>
           </p:txBody>

--- a/docs/plots/carbo/jx_carbo_linsubhr_egfrdisc_sideeffect.pptx
+++ b/docs/plots/carbo/jx_carbo_linsubhr_egfrdisc_sideeffect.pptx
@@ -2271,26 +2271,26 @@
           </p:nvSpPr>
           <p:spPr>
             <a:xfrm>
-              <a:off x="817517" y="5142518"/>
-              <a:ext cx="7799693" cy="0"/>
+              <a:off x="915645" y="5071743"/>
+              <a:ext cx="7682587" cy="0"/>
             </a:xfrm>
             <a:custGeom>
               <a:avLst/>
               <a:pathLst>
-                <a:path w="7799693" h="0">
+                <a:path w="7682587" h="0">
                   <a:moveTo>
                     <a:pt x="0" y="0"/>
                   </a:moveTo>
                   <a:lnTo>
-                    <a:pt x="7799693" y="0"/>
-                  </a:lnTo>
-                  <a:lnTo>
-                    <a:pt x="7799693" y="0"/>
+                    <a:pt x="7682587" y="0"/>
+                  </a:lnTo>
+                  <a:lnTo>
+                    <a:pt x="7682587" y="0"/>
                   </a:lnTo>
                 </a:path>
               </a:pathLst>
             </a:custGeom>
-            <a:ln w="6775" cap="flat">
+            <a:ln w="8623" cap="flat">
               <a:solidFill>
                 <a:srgbClr val="EBEBEB">
                   <a:alpha val="100000"/>
@@ -2314,26 +2314,26 @@
           </p:nvSpPr>
           <p:spPr>
             <a:xfrm>
-              <a:off x="817517" y="4313054"/>
-              <a:ext cx="7799693" cy="0"/>
+              <a:off x="915645" y="4298074"/>
+              <a:ext cx="7682587" cy="0"/>
             </a:xfrm>
             <a:custGeom>
               <a:avLst/>
               <a:pathLst>
-                <a:path w="7799693" h="0">
+                <a:path w="7682587" h="0">
                   <a:moveTo>
                     <a:pt x="0" y="0"/>
                   </a:moveTo>
                   <a:lnTo>
-                    <a:pt x="7799693" y="0"/>
-                  </a:lnTo>
-                  <a:lnTo>
-                    <a:pt x="7799693" y="0"/>
+                    <a:pt x="7682587" y="0"/>
+                  </a:lnTo>
+                  <a:lnTo>
+                    <a:pt x="7682587" y="0"/>
                   </a:lnTo>
                 </a:path>
               </a:pathLst>
             </a:custGeom>
-            <a:ln w="6775" cap="flat">
+            <a:ln w="8623" cap="flat">
               <a:solidFill>
                 <a:srgbClr val="EBEBEB">
                   <a:alpha val="100000"/>
@@ -2357,26 +2357,26 @@
           </p:nvSpPr>
           <p:spPr>
             <a:xfrm>
-              <a:off x="817517" y="3483591"/>
-              <a:ext cx="7799693" cy="0"/>
+              <a:off x="915645" y="3524405"/>
+              <a:ext cx="7682587" cy="0"/>
             </a:xfrm>
             <a:custGeom>
               <a:avLst/>
               <a:pathLst>
-                <a:path w="7799693" h="0">
+                <a:path w="7682587" h="0">
                   <a:moveTo>
                     <a:pt x="0" y="0"/>
                   </a:moveTo>
                   <a:lnTo>
-                    <a:pt x="7799693" y="0"/>
-                  </a:lnTo>
-                  <a:lnTo>
-                    <a:pt x="7799693" y="0"/>
+                    <a:pt x="7682587" y="0"/>
+                  </a:lnTo>
+                  <a:lnTo>
+                    <a:pt x="7682587" y="0"/>
                   </a:lnTo>
                 </a:path>
               </a:pathLst>
             </a:custGeom>
-            <a:ln w="6775" cap="flat">
+            <a:ln w="8623" cap="flat">
               <a:solidFill>
                 <a:srgbClr val="EBEBEB">
                   <a:alpha val="100000"/>
@@ -2400,26 +2400,26 @@
           </p:nvSpPr>
           <p:spPr>
             <a:xfrm>
-              <a:off x="817517" y="2654127"/>
-              <a:ext cx="7799693" cy="0"/>
+              <a:off x="915645" y="2750737"/>
+              <a:ext cx="7682587" cy="0"/>
             </a:xfrm>
             <a:custGeom>
               <a:avLst/>
               <a:pathLst>
-                <a:path w="7799693" h="0">
+                <a:path w="7682587" h="0">
                   <a:moveTo>
                     <a:pt x="0" y="0"/>
                   </a:moveTo>
                   <a:lnTo>
-                    <a:pt x="7799693" y="0"/>
-                  </a:lnTo>
-                  <a:lnTo>
-                    <a:pt x="7799693" y="0"/>
+                    <a:pt x="7682587" y="0"/>
+                  </a:lnTo>
+                  <a:lnTo>
+                    <a:pt x="7682587" y="0"/>
                   </a:lnTo>
                 </a:path>
               </a:pathLst>
             </a:custGeom>
-            <a:ln w="6775" cap="flat">
+            <a:ln w="8623" cap="flat">
               <a:solidFill>
                 <a:srgbClr val="EBEBEB">
                   <a:alpha val="100000"/>
@@ -2443,15 +2443,15 @@
           </p:nvSpPr>
           <p:spPr>
             <a:xfrm>
-              <a:off x="1487487" y="2073503"/>
-              <a:ext cx="0" cy="3649639"/>
+              <a:off x="1575555" y="2209169"/>
+              <a:ext cx="0" cy="3404141"/>
             </a:xfrm>
             <a:custGeom>
               <a:avLst/>
               <a:pathLst>
-                <a:path w="0" h="3649639">
+                <a:path w="0" h="3404141">
                   <a:moveTo>
-                    <a:pt x="0" y="3649639"/>
+                    <a:pt x="0" y="3404141"/>
                   </a:moveTo>
                   <a:lnTo>
                     <a:pt x="0" y="0"/>
@@ -2462,7 +2462,7 @@
                 </a:path>
               </a:pathLst>
             </a:custGeom>
-            <a:ln w="6775" cap="flat">
+            <a:ln w="8623" cap="flat">
               <a:solidFill>
                 <a:srgbClr val="EBEBEB">
                   <a:alpha val="100000"/>
@@ -2486,15 +2486,15 @@
           </p:nvSpPr>
           <p:spPr>
             <a:xfrm>
-              <a:off x="3337360" y="2073503"/>
-              <a:ext cx="0" cy="3649639"/>
+              <a:off x="3397654" y="2209169"/>
+              <a:ext cx="0" cy="3404141"/>
             </a:xfrm>
             <a:custGeom>
               <a:avLst/>
               <a:pathLst>
-                <a:path w="0" h="3649639">
+                <a:path w="0" h="3404141">
                   <a:moveTo>
-                    <a:pt x="0" y="3649639"/>
+                    <a:pt x="0" y="3404141"/>
                   </a:moveTo>
                   <a:lnTo>
                     <a:pt x="0" y="0"/>
@@ -2505,7 +2505,7 @@
                 </a:path>
               </a:pathLst>
             </a:custGeom>
-            <a:ln w="6775" cap="flat">
+            <a:ln w="8623" cap="flat">
               <a:solidFill>
                 <a:srgbClr val="EBEBEB">
                   <a:alpha val="100000"/>
@@ -2529,15 +2529,15 @@
           </p:nvSpPr>
           <p:spPr>
             <a:xfrm>
-              <a:off x="5187233" y="2073503"/>
-              <a:ext cx="0" cy="3649639"/>
+              <a:off x="5219752" y="2209169"/>
+              <a:ext cx="0" cy="3404141"/>
             </a:xfrm>
             <a:custGeom>
               <a:avLst/>
               <a:pathLst>
-                <a:path w="0" h="3649639">
+                <a:path w="0" h="3404141">
                   <a:moveTo>
-                    <a:pt x="0" y="3649639"/>
+                    <a:pt x="0" y="3404141"/>
                   </a:moveTo>
                   <a:lnTo>
                     <a:pt x="0" y="0"/>
@@ -2548,7 +2548,7 @@
                 </a:path>
               </a:pathLst>
             </a:custGeom>
-            <a:ln w="6775" cap="flat">
+            <a:ln w="8623" cap="flat">
               <a:solidFill>
                 <a:srgbClr val="EBEBEB">
                   <a:alpha val="100000"/>
@@ -2572,15 +2572,15 @@
           </p:nvSpPr>
           <p:spPr>
             <a:xfrm>
-              <a:off x="7037106" y="2073503"/>
-              <a:ext cx="0" cy="3649639"/>
+              <a:off x="7041851" y="2209169"/>
+              <a:ext cx="0" cy="3404141"/>
             </a:xfrm>
             <a:custGeom>
               <a:avLst/>
               <a:pathLst>
-                <a:path w="0" h="3649639">
+                <a:path w="0" h="3404141">
                   <a:moveTo>
-                    <a:pt x="0" y="3649639"/>
+                    <a:pt x="0" y="3404141"/>
                   </a:moveTo>
                   <a:lnTo>
                     <a:pt x="0" y="0"/>
@@ -2591,7 +2591,7 @@
                 </a:path>
               </a:pathLst>
             </a:custGeom>
-            <a:ln w="6775" cap="flat">
+            <a:ln w="8623" cap="flat">
               <a:solidFill>
                 <a:srgbClr val="EBEBEB">
                   <a:alpha val="100000"/>
@@ -2615,26 +2615,26 @@
           </p:nvSpPr>
           <p:spPr>
             <a:xfrm>
-              <a:off x="817517" y="5557249"/>
-              <a:ext cx="7799693" cy="0"/>
+              <a:off x="915645" y="5458577"/>
+              <a:ext cx="7682587" cy="0"/>
             </a:xfrm>
             <a:custGeom>
               <a:avLst/>
               <a:pathLst>
-                <a:path w="7799693" h="0">
+                <a:path w="7682587" h="0">
                   <a:moveTo>
                     <a:pt x="0" y="0"/>
                   </a:moveTo>
                   <a:lnTo>
-                    <a:pt x="7799693" y="0"/>
-                  </a:lnTo>
-                  <a:lnTo>
-                    <a:pt x="7799693" y="0"/>
+                    <a:pt x="7682587" y="0"/>
+                  </a:lnTo>
+                  <a:lnTo>
+                    <a:pt x="7682587" y="0"/>
                   </a:lnTo>
                 </a:path>
               </a:pathLst>
             </a:custGeom>
-            <a:ln w="13550" cap="flat">
+            <a:ln w="17246" cap="flat">
               <a:solidFill>
                 <a:srgbClr val="EBEBEB">
                   <a:alpha val="100000"/>
@@ -2658,26 +2658,26 @@
           </p:nvSpPr>
           <p:spPr>
             <a:xfrm>
-              <a:off x="817517" y="4727786"/>
-              <a:ext cx="7799693" cy="0"/>
+              <a:off x="915645" y="4684908"/>
+              <a:ext cx="7682587" cy="0"/>
             </a:xfrm>
             <a:custGeom>
               <a:avLst/>
               <a:pathLst>
-                <a:path w="7799693" h="0">
+                <a:path w="7682587" h="0">
                   <a:moveTo>
                     <a:pt x="0" y="0"/>
                   </a:moveTo>
                   <a:lnTo>
-                    <a:pt x="7799693" y="0"/>
-                  </a:lnTo>
-                  <a:lnTo>
-                    <a:pt x="7799693" y="0"/>
+                    <a:pt x="7682587" y="0"/>
+                  </a:lnTo>
+                  <a:lnTo>
+                    <a:pt x="7682587" y="0"/>
                   </a:lnTo>
                 </a:path>
               </a:pathLst>
             </a:custGeom>
-            <a:ln w="13550" cap="flat">
+            <a:ln w="17246" cap="flat">
               <a:solidFill>
                 <a:srgbClr val="EBEBEB">
                   <a:alpha val="100000"/>
@@ -2701,26 +2701,26 @@
           </p:nvSpPr>
           <p:spPr>
             <a:xfrm>
-              <a:off x="817517" y="3898322"/>
-              <a:ext cx="7799693" cy="0"/>
+              <a:off x="915645" y="3911240"/>
+              <a:ext cx="7682587" cy="0"/>
             </a:xfrm>
             <a:custGeom>
               <a:avLst/>
               <a:pathLst>
-                <a:path w="7799693" h="0">
+                <a:path w="7682587" h="0">
                   <a:moveTo>
                     <a:pt x="0" y="0"/>
                   </a:moveTo>
                   <a:lnTo>
-                    <a:pt x="7799693" y="0"/>
-                  </a:lnTo>
-                  <a:lnTo>
-                    <a:pt x="7799693" y="0"/>
+                    <a:pt x="7682587" y="0"/>
+                  </a:lnTo>
+                  <a:lnTo>
+                    <a:pt x="7682587" y="0"/>
                   </a:lnTo>
                 </a:path>
               </a:pathLst>
             </a:custGeom>
-            <a:ln w="13550" cap="flat">
+            <a:ln w="17246" cap="flat">
               <a:solidFill>
                 <a:srgbClr val="EBEBEB">
                   <a:alpha val="100000"/>
@@ -2744,26 +2744,26 @@
           </p:nvSpPr>
           <p:spPr>
             <a:xfrm>
-              <a:off x="817517" y="3068859"/>
-              <a:ext cx="7799693" cy="0"/>
+              <a:off x="915645" y="3137571"/>
+              <a:ext cx="7682587" cy="0"/>
             </a:xfrm>
             <a:custGeom>
               <a:avLst/>
               <a:pathLst>
-                <a:path w="7799693" h="0">
+                <a:path w="7682587" h="0">
                   <a:moveTo>
                     <a:pt x="0" y="0"/>
                   </a:moveTo>
                   <a:lnTo>
-                    <a:pt x="7799693" y="0"/>
-                  </a:lnTo>
-                  <a:lnTo>
-                    <a:pt x="7799693" y="0"/>
+                    <a:pt x="7682587" y="0"/>
+                  </a:lnTo>
+                  <a:lnTo>
+                    <a:pt x="7682587" y="0"/>
                   </a:lnTo>
                 </a:path>
               </a:pathLst>
             </a:custGeom>
-            <a:ln w="13550" cap="flat">
+            <a:ln w="17246" cap="flat">
               <a:solidFill>
                 <a:srgbClr val="EBEBEB">
                   <a:alpha val="100000"/>
@@ -2787,26 +2787,26 @@
           </p:nvSpPr>
           <p:spPr>
             <a:xfrm>
-              <a:off x="817517" y="2239395"/>
-              <a:ext cx="7799693" cy="0"/>
+              <a:off x="915645" y="2363903"/>
+              <a:ext cx="7682587" cy="0"/>
             </a:xfrm>
             <a:custGeom>
               <a:avLst/>
               <a:pathLst>
-                <a:path w="7799693" h="0">
+                <a:path w="7682587" h="0">
                   <a:moveTo>
                     <a:pt x="0" y="0"/>
                   </a:moveTo>
                   <a:lnTo>
-                    <a:pt x="7799693" y="0"/>
-                  </a:lnTo>
-                  <a:lnTo>
-                    <a:pt x="7799693" y="0"/>
+                    <a:pt x="7682587" y="0"/>
+                  </a:lnTo>
+                  <a:lnTo>
+                    <a:pt x="7682587" y="0"/>
                   </a:lnTo>
                 </a:path>
               </a:pathLst>
             </a:custGeom>
-            <a:ln w="13550" cap="flat">
+            <a:ln w="17246" cap="flat">
               <a:solidFill>
                 <a:srgbClr val="EBEBEB">
                   <a:alpha val="100000"/>
@@ -2830,15 +2830,15 @@
           </p:nvSpPr>
           <p:spPr>
             <a:xfrm>
-              <a:off x="2412424" y="2073503"/>
-              <a:ext cx="0" cy="3649639"/>
+              <a:off x="2486605" y="2209169"/>
+              <a:ext cx="0" cy="3404141"/>
             </a:xfrm>
             <a:custGeom>
               <a:avLst/>
               <a:pathLst>
-                <a:path w="0" h="3649639">
+                <a:path w="0" h="3404141">
                   <a:moveTo>
-                    <a:pt x="0" y="3649639"/>
+                    <a:pt x="0" y="3404141"/>
                   </a:moveTo>
                   <a:lnTo>
                     <a:pt x="0" y="0"/>
@@ -2849,7 +2849,7 @@
                 </a:path>
               </a:pathLst>
             </a:custGeom>
-            <a:ln w="13550" cap="flat">
+            <a:ln w="17246" cap="flat">
               <a:solidFill>
                 <a:srgbClr val="EBEBEB">
                   <a:alpha val="100000"/>
@@ -2873,15 +2873,15 @@
           </p:nvSpPr>
           <p:spPr>
             <a:xfrm>
-              <a:off x="4262297" y="2073503"/>
-              <a:ext cx="0" cy="3649639"/>
+              <a:off x="4308703" y="2209169"/>
+              <a:ext cx="0" cy="3404141"/>
             </a:xfrm>
             <a:custGeom>
               <a:avLst/>
               <a:pathLst>
-                <a:path w="0" h="3649639">
+                <a:path w="0" h="3404141">
                   <a:moveTo>
-                    <a:pt x="0" y="3649639"/>
+                    <a:pt x="0" y="3404141"/>
                   </a:moveTo>
                   <a:lnTo>
                     <a:pt x="0" y="0"/>
@@ -2892,7 +2892,7 @@
                 </a:path>
               </a:pathLst>
             </a:custGeom>
-            <a:ln w="13550" cap="flat">
+            <a:ln w="17246" cap="flat">
               <a:solidFill>
                 <a:srgbClr val="EBEBEB">
                   <a:alpha val="100000"/>
@@ -2916,15 +2916,15 @@
           </p:nvSpPr>
           <p:spPr>
             <a:xfrm>
-              <a:off x="6112169" y="2073503"/>
-              <a:ext cx="0" cy="3649639"/>
+              <a:off x="6130802" y="2209169"/>
+              <a:ext cx="0" cy="3404141"/>
             </a:xfrm>
             <a:custGeom>
               <a:avLst/>
               <a:pathLst>
-                <a:path w="0" h="3649639">
+                <a:path w="0" h="3404141">
                   <a:moveTo>
-                    <a:pt x="0" y="3649639"/>
+                    <a:pt x="0" y="3404141"/>
                   </a:moveTo>
                   <a:lnTo>
                     <a:pt x="0" y="0"/>
@@ -2935,7 +2935,7 @@
                 </a:path>
               </a:pathLst>
             </a:custGeom>
-            <a:ln w="13550" cap="flat">
+            <a:ln w="17246" cap="flat">
               <a:solidFill>
                 <a:srgbClr val="EBEBEB">
                   <a:alpha val="100000"/>
@@ -2959,15 +2959,15 @@
           </p:nvSpPr>
           <p:spPr>
             <a:xfrm>
-              <a:off x="7962042" y="2073503"/>
-              <a:ext cx="0" cy="3649639"/>
+              <a:off x="7952900" y="2209169"/>
+              <a:ext cx="0" cy="3404141"/>
             </a:xfrm>
             <a:custGeom>
               <a:avLst/>
               <a:pathLst>
-                <a:path w="0" h="3649639">
+                <a:path w="0" h="3404141">
                   <a:moveTo>
-                    <a:pt x="0" y="3649639"/>
+                    <a:pt x="0" y="3404141"/>
                   </a:moveTo>
                   <a:lnTo>
                     <a:pt x="0" y="0"/>
@@ -2978,7 +2978,7 @@
                 </a:path>
               </a:pathLst>
             </a:custGeom>
-            <a:ln w="13550" cap="flat">
+            <a:ln w="17246" cap="flat">
               <a:solidFill>
                 <a:srgbClr val="EBEBEB">
                   <a:alpha val="100000"/>
@@ -3002,489 +3002,486 @@
           </p:nvSpPr>
           <p:spPr>
             <a:xfrm>
-              <a:off x="1172049" y="2073503"/>
-              <a:ext cx="7090630" cy="3335346"/>
+              <a:off x="1264853" y="2209169"/>
+              <a:ext cx="6984170" cy="3110990"/>
             </a:xfrm>
             <a:custGeom>
               <a:avLst/>
               <a:pathLst>
-                <a:path w="7090630" h="3335346">
+                <a:path w="6984170" h="3110990">
                   <a:moveTo>
-                    <a:pt x="3072822" y="0"/>
+                    <a:pt x="3026686" y="0"/>
                   </a:moveTo>
                   <a:lnTo>
-                    <a:pt x="3079768" y="19442"/>
-                  </a:lnTo>
-                  <a:lnTo>
-                    <a:pt x="3151391" y="208951"/>
-                  </a:lnTo>
-                  <a:lnTo>
-                    <a:pt x="3223013" y="388093"/>
-                  </a:lnTo>
-                  <a:lnTo>
-                    <a:pt x="3294636" y="557435"/>
-                  </a:lnTo>
-                  <a:lnTo>
-                    <a:pt x="3366258" y="717513"/>
-                  </a:lnTo>
-                  <a:lnTo>
-                    <a:pt x="3437881" y="868835"/>
-                  </a:lnTo>
-                  <a:lnTo>
-                    <a:pt x="3509503" y="1011879"/>
-                  </a:lnTo>
-                  <a:lnTo>
-                    <a:pt x="3581126" y="1147098"/>
-                  </a:lnTo>
-                  <a:lnTo>
-                    <a:pt x="3652748" y="1274920"/>
-                  </a:lnTo>
-                  <a:lnTo>
-                    <a:pt x="3724371" y="1395750"/>
-                  </a:lnTo>
-                  <a:lnTo>
-                    <a:pt x="3795993" y="1509970"/>
-                  </a:lnTo>
-                  <a:lnTo>
-                    <a:pt x="3867616" y="1617942"/>
-                  </a:lnTo>
-                  <a:lnTo>
-                    <a:pt x="3939238" y="1720007"/>
-                  </a:lnTo>
-                  <a:lnTo>
-                    <a:pt x="4010861" y="1816489"/>
-                  </a:lnTo>
-                  <a:lnTo>
-                    <a:pt x="4082483" y="1907694"/>
-                  </a:lnTo>
-                  <a:lnTo>
-                    <a:pt x="4154106" y="1993909"/>
-                  </a:lnTo>
-                  <a:lnTo>
-                    <a:pt x="4225729" y="2075408"/>
-                  </a:lnTo>
-                  <a:lnTo>
-                    <a:pt x="4297351" y="2152448"/>
-                  </a:lnTo>
-                  <a:lnTo>
-                    <a:pt x="4368974" y="2225275"/>
-                  </a:lnTo>
-                  <a:lnTo>
-                    <a:pt x="4440596" y="2294117"/>
-                  </a:lnTo>
-                  <a:lnTo>
-                    <a:pt x="4512219" y="2359194"/>
-                  </a:lnTo>
-                  <a:lnTo>
-                    <a:pt x="4583841" y="2420710"/>
-                  </a:lnTo>
-                  <a:lnTo>
-                    <a:pt x="4655464" y="2478862"/>
-                  </a:lnTo>
-                  <a:lnTo>
-                    <a:pt x="4727086" y="2533832"/>
-                  </a:lnTo>
-                  <a:lnTo>
-                    <a:pt x="4798709" y="2585795"/>
-                  </a:lnTo>
-                  <a:lnTo>
-                    <a:pt x="4870331" y="2634916"/>
-                  </a:lnTo>
-                  <a:lnTo>
-                    <a:pt x="4941954" y="2654490"/>
-                  </a:lnTo>
-                  <a:lnTo>
-                    <a:pt x="5013576" y="2654841"/>
-                  </a:lnTo>
-                  <a:lnTo>
-                    <a:pt x="5085199" y="2655192"/>
-                  </a:lnTo>
-                  <a:lnTo>
-                    <a:pt x="5156821" y="2655543"/>
-                  </a:lnTo>
-                  <a:lnTo>
-                    <a:pt x="5228444" y="2655894"/>
-                  </a:lnTo>
-                  <a:lnTo>
-                    <a:pt x="5300066" y="2656245"/>
-                  </a:lnTo>
-                  <a:lnTo>
-                    <a:pt x="5371689" y="2656595"/>
-                  </a:lnTo>
-                  <a:lnTo>
-                    <a:pt x="5443311" y="2656946"/>
-                  </a:lnTo>
-                  <a:lnTo>
-                    <a:pt x="5514934" y="2657296"/>
-                  </a:lnTo>
-                  <a:lnTo>
-                    <a:pt x="5586557" y="2657646"/>
-                  </a:lnTo>
-                  <a:lnTo>
-                    <a:pt x="5658179" y="2657996"/>
-                  </a:lnTo>
-                  <a:lnTo>
-                    <a:pt x="5729802" y="2658346"/>
-                  </a:lnTo>
-                  <a:lnTo>
-                    <a:pt x="5801424" y="2658695"/>
-                  </a:lnTo>
-                  <a:lnTo>
-                    <a:pt x="5873047" y="2659045"/>
-                  </a:lnTo>
-                  <a:lnTo>
-                    <a:pt x="5944669" y="2659394"/>
-                  </a:lnTo>
-                  <a:lnTo>
-                    <a:pt x="6016292" y="2659743"/>
-                  </a:lnTo>
-                  <a:lnTo>
-                    <a:pt x="6087914" y="2660092"/>
-                  </a:lnTo>
-                  <a:lnTo>
-                    <a:pt x="6159537" y="2660441"/>
-                  </a:lnTo>
-                  <a:lnTo>
-                    <a:pt x="6231159" y="2660790"/>
-                  </a:lnTo>
-                  <a:lnTo>
-                    <a:pt x="6302782" y="2661139"/>
-                  </a:lnTo>
-                  <a:lnTo>
-                    <a:pt x="6374404" y="2661487"/>
-                  </a:lnTo>
-                  <a:lnTo>
-                    <a:pt x="6446027" y="2661835"/>
-                  </a:lnTo>
-                  <a:lnTo>
-                    <a:pt x="6517649" y="2662184"/>
-                  </a:lnTo>
-                  <a:lnTo>
-                    <a:pt x="6589272" y="2662532"/>
-                  </a:lnTo>
-                  <a:lnTo>
-                    <a:pt x="6660894" y="2662879"/>
-                  </a:lnTo>
-                  <a:lnTo>
-                    <a:pt x="6732517" y="2663227"/>
-                  </a:lnTo>
-                  <a:lnTo>
-                    <a:pt x="6804139" y="2663575"/>
-                  </a:lnTo>
-                  <a:lnTo>
-                    <a:pt x="6875762" y="2663922"/>
-                  </a:lnTo>
-                  <a:lnTo>
-                    <a:pt x="6947385" y="2664269"/>
-                  </a:lnTo>
-                  <a:lnTo>
-                    <a:pt x="7019007" y="2664616"/>
-                  </a:lnTo>
-                  <a:lnTo>
-                    <a:pt x="7090630" y="2664963"/>
-                  </a:lnTo>
-                  <a:lnTo>
-                    <a:pt x="7090630" y="3335346"/>
-                  </a:lnTo>
-                  <a:lnTo>
-                    <a:pt x="7019007" y="3326758"/>
-                  </a:lnTo>
-                  <a:lnTo>
-                    <a:pt x="6947385" y="3317674"/>
-                  </a:lnTo>
-                  <a:lnTo>
-                    <a:pt x="6875762" y="3308063"/>
-                  </a:lnTo>
-                  <a:lnTo>
-                    <a:pt x="6804139" y="3297897"/>
-                  </a:lnTo>
-                  <a:lnTo>
-                    <a:pt x="6732517" y="3287142"/>
-                  </a:lnTo>
-                  <a:lnTo>
-                    <a:pt x="6660894" y="3275764"/>
-                  </a:lnTo>
-                  <a:lnTo>
-                    <a:pt x="6589272" y="3263729"/>
-                  </a:lnTo>
-                  <a:lnTo>
-                    <a:pt x="6517649" y="3250997"/>
-                  </a:lnTo>
-                  <a:lnTo>
-                    <a:pt x="6446027" y="3237528"/>
-                  </a:lnTo>
-                  <a:lnTo>
-                    <a:pt x="6374404" y="3223279"/>
-                  </a:lnTo>
-                  <a:lnTo>
-                    <a:pt x="6302782" y="3208206"/>
-                  </a:lnTo>
-                  <a:lnTo>
-                    <a:pt x="6231159" y="3192261"/>
-                  </a:lnTo>
-                  <a:lnTo>
-                    <a:pt x="6159537" y="3175393"/>
-                  </a:lnTo>
-                  <a:lnTo>
-                    <a:pt x="6087914" y="3157549"/>
-                  </a:lnTo>
-                  <a:lnTo>
-                    <a:pt x="6016292" y="3138673"/>
-                  </a:lnTo>
-                  <a:lnTo>
-                    <a:pt x="5944669" y="3118704"/>
-                  </a:lnTo>
-                  <a:lnTo>
-                    <a:pt x="5873047" y="3097579"/>
-                  </a:lnTo>
-                  <a:lnTo>
-                    <a:pt x="5801424" y="3075232"/>
-                  </a:lnTo>
-                  <a:lnTo>
-                    <a:pt x="5729802" y="3051592"/>
-                  </a:lnTo>
-                  <a:lnTo>
-                    <a:pt x="5658179" y="3026584"/>
-                  </a:lnTo>
-                  <a:lnTo>
-                    <a:pt x="5586557" y="3000128"/>
-                  </a:lnTo>
-                  <a:lnTo>
-                    <a:pt x="5514934" y="2972142"/>
-                  </a:lnTo>
-                  <a:lnTo>
-                    <a:pt x="5443311" y="2942536"/>
-                  </a:lnTo>
-                  <a:lnTo>
-                    <a:pt x="5371689" y="2911216"/>
-                  </a:lnTo>
-                  <a:lnTo>
-                    <a:pt x="5300066" y="2878085"/>
-                  </a:lnTo>
-                  <a:lnTo>
-                    <a:pt x="5228444" y="2843036"/>
-                  </a:lnTo>
-                  <a:lnTo>
-                    <a:pt x="5156821" y="2805959"/>
-                  </a:lnTo>
-                  <a:lnTo>
-                    <a:pt x="5085199" y="2766736"/>
-                  </a:lnTo>
-                  <a:lnTo>
-                    <a:pt x="5013576" y="2725244"/>
-                  </a:lnTo>
-                  <a:lnTo>
-                    <a:pt x="4941954" y="2681350"/>
-                  </a:lnTo>
-                  <a:lnTo>
-                    <a:pt x="4870331" y="2654139"/>
-                  </a:lnTo>
-                  <a:lnTo>
-                    <a:pt x="4798709" y="2653787"/>
-                  </a:lnTo>
-                  <a:lnTo>
-                    <a:pt x="4727086" y="2653435"/>
-                  </a:lnTo>
-                  <a:lnTo>
-                    <a:pt x="4655464" y="2653084"/>
-                  </a:lnTo>
-                  <a:lnTo>
-                    <a:pt x="4583841" y="2652732"/>
-                  </a:lnTo>
-                  <a:lnTo>
-                    <a:pt x="4512219" y="2652379"/>
-                  </a:lnTo>
-                  <a:lnTo>
-                    <a:pt x="4440596" y="2652027"/>
-                  </a:lnTo>
-                  <a:lnTo>
-                    <a:pt x="4368974" y="2651675"/>
-                  </a:lnTo>
-                  <a:lnTo>
-                    <a:pt x="4297351" y="2651322"/>
-                  </a:lnTo>
-                  <a:lnTo>
-                    <a:pt x="4225729" y="2650969"/>
-                  </a:lnTo>
-                  <a:lnTo>
-                    <a:pt x="4154106" y="2650616"/>
-                  </a:lnTo>
-                  <a:lnTo>
-                    <a:pt x="4082483" y="2650263"/>
-                  </a:lnTo>
-                  <a:lnTo>
-                    <a:pt x="4010861" y="2649910"/>
-                  </a:lnTo>
-                  <a:lnTo>
-                    <a:pt x="3939238" y="2649557"/>
-                  </a:lnTo>
-                  <a:lnTo>
-                    <a:pt x="3867616" y="2649203"/>
-                  </a:lnTo>
-                  <a:lnTo>
-                    <a:pt x="3795993" y="2648850"/>
-                  </a:lnTo>
-                  <a:lnTo>
-                    <a:pt x="3724371" y="2648496"/>
-                  </a:lnTo>
-                  <a:lnTo>
-                    <a:pt x="3652748" y="2648142"/>
-                  </a:lnTo>
-                  <a:lnTo>
-                    <a:pt x="3581126" y="2647788"/>
-                  </a:lnTo>
-                  <a:lnTo>
-                    <a:pt x="3509503" y="2647433"/>
-                  </a:lnTo>
-                  <a:lnTo>
-                    <a:pt x="3437881" y="2647079"/>
-                  </a:lnTo>
-                  <a:lnTo>
-                    <a:pt x="3366258" y="2646725"/>
-                  </a:lnTo>
-                  <a:lnTo>
-                    <a:pt x="3294636" y="2646370"/>
-                  </a:lnTo>
-                  <a:lnTo>
-                    <a:pt x="3223013" y="2646015"/>
-                  </a:lnTo>
-                  <a:lnTo>
-                    <a:pt x="3151391" y="2645660"/>
-                  </a:lnTo>
-                  <a:lnTo>
-                    <a:pt x="3079768" y="2645305"/>
-                  </a:lnTo>
-                  <a:lnTo>
-                    <a:pt x="3008146" y="2644950"/>
-                  </a:lnTo>
-                  <a:lnTo>
-                    <a:pt x="2936523" y="2644594"/>
-                  </a:lnTo>
-                  <a:lnTo>
-                    <a:pt x="2864901" y="2644238"/>
-                  </a:lnTo>
-                  <a:lnTo>
-                    <a:pt x="2793278" y="2643883"/>
-                  </a:lnTo>
-                  <a:lnTo>
-                    <a:pt x="2721655" y="2643527"/>
-                  </a:lnTo>
-                  <a:lnTo>
-                    <a:pt x="2650033" y="2643171"/>
-                  </a:lnTo>
-                  <a:lnTo>
-                    <a:pt x="2578410" y="2642815"/>
-                  </a:lnTo>
-                  <a:lnTo>
-                    <a:pt x="2506788" y="2642458"/>
-                  </a:lnTo>
-                  <a:lnTo>
-                    <a:pt x="2435165" y="2642102"/>
-                  </a:lnTo>
-                  <a:lnTo>
-                    <a:pt x="2363543" y="2641745"/>
-                  </a:lnTo>
-                  <a:lnTo>
-                    <a:pt x="2291920" y="2641388"/>
-                  </a:lnTo>
-                  <a:lnTo>
-                    <a:pt x="2220298" y="2641031"/>
-                  </a:lnTo>
-                  <a:lnTo>
-                    <a:pt x="2148675" y="2640674"/>
-                  </a:lnTo>
-                  <a:lnTo>
-                    <a:pt x="2077053" y="2640317"/>
-                  </a:lnTo>
-                  <a:lnTo>
-                    <a:pt x="2005430" y="2639959"/>
-                  </a:lnTo>
-                  <a:lnTo>
-                    <a:pt x="1933808" y="2639602"/>
-                  </a:lnTo>
-                  <a:lnTo>
-                    <a:pt x="1862185" y="2639244"/>
-                  </a:lnTo>
-                  <a:lnTo>
-                    <a:pt x="1790563" y="2638886"/>
-                  </a:lnTo>
-                  <a:lnTo>
-                    <a:pt x="1718940" y="2638528"/>
-                  </a:lnTo>
-                  <a:lnTo>
-                    <a:pt x="1647318" y="2638170"/>
-                  </a:lnTo>
-                  <a:lnTo>
-                    <a:pt x="1575695" y="2637812"/>
-                  </a:lnTo>
-                  <a:lnTo>
-                    <a:pt x="1504073" y="2637453"/>
-                  </a:lnTo>
-                  <a:lnTo>
-                    <a:pt x="1432450" y="2637095"/>
-                  </a:lnTo>
-                  <a:lnTo>
-                    <a:pt x="1360827" y="2636736"/>
-                  </a:lnTo>
-                  <a:lnTo>
-                    <a:pt x="1289205" y="2636377"/>
-                  </a:lnTo>
-                  <a:lnTo>
-                    <a:pt x="1217582" y="2636018"/>
-                  </a:lnTo>
-                  <a:lnTo>
-                    <a:pt x="1145960" y="2635659"/>
-                  </a:lnTo>
-                  <a:lnTo>
-                    <a:pt x="1074337" y="2635299"/>
-                  </a:lnTo>
-                  <a:lnTo>
-                    <a:pt x="1002715" y="2634940"/>
-                  </a:lnTo>
-                  <a:lnTo>
-                    <a:pt x="931092" y="2634580"/>
-                  </a:lnTo>
-                  <a:lnTo>
-                    <a:pt x="859470" y="2634220"/>
-                  </a:lnTo>
-                  <a:lnTo>
-                    <a:pt x="787847" y="2633860"/>
-                  </a:lnTo>
-                  <a:lnTo>
-                    <a:pt x="716225" y="2633500"/>
-                  </a:lnTo>
-                  <a:lnTo>
-                    <a:pt x="644602" y="2633140"/>
-                  </a:lnTo>
-                  <a:lnTo>
-                    <a:pt x="572980" y="2632779"/>
-                  </a:lnTo>
-                  <a:lnTo>
-                    <a:pt x="501357" y="2632419"/>
-                  </a:lnTo>
-                  <a:lnTo>
-                    <a:pt x="429735" y="2632058"/>
-                  </a:lnTo>
-                  <a:lnTo>
-                    <a:pt x="358112" y="2631697"/>
-                  </a:lnTo>
-                  <a:lnTo>
-                    <a:pt x="286490" y="2631336"/>
-                  </a:lnTo>
-                  <a:lnTo>
-                    <a:pt x="214867" y="2630975"/>
-                  </a:lnTo>
-                  <a:lnTo>
-                    <a:pt x="143245" y="2630613"/>
-                  </a:lnTo>
-                  <a:lnTo>
-                    <a:pt x="71622" y="2630252"/>
-                  </a:lnTo>
-                  <a:lnTo>
-                    <a:pt x="0" y="2629890"/>
-                  </a:lnTo>
-                  <a:lnTo>
-                    <a:pt x="0" y="0"/>
+                    <a:pt x="3033528" y="18134"/>
+                  </a:lnTo>
+                  <a:lnTo>
+                    <a:pt x="3104075" y="194895"/>
+                  </a:lnTo>
+                  <a:lnTo>
+                    <a:pt x="3174622" y="361987"/>
+                  </a:lnTo>
+                  <a:lnTo>
+                    <a:pt x="3245169" y="519938"/>
+                  </a:lnTo>
+                  <a:lnTo>
+                    <a:pt x="3315717" y="669249"/>
+                  </a:lnTo>
+                  <a:lnTo>
+                    <a:pt x="3386264" y="810392"/>
+                  </a:lnTo>
+                  <a:lnTo>
+                    <a:pt x="3456811" y="943814"/>
+                  </a:lnTo>
+                  <a:lnTo>
+                    <a:pt x="3527358" y="1069937"/>
+                  </a:lnTo>
+                  <a:lnTo>
+                    <a:pt x="3597905" y="1189161"/>
+                  </a:lnTo>
+                  <a:lnTo>
+                    <a:pt x="3668452" y="1301863"/>
+                  </a:lnTo>
+                  <a:lnTo>
+                    <a:pt x="3739000" y="1408400"/>
+                  </a:lnTo>
+                  <a:lnTo>
+                    <a:pt x="3809547" y="1509109"/>
+                  </a:lnTo>
+                  <a:lnTo>
+                    <a:pt x="3880094" y="1604309"/>
+                  </a:lnTo>
+                  <a:lnTo>
+                    <a:pt x="3950641" y="1694301"/>
+                  </a:lnTo>
+                  <a:lnTo>
+                    <a:pt x="4021188" y="1779370"/>
+                  </a:lnTo>
+                  <a:lnTo>
+                    <a:pt x="4091736" y="1859786"/>
+                  </a:lnTo>
+                  <a:lnTo>
+                    <a:pt x="4162283" y="1935803"/>
+                  </a:lnTo>
+                  <a:lnTo>
+                    <a:pt x="4232830" y="2007661"/>
+                  </a:lnTo>
+                  <a:lnTo>
+                    <a:pt x="4303377" y="2075589"/>
+                  </a:lnTo>
+                  <a:lnTo>
+                    <a:pt x="4373924" y="2139800"/>
+                  </a:lnTo>
+                  <a:lnTo>
+                    <a:pt x="4444471" y="2200499"/>
+                  </a:lnTo>
+                  <a:lnTo>
+                    <a:pt x="4515019" y="2257878"/>
+                  </a:lnTo>
+                  <a:lnTo>
+                    <a:pt x="4585566" y="2312118"/>
+                  </a:lnTo>
+                  <a:lnTo>
+                    <a:pt x="4656113" y="2363390"/>
+                  </a:lnTo>
+                  <a:lnTo>
+                    <a:pt x="4726660" y="2411858"/>
+                  </a:lnTo>
+                  <a:lnTo>
+                    <a:pt x="4797207" y="2457675"/>
+                  </a:lnTo>
+                  <a:lnTo>
+                    <a:pt x="4867754" y="2475932"/>
+                  </a:lnTo>
+                  <a:lnTo>
+                    <a:pt x="4938302" y="2476260"/>
+                  </a:lnTo>
+                  <a:lnTo>
+                    <a:pt x="5008849" y="2476587"/>
+                  </a:lnTo>
+                  <a:lnTo>
+                    <a:pt x="5079396" y="2476915"/>
+                  </a:lnTo>
+                  <a:lnTo>
+                    <a:pt x="5149943" y="2477242"/>
+                  </a:lnTo>
+                  <a:lnTo>
+                    <a:pt x="5220490" y="2477569"/>
+                  </a:lnTo>
+                  <a:lnTo>
+                    <a:pt x="5291037" y="2477896"/>
+                  </a:lnTo>
+                  <a:lnTo>
+                    <a:pt x="5361585" y="2478223"/>
+                  </a:lnTo>
+                  <a:lnTo>
+                    <a:pt x="5432132" y="2478549"/>
+                  </a:lnTo>
+                  <a:lnTo>
+                    <a:pt x="5502679" y="2478876"/>
+                  </a:lnTo>
+                  <a:lnTo>
+                    <a:pt x="5573226" y="2479202"/>
+                  </a:lnTo>
+                  <a:lnTo>
+                    <a:pt x="5643773" y="2479529"/>
+                  </a:lnTo>
+                  <a:lnTo>
+                    <a:pt x="5714320" y="2479855"/>
+                  </a:lnTo>
+                  <a:lnTo>
+                    <a:pt x="5784868" y="2480181"/>
+                  </a:lnTo>
+                  <a:lnTo>
+                    <a:pt x="5855415" y="2480507"/>
+                  </a:lnTo>
+                  <a:lnTo>
+                    <a:pt x="5925962" y="2480832"/>
+                  </a:lnTo>
+                  <a:lnTo>
+                    <a:pt x="5996509" y="2481158"/>
+                  </a:lnTo>
+                  <a:lnTo>
+                    <a:pt x="6067056" y="2481483"/>
+                  </a:lnTo>
+                  <a:lnTo>
+                    <a:pt x="6137604" y="2481808"/>
+                  </a:lnTo>
+                  <a:lnTo>
+                    <a:pt x="6208151" y="2482134"/>
+                  </a:lnTo>
+                  <a:lnTo>
+                    <a:pt x="6278698" y="2482459"/>
+                  </a:lnTo>
+                  <a:lnTo>
+                    <a:pt x="6349245" y="2482784"/>
+                  </a:lnTo>
+                  <a:lnTo>
+                    <a:pt x="6419792" y="2483108"/>
+                  </a:lnTo>
+                  <a:lnTo>
+                    <a:pt x="6490339" y="2483433"/>
+                  </a:lnTo>
+                  <a:lnTo>
+                    <a:pt x="6560887" y="2483757"/>
+                  </a:lnTo>
+                  <a:lnTo>
+                    <a:pt x="6631434" y="2484082"/>
+                  </a:lnTo>
+                  <a:lnTo>
+                    <a:pt x="6701981" y="2484406"/>
+                  </a:lnTo>
+                  <a:lnTo>
+                    <a:pt x="6772528" y="2484730"/>
+                  </a:lnTo>
+                  <a:lnTo>
+                    <a:pt x="6843075" y="2485054"/>
+                  </a:lnTo>
+                  <a:lnTo>
+                    <a:pt x="6913622" y="2485378"/>
+                  </a:lnTo>
+                  <a:lnTo>
+                    <a:pt x="6984170" y="2485701"/>
+                  </a:lnTo>
+                  <a:lnTo>
+                    <a:pt x="6984170" y="3110990"/>
+                  </a:lnTo>
+                  <a:lnTo>
+                    <a:pt x="6913622" y="3102979"/>
+                  </a:lnTo>
+                  <a:lnTo>
+                    <a:pt x="6843075" y="3094506"/>
+                  </a:lnTo>
+                  <a:lnTo>
+                    <a:pt x="6772528" y="3085542"/>
+                  </a:lnTo>
+                  <a:lnTo>
+                    <a:pt x="6701981" y="3076059"/>
+                  </a:lnTo>
+                  <a:lnTo>
+                    <a:pt x="6631434" y="3066028"/>
+                  </a:lnTo>
+                  <a:lnTo>
+                    <a:pt x="6560887" y="3055416"/>
+                  </a:lnTo>
+                  <a:lnTo>
+                    <a:pt x="6490339" y="3044190"/>
+                  </a:lnTo>
+                  <a:lnTo>
+                    <a:pt x="6419792" y="3032314"/>
+                  </a:lnTo>
+                  <a:lnTo>
+                    <a:pt x="6349245" y="3019751"/>
+                  </a:lnTo>
+                  <a:lnTo>
+                    <a:pt x="6278698" y="3006461"/>
+                  </a:lnTo>
+                  <a:lnTo>
+                    <a:pt x="6208151" y="2992402"/>
+                  </a:lnTo>
+                  <a:lnTo>
+                    <a:pt x="6137604" y="2977529"/>
+                  </a:lnTo>
+                  <a:lnTo>
+                    <a:pt x="6067056" y="2961796"/>
+                  </a:lnTo>
+                  <a:lnTo>
+                    <a:pt x="5996509" y="2945153"/>
+                  </a:lnTo>
+                  <a:lnTo>
+                    <a:pt x="5925962" y="2927546"/>
+                  </a:lnTo>
+                  <a:lnTo>
+                    <a:pt x="5855415" y="2908920"/>
+                  </a:lnTo>
+                  <a:lnTo>
+                    <a:pt x="5784868" y="2889216"/>
+                  </a:lnTo>
+                  <a:lnTo>
+                    <a:pt x="5714320" y="2868372"/>
+                  </a:lnTo>
+                  <a:lnTo>
+                    <a:pt x="5643773" y="2846322"/>
+                  </a:lnTo>
+                  <a:lnTo>
+                    <a:pt x="5573226" y="2822996"/>
+                  </a:lnTo>
+                  <a:lnTo>
+                    <a:pt x="5502679" y="2798320"/>
+                  </a:lnTo>
+                  <a:lnTo>
+                    <a:pt x="5432132" y="2772217"/>
+                  </a:lnTo>
+                  <a:lnTo>
+                    <a:pt x="5361585" y="2744602"/>
+                  </a:lnTo>
+                  <a:lnTo>
+                    <a:pt x="5291037" y="2715390"/>
+                  </a:lnTo>
+                  <a:lnTo>
+                    <a:pt x="5220490" y="2684487"/>
+                  </a:lnTo>
+                  <a:lnTo>
+                    <a:pt x="5149943" y="2651795"/>
+                  </a:lnTo>
+                  <a:lnTo>
+                    <a:pt x="5079396" y="2617212"/>
+                  </a:lnTo>
+                  <a:lnTo>
+                    <a:pt x="5008849" y="2580628"/>
+                  </a:lnTo>
+                  <a:lnTo>
+                    <a:pt x="4938302" y="2541926"/>
+                  </a:lnTo>
+                  <a:lnTo>
+                    <a:pt x="4867754" y="2500985"/>
+                  </a:lnTo>
+                  <a:lnTo>
+                    <a:pt x="4797207" y="2475604"/>
+                  </a:lnTo>
+                  <a:lnTo>
+                    <a:pt x="4726660" y="2475277"/>
+                  </a:lnTo>
+                  <a:lnTo>
+                    <a:pt x="4656113" y="2474949"/>
+                  </a:lnTo>
+                  <a:lnTo>
+                    <a:pt x="4585566" y="2474620"/>
+                  </a:lnTo>
+                  <a:lnTo>
+                    <a:pt x="4515019" y="2474292"/>
+                  </a:lnTo>
+                  <a:lnTo>
+                    <a:pt x="4444471" y="2473964"/>
+                  </a:lnTo>
+                  <a:lnTo>
+                    <a:pt x="4373924" y="2473635"/>
+                  </a:lnTo>
+                  <a:lnTo>
+                    <a:pt x="4303377" y="2473306"/>
+                  </a:lnTo>
+                  <a:lnTo>
+                    <a:pt x="4232830" y="2472977"/>
+                  </a:lnTo>
+                  <a:lnTo>
+                    <a:pt x="4162283" y="2472648"/>
+                  </a:lnTo>
+                  <a:lnTo>
+                    <a:pt x="4091736" y="2472319"/>
+                  </a:lnTo>
+                  <a:lnTo>
+                    <a:pt x="4021188" y="2471990"/>
+                  </a:lnTo>
+                  <a:lnTo>
+                    <a:pt x="3950641" y="2471660"/>
+                  </a:lnTo>
+                  <a:lnTo>
+                    <a:pt x="3880094" y="2471331"/>
+                  </a:lnTo>
+                  <a:lnTo>
+                    <a:pt x="3809547" y="2471001"/>
+                  </a:lnTo>
+                  <a:lnTo>
+                    <a:pt x="3739000" y="2470671"/>
+                  </a:lnTo>
+                  <a:lnTo>
+                    <a:pt x="3668452" y="2470341"/>
+                  </a:lnTo>
+                  <a:lnTo>
+                    <a:pt x="3597905" y="2470011"/>
+                  </a:lnTo>
+                  <a:lnTo>
+                    <a:pt x="3527358" y="2469681"/>
+                  </a:lnTo>
+                  <a:lnTo>
+                    <a:pt x="3456811" y="2469350"/>
+                  </a:lnTo>
+                  <a:lnTo>
+                    <a:pt x="3386264" y="2469020"/>
+                  </a:lnTo>
+                  <a:lnTo>
+                    <a:pt x="3315717" y="2468689"/>
+                  </a:lnTo>
+                  <a:lnTo>
+                    <a:pt x="3245169" y="2468358"/>
+                  </a:lnTo>
+                  <a:lnTo>
+                    <a:pt x="3174622" y="2468027"/>
+                  </a:lnTo>
+                  <a:lnTo>
+                    <a:pt x="3104075" y="2467696"/>
+                  </a:lnTo>
+                  <a:lnTo>
+                    <a:pt x="3033528" y="2467365"/>
+                  </a:lnTo>
+                  <a:lnTo>
+                    <a:pt x="2962981" y="2467033"/>
+                  </a:lnTo>
+                  <a:lnTo>
+                    <a:pt x="2892434" y="2466702"/>
+                  </a:lnTo>
+                  <a:lnTo>
+                    <a:pt x="2821886" y="2466370"/>
+                  </a:lnTo>
+                  <a:lnTo>
+                    <a:pt x="2751339" y="2466038"/>
+                  </a:lnTo>
+                  <a:lnTo>
+                    <a:pt x="2680792" y="2465706"/>
+                  </a:lnTo>
+                  <a:lnTo>
+                    <a:pt x="2610245" y="2465374"/>
+                  </a:lnTo>
+                  <a:lnTo>
+                    <a:pt x="2539698" y="2465042"/>
+                  </a:lnTo>
+                  <a:lnTo>
+                    <a:pt x="2469151" y="2464710"/>
+                  </a:lnTo>
+                  <a:lnTo>
+                    <a:pt x="2398603" y="2464377"/>
+                  </a:lnTo>
+                  <a:lnTo>
+                    <a:pt x="2328056" y="2464045"/>
+                  </a:lnTo>
+                  <a:lnTo>
+                    <a:pt x="2257509" y="2463712"/>
+                  </a:lnTo>
+                  <a:lnTo>
+                    <a:pt x="2186962" y="2463379"/>
+                  </a:lnTo>
+                  <a:lnTo>
+                    <a:pt x="2116415" y="2463046"/>
+                  </a:lnTo>
+                  <a:lnTo>
+                    <a:pt x="2045868" y="2462712"/>
+                  </a:lnTo>
+                  <a:lnTo>
+                    <a:pt x="1975320" y="2462379"/>
+                  </a:lnTo>
+                  <a:lnTo>
+                    <a:pt x="1904773" y="2462046"/>
+                  </a:lnTo>
+                  <a:lnTo>
+                    <a:pt x="1834226" y="2461712"/>
+                  </a:lnTo>
+                  <a:lnTo>
+                    <a:pt x="1763679" y="2461378"/>
+                  </a:lnTo>
+                  <a:lnTo>
+                    <a:pt x="1693132" y="2461044"/>
+                  </a:lnTo>
+                  <a:lnTo>
+                    <a:pt x="1622584" y="2460710"/>
+                  </a:lnTo>
+                  <a:lnTo>
+                    <a:pt x="1552037" y="2460376"/>
+                  </a:lnTo>
+                  <a:lnTo>
+                    <a:pt x="1481490" y="2460041"/>
+                  </a:lnTo>
+                  <a:lnTo>
+                    <a:pt x="1410943" y="2459707"/>
+                  </a:lnTo>
+                  <a:lnTo>
+                    <a:pt x="1340396" y="2459372"/>
+                  </a:lnTo>
+                  <a:lnTo>
+                    <a:pt x="1269849" y="2459038"/>
+                  </a:lnTo>
+                  <a:lnTo>
+                    <a:pt x="1199301" y="2458703"/>
+                  </a:lnTo>
+                  <a:lnTo>
+                    <a:pt x="1128754" y="2458368"/>
+                  </a:lnTo>
+                  <a:lnTo>
+                    <a:pt x="1058207" y="2458032"/>
+                  </a:lnTo>
+                  <a:lnTo>
+                    <a:pt x="987660" y="2457697"/>
+                  </a:lnTo>
+                  <a:lnTo>
+                    <a:pt x="917113" y="2457361"/>
+                  </a:lnTo>
+                  <a:lnTo>
+                    <a:pt x="846566" y="2457026"/>
+                  </a:lnTo>
+                  <a:lnTo>
+                    <a:pt x="776018" y="2456690"/>
+                  </a:lnTo>
+                  <a:lnTo>
+                    <a:pt x="705471" y="2456354"/>
+                  </a:lnTo>
+                  <a:lnTo>
+                    <a:pt x="634924" y="2456018"/>
+                  </a:lnTo>
+                  <a:lnTo>
+                    <a:pt x="564377" y="2455682"/>
+                  </a:lnTo>
+                  <a:lnTo>
+                    <a:pt x="493830" y="2455345"/>
+                  </a:lnTo>
+                  <a:lnTo>
+                    <a:pt x="423283" y="2455009"/>
+                  </a:lnTo>
+                  <a:lnTo>
+                    <a:pt x="352735" y="2454672"/>
+                  </a:lnTo>
+                  <a:lnTo>
+                    <a:pt x="282188" y="2454336"/>
+                  </a:lnTo>
+                  <a:lnTo>
+                    <a:pt x="211641" y="2453999"/>
+                  </a:lnTo>
+                  <a:lnTo>
+                    <a:pt x="141094" y="2453662"/>
+                  </a:lnTo>
+                  <a:lnTo>
+                    <a:pt x="70547" y="2453324"/>
+                  </a:lnTo>
+                  <a:lnTo>
+                    <a:pt x="0" y="2452987"/>
                   </a:lnTo>
                   <a:close/>
                 </a:path>
@@ -3510,186 +3507,186 @@
           </p:nvSpPr>
           <p:spPr>
             <a:xfrm>
-              <a:off x="4244871" y="2073503"/>
-              <a:ext cx="4017807" cy="2664963"/>
+              <a:off x="4291540" y="2209169"/>
+              <a:ext cx="3957483" cy="2485701"/>
             </a:xfrm>
             <a:custGeom>
               <a:avLst/>
               <a:pathLst>
-                <a:path w="4017807" h="2664963">
+                <a:path w="3957483" h="2485701">
                   <a:moveTo>
                     <a:pt x="0" y="0"/>
                   </a:moveTo>
                   <a:lnTo>
-                    <a:pt x="6946" y="19442"/>
-                  </a:lnTo>
-                  <a:lnTo>
-                    <a:pt x="78568" y="208951"/>
-                  </a:lnTo>
-                  <a:lnTo>
-                    <a:pt x="150191" y="388093"/>
-                  </a:lnTo>
-                  <a:lnTo>
-                    <a:pt x="221813" y="557435"/>
-                  </a:lnTo>
-                  <a:lnTo>
-                    <a:pt x="293436" y="717513"/>
-                  </a:lnTo>
-                  <a:lnTo>
-                    <a:pt x="365058" y="868835"/>
-                  </a:lnTo>
-                  <a:lnTo>
-                    <a:pt x="436681" y="1011879"/>
-                  </a:lnTo>
-                  <a:lnTo>
-                    <a:pt x="508303" y="1147098"/>
-                  </a:lnTo>
-                  <a:lnTo>
-                    <a:pt x="579926" y="1274920"/>
-                  </a:lnTo>
-                  <a:lnTo>
-                    <a:pt x="651548" y="1395750"/>
-                  </a:lnTo>
-                  <a:lnTo>
-                    <a:pt x="723171" y="1509970"/>
-                  </a:lnTo>
-                  <a:lnTo>
-                    <a:pt x="794793" y="1617942"/>
-                  </a:lnTo>
-                  <a:lnTo>
-                    <a:pt x="866416" y="1720007"/>
-                  </a:lnTo>
-                  <a:lnTo>
-                    <a:pt x="938039" y="1816489"/>
-                  </a:lnTo>
-                  <a:lnTo>
-                    <a:pt x="1009661" y="1907694"/>
-                  </a:lnTo>
-                  <a:lnTo>
-                    <a:pt x="1081284" y="1993909"/>
-                  </a:lnTo>
-                  <a:lnTo>
-                    <a:pt x="1152906" y="2075408"/>
-                  </a:lnTo>
-                  <a:lnTo>
-                    <a:pt x="1224529" y="2152448"/>
-                  </a:lnTo>
-                  <a:lnTo>
-                    <a:pt x="1296151" y="2225275"/>
-                  </a:lnTo>
-                  <a:lnTo>
-                    <a:pt x="1367774" y="2294117"/>
-                  </a:lnTo>
-                  <a:lnTo>
-                    <a:pt x="1439396" y="2359194"/>
-                  </a:lnTo>
-                  <a:lnTo>
-                    <a:pt x="1511019" y="2420710"/>
-                  </a:lnTo>
-                  <a:lnTo>
-                    <a:pt x="1582641" y="2478862"/>
-                  </a:lnTo>
-                  <a:lnTo>
-                    <a:pt x="1654264" y="2533832"/>
-                  </a:lnTo>
-                  <a:lnTo>
-                    <a:pt x="1725886" y="2585795"/>
-                  </a:lnTo>
-                  <a:lnTo>
-                    <a:pt x="1797509" y="2634916"/>
-                  </a:lnTo>
-                  <a:lnTo>
-                    <a:pt x="1869131" y="2654490"/>
-                  </a:lnTo>
-                  <a:lnTo>
-                    <a:pt x="1940754" y="2654841"/>
-                  </a:lnTo>
-                  <a:lnTo>
-                    <a:pt x="2012376" y="2655192"/>
-                  </a:lnTo>
-                  <a:lnTo>
-                    <a:pt x="2083999" y="2655543"/>
-                  </a:lnTo>
-                  <a:lnTo>
-                    <a:pt x="2155621" y="2655894"/>
-                  </a:lnTo>
-                  <a:lnTo>
-                    <a:pt x="2227244" y="2656245"/>
-                  </a:lnTo>
-                  <a:lnTo>
-                    <a:pt x="2298867" y="2656595"/>
-                  </a:lnTo>
-                  <a:lnTo>
-                    <a:pt x="2370489" y="2656946"/>
-                  </a:lnTo>
-                  <a:lnTo>
-                    <a:pt x="2442112" y="2657296"/>
-                  </a:lnTo>
-                  <a:lnTo>
-                    <a:pt x="2513734" y="2657646"/>
-                  </a:lnTo>
-                  <a:lnTo>
-                    <a:pt x="2585357" y="2657996"/>
-                  </a:lnTo>
-                  <a:lnTo>
-                    <a:pt x="2656979" y="2658346"/>
-                  </a:lnTo>
-                  <a:lnTo>
-                    <a:pt x="2728602" y="2658695"/>
-                  </a:lnTo>
-                  <a:lnTo>
-                    <a:pt x="2800224" y="2659045"/>
-                  </a:lnTo>
-                  <a:lnTo>
-                    <a:pt x="2871847" y="2659394"/>
-                  </a:lnTo>
-                  <a:lnTo>
-                    <a:pt x="2943469" y="2659743"/>
-                  </a:lnTo>
-                  <a:lnTo>
-                    <a:pt x="3015092" y="2660092"/>
-                  </a:lnTo>
-                  <a:lnTo>
-                    <a:pt x="3086714" y="2660441"/>
-                  </a:lnTo>
-                  <a:lnTo>
-                    <a:pt x="3158337" y="2660790"/>
-                  </a:lnTo>
-                  <a:lnTo>
-                    <a:pt x="3229959" y="2661139"/>
-                  </a:lnTo>
-                  <a:lnTo>
-                    <a:pt x="3301582" y="2661487"/>
-                  </a:lnTo>
-                  <a:lnTo>
-                    <a:pt x="3373204" y="2661835"/>
-                  </a:lnTo>
-                  <a:lnTo>
-                    <a:pt x="3444827" y="2662184"/>
-                  </a:lnTo>
-                  <a:lnTo>
-                    <a:pt x="3516449" y="2662532"/>
-                  </a:lnTo>
-                  <a:lnTo>
-                    <a:pt x="3588072" y="2662879"/>
-                  </a:lnTo>
-                  <a:lnTo>
-                    <a:pt x="3659695" y="2663227"/>
-                  </a:lnTo>
-                  <a:lnTo>
-                    <a:pt x="3731317" y="2663575"/>
-                  </a:lnTo>
-                  <a:lnTo>
-                    <a:pt x="3802940" y="2663922"/>
-                  </a:lnTo>
-                  <a:lnTo>
-                    <a:pt x="3874562" y="2664269"/>
-                  </a:lnTo>
-                  <a:lnTo>
-                    <a:pt x="3946185" y="2664616"/>
-                  </a:lnTo>
-                  <a:lnTo>
-                    <a:pt x="4017807" y="2664963"/>
+                    <a:pt x="6841" y="18134"/>
+                  </a:lnTo>
+                  <a:lnTo>
+                    <a:pt x="77389" y="194895"/>
+                  </a:lnTo>
+                  <a:lnTo>
+                    <a:pt x="147936" y="361987"/>
+                  </a:lnTo>
+                  <a:lnTo>
+                    <a:pt x="218483" y="519938"/>
+                  </a:lnTo>
+                  <a:lnTo>
+                    <a:pt x="289030" y="669249"/>
+                  </a:lnTo>
+                  <a:lnTo>
+                    <a:pt x="359577" y="810392"/>
+                  </a:lnTo>
+                  <a:lnTo>
+                    <a:pt x="430124" y="943814"/>
+                  </a:lnTo>
+                  <a:lnTo>
+                    <a:pt x="500672" y="1069937"/>
+                  </a:lnTo>
+                  <a:lnTo>
+                    <a:pt x="571219" y="1189161"/>
+                  </a:lnTo>
+                  <a:lnTo>
+                    <a:pt x="641766" y="1301863"/>
+                  </a:lnTo>
+                  <a:lnTo>
+                    <a:pt x="712313" y="1408400"/>
+                  </a:lnTo>
+                  <a:lnTo>
+                    <a:pt x="782860" y="1509109"/>
+                  </a:lnTo>
+                  <a:lnTo>
+                    <a:pt x="853407" y="1604309"/>
+                  </a:lnTo>
+                  <a:lnTo>
+                    <a:pt x="923955" y="1694301"/>
+                  </a:lnTo>
+                  <a:lnTo>
+                    <a:pt x="994502" y="1779370"/>
+                  </a:lnTo>
+                  <a:lnTo>
+                    <a:pt x="1065049" y="1859786"/>
+                  </a:lnTo>
+                  <a:lnTo>
+                    <a:pt x="1135596" y="1935803"/>
+                  </a:lnTo>
+                  <a:lnTo>
+                    <a:pt x="1206143" y="2007661"/>
+                  </a:lnTo>
+                  <a:lnTo>
+                    <a:pt x="1276691" y="2075589"/>
+                  </a:lnTo>
+                  <a:lnTo>
+                    <a:pt x="1347238" y="2139800"/>
+                  </a:lnTo>
+                  <a:lnTo>
+                    <a:pt x="1417785" y="2200499"/>
+                  </a:lnTo>
+                  <a:lnTo>
+                    <a:pt x="1488332" y="2257878"/>
+                  </a:lnTo>
+                  <a:lnTo>
+                    <a:pt x="1558879" y="2312118"/>
+                  </a:lnTo>
+                  <a:lnTo>
+                    <a:pt x="1629426" y="2363390"/>
+                  </a:lnTo>
+                  <a:lnTo>
+                    <a:pt x="1699974" y="2411858"/>
+                  </a:lnTo>
+                  <a:lnTo>
+                    <a:pt x="1770521" y="2457675"/>
+                  </a:lnTo>
+                  <a:lnTo>
+                    <a:pt x="1841068" y="2475932"/>
+                  </a:lnTo>
+                  <a:lnTo>
+                    <a:pt x="1911615" y="2476260"/>
+                  </a:lnTo>
+                  <a:lnTo>
+                    <a:pt x="1982162" y="2476587"/>
+                  </a:lnTo>
+                  <a:lnTo>
+                    <a:pt x="2052709" y="2476915"/>
+                  </a:lnTo>
+                  <a:lnTo>
+                    <a:pt x="2123257" y="2477242"/>
+                  </a:lnTo>
+                  <a:lnTo>
+                    <a:pt x="2193804" y="2477569"/>
+                  </a:lnTo>
+                  <a:lnTo>
+                    <a:pt x="2264351" y="2477896"/>
+                  </a:lnTo>
+                  <a:lnTo>
+                    <a:pt x="2334898" y="2478223"/>
+                  </a:lnTo>
+                  <a:lnTo>
+                    <a:pt x="2405445" y="2478549"/>
+                  </a:lnTo>
+                  <a:lnTo>
+                    <a:pt x="2475992" y="2478876"/>
+                  </a:lnTo>
+                  <a:lnTo>
+                    <a:pt x="2546540" y="2479202"/>
+                  </a:lnTo>
+                  <a:lnTo>
+                    <a:pt x="2617087" y="2479529"/>
+                  </a:lnTo>
+                  <a:lnTo>
+                    <a:pt x="2687634" y="2479855"/>
+                  </a:lnTo>
+                  <a:lnTo>
+                    <a:pt x="2758181" y="2480181"/>
+                  </a:lnTo>
+                  <a:lnTo>
+                    <a:pt x="2828728" y="2480507"/>
+                  </a:lnTo>
+                  <a:lnTo>
+                    <a:pt x="2899275" y="2480832"/>
+                  </a:lnTo>
+                  <a:lnTo>
+                    <a:pt x="2969823" y="2481158"/>
+                  </a:lnTo>
+                  <a:lnTo>
+                    <a:pt x="3040370" y="2481483"/>
+                  </a:lnTo>
+                  <a:lnTo>
+                    <a:pt x="3110917" y="2481808"/>
+                  </a:lnTo>
+                  <a:lnTo>
+                    <a:pt x="3181464" y="2482134"/>
+                  </a:lnTo>
+                  <a:lnTo>
+                    <a:pt x="3252011" y="2482459"/>
+                  </a:lnTo>
+                  <a:lnTo>
+                    <a:pt x="3322559" y="2482784"/>
+                  </a:lnTo>
+                  <a:lnTo>
+                    <a:pt x="3393106" y="2483108"/>
+                  </a:lnTo>
+                  <a:lnTo>
+                    <a:pt x="3463653" y="2483433"/>
+                  </a:lnTo>
+                  <a:lnTo>
+                    <a:pt x="3534200" y="2483757"/>
+                  </a:lnTo>
+                  <a:lnTo>
+                    <a:pt x="3604747" y="2484082"/>
+                  </a:lnTo>
+                  <a:lnTo>
+                    <a:pt x="3675294" y="2484406"/>
+                  </a:lnTo>
+                  <a:lnTo>
+                    <a:pt x="3745842" y="2484730"/>
+                  </a:lnTo>
+                  <a:lnTo>
+                    <a:pt x="3816389" y="2485054"/>
+                  </a:lnTo>
+                  <a:lnTo>
+                    <a:pt x="3886936" y="2485378"/>
+                  </a:lnTo>
+                  <a:lnTo>
+                    <a:pt x="3957483" y="2485701"/>
                   </a:lnTo>
                 </a:path>
               </a:pathLst>
@@ -3709,309 +3706,309 @@
           </p:nvSpPr>
           <p:spPr>
             <a:xfrm>
-              <a:off x="1172049" y="4703393"/>
-              <a:ext cx="7090630" cy="705456"/>
+              <a:off x="1264853" y="4662156"/>
+              <a:ext cx="6984170" cy="658002"/>
             </a:xfrm>
             <a:custGeom>
               <a:avLst/>
               <a:pathLst>
-                <a:path w="7090630" h="705456">
+                <a:path w="6984170" h="658002">
                   <a:moveTo>
-                    <a:pt x="7090630" y="705456"/>
+                    <a:pt x="6984170" y="658002"/>
                   </a:moveTo>
                   <a:lnTo>
-                    <a:pt x="7019007" y="696868"/>
-                  </a:lnTo>
-                  <a:lnTo>
-                    <a:pt x="6947385" y="687783"/>
-                  </a:lnTo>
-                  <a:lnTo>
-                    <a:pt x="6875762" y="678173"/>
-                  </a:lnTo>
-                  <a:lnTo>
-                    <a:pt x="6804139" y="668006"/>
-                  </a:lnTo>
-                  <a:lnTo>
-                    <a:pt x="6732517" y="657251"/>
-                  </a:lnTo>
-                  <a:lnTo>
-                    <a:pt x="6660894" y="645874"/>
-                  </a:lnTo>
-                  <a:lnTo>
-                    <a:pt x="6589272" y="633838"/>
-                  </a:lnTo>
-                  <a:lnTo>
-                    <a:pt x="6517649" y="621106"/>
-                  </a:lnTo>
-                  <a:lnTo>
-                    <a:pt x="6446027" y="607637"/>
-                  </a:lnTo>
-                  <a:lnTo>
-                    <a:pt x="6374404" y="593389"/>
-                  </a:lnTo>
-                  <a:lnTo>
-                    <a:pt x="6302782" y="578316"/>
-                  </a:lnTo>
-                  <a:lnTo>
-                    <a:pt x="6231159" y="562371"/>
-                  </a:lnTo>
-                  <a:lnTo>
-                    <a:pt x="6159537" y="545503"/>
-                  </a:lnTo>
-                  <a:lnTo>
-                    <a:pt x="6087914" y="527659"/>
-                  </a:lnTo>
-                  <a:lnTo>
-                    <a:pt x="6016292" y="508782"/>
-                  </a:lnTo>
-                  <a:lnTo>
-                    <a:pt x="5944669" y="488813"/>
-                  </a:lnTo>
-                  <a:lnTo>
-                    <a:pt x="5873047" y="467688"/>
-                  </a:lnTo>
-                  <a:lnTo>
-                    <a:pt x="5801424" y="445341"/>
-                  </a:lnTo>
-                  <a:lnTo>
-                    <a:pt x="5729802" y="421701"/>
-                  </a:lnTo>
-                  <a:lnTo>
-                    <a:pt x="5658179" y="396693"/>
-                  </a:lnTo>
-                  <a:lnTo>
-                    <a:pt x="5586557" y="370237"/>
-                  </a:lnTo>
-                  <a:lnTo>
-                    <a:pt x="5514934" y="342251"/>
-                  </a:lnTo>
-                  <a:lnTo>
-                    <a:pt x="5443311" y="312645"/>
-                  </a:lnTo>
-                  <a:lnTo>
-                    <a:pt x="5371689" y="281326"/>
-                  </a:lnTo>
-                  <a:lnTo>
-                    <a:pt x="5300066" y="248194"/>
-                  </a:lnTo>
-                  <a:lnTo>
-                    <a:pt x="5228444" y="213145"/>
-                  </a:lnTo>
-                  <a:lnTo>
-                    <a:pt x="5156821" y="176068"/>
-                  </a:lnTo>
-                  <a:lnTo>
-                    <a:pt x="5085199" y="136845"/>
-                  </a:lnTo>
-                  <a:lnTo>
-                    <a:pt x="5013576" y="95353"/>
-                  </a:lnTo>
-                  <a:lnTo>
-                    <a:pt x="4941954" y="51459"/>
-                  </a:lnTo>
-                  <a:lnTo>
-                    <a:pt x="4870331" y="24248"/>
-                  </a:lnTo>
-                  <a:lnTo>
-                    <a:pt x="4798709" y="23897"/>
-                  </a:lnTo>
-                  <a:lnTo>
-                    <a:pt x="4727086" y="23545"/>
-                  </a:lnTo>
-                  <a:lnTo>
-                    <a:pt x="4655464" y="23193"/>
-                  </a:lnTo>
-                  <a:lnTo>
-                    <a:pt x="4583841" y="22841"/>
-                  </a:lnTo>
-                  <a:lnTo>
-                    <a:pt x="4512219" y="22489"/>
-                  </a:lnTo>
-                  <a:lnTo>
-                    <a:pt x="4440596" y="22137"/>
-                  </a:lnTo>
-                  <a:lnTo>
-                    <a:pt x="4368974" y="21784"/>
-                  </a:lnTo>
-                  <a:lnTo>
-                    <a:pt x="4297351" y="21431"/>
-                  </a:lnTo>
-                  <a:lnTo>
-                    <a:pt x="4225729" y="21079"/>
-                  </a:lnTo>
-                  <a:lnTo>
-                    <a:pt x="4154106" y="20726"/>
-                  </a:lnTo>
-                  <a:lnTo>
-                    <a:pt x="4082483" y="20373"/>
-                  </a:lnTo>
-                  <a:lnTo>
-                    <a:pt x="4010861" y="20020"/>
-                  </a:lnTo>
-                  <a:lnTo>
-                    <a:pt x="3939238" y="19666"/>
-                  </a:lnTo>
-                  <a:lnTo>
-                    <a:pt x="3867616" y="19313"/>
-                  </a:lnTo>
-                  <a:lnTo>
-                    <a:pt x="3795993" y="18959"/>
-                  </a:lnTo>
-                  <a:lnTo>
-                    <a:pt x="3724371" y="18605"/>
-                  </a:lnTo>
-                  <a:lnTo>
-                    <a:pt x="3652748" y="18251"/>
-                  </a:lnTo>
-                  <a:lnTo>
-                    <a:pt x="3581126" y="17897"/>
-                  </a:lnTo>
-                  <a:lnTo>
-                    <a:pt x="3509503" y="17543"/>
-                  </a:lnTo>
-                  <a:lnTo>
-                    <a:pt x="3437881" y="17189"/>
-                  </a:lnTo>
-                  <a:lnTo>
-                    <a:pt x="3366258" y="16834"/>
-                  </a:lnTo>
-                  <a:lnTo>
-                    <a:pt x="3294636" y="16479"/>
-                  </a:lnTo>
-                  <a:lnTo>
-                    <a:pt x="3223013" y="16124"/>
-                  </a:lnTo>
-                  <a:lnTo>
-                    <a:pt x="3151391" y="15769"/>
-                  </a:lnTo>
-                  <a:lnTo>
-                    <a:pt x="3079768" y="15414"/>
-                  </a:lnTo>
-                  <a:lnTo>
-                    <a:pt x="3008146" y="15059"/>
-                  </a:lnTo>
-                  <a:lnTo>
-                    <a:pt x="2936523" y="14704"/>
-                  </a:lnTo>
-                  <a:lnTo>
-                    <a:pt x="2864901" y="14348"/>
-                  </a:lnTo>
-                  <a:lnTo>
-                    <a:pt x="2793278" y="13992"/>
-                  </a:lnTo>
-                  <a:lnTo>
-                    <a:pt x="2721655" y="13636"/>
-                  </a:lnTo>
-                  <a:lnTo>
-                    <a:pt x="2650033" y="13280"/>
-                  </a:lnTo>
-                  <a:lnTo>
-                    <a:pt x="2578410" y="12924"/>
-                  </a:lnTo>
-                  <a:lnTo>
-                    <a:pt x="2506788" y="12568"/>
-                  </a:lnTo>
-                  <a:lnTo>
-                    <a:pt x="2435165" y="12211"/>
-                  </a:lnTo>
-                  <a:lnTo>
-                    <a:pt x="2363543" y="11854"/>
-                  </a:lnTo>
-                  <a:lnTo>
-                    <a:pt x="2291920" y="11498"/>
-                  </a:lnTo>
-                  <a:lnTo>
-                    <a:pt x="2220298" y="11141"/>
-                  </a:lnTo>
-                  <a:lnTo>
-                    <a:pt x="2148675" y="10784"/>
-                  </a:lnTo>
-                  <a:lnTo>
-                    <a:pt x="2077053" y="10426"/>
-                  </a:lnTo>
-                  <a:lnTo>
-                    <a:pt x="2005430" y="10069"/>
-                  </a:lnTo>
-                  <a:lnTo>
-                    <a:pt x="1933808" y="9711"/>
-                  </a:lnTo>
-                  <a:lnTo>
-                    <a:pt x="1862185" y="9354"/>
-                  </a:lnTo>
-                  <a:lnTo>
-                    <a:pt x="1790563" y="8996"/>
-                  </a:lnTo>
-                  <a:lnTo>
-                    <a:pt x="1718940" y="8638"/>
-                  </a:lnTo>
-                  <a:lnTo>
-                    <a:pt x="1647318" y="8280"/>
-                  </a:lnTo>
-                  <a:lnTo>
-                    <a:pt x="1575695" y="7921"/>
-                  </a:lnTo>
-                  <a:lnTo>
-                    <a:pt x="1504073" y="7563"/>
-                  </a:lnTo>
-                  <a:lnTo>
-                    <a:pt x="1432450" y="7204"/>
-                  </a:lnTo>
-                  <a:lnTo>
-                    <a:pt x="1360827" y="6845"/>
-                  </a:lnTo>
-                  <a:lnTo>
-                    <a:pt x="1289205" y="6486"/>
-                  </a:lnTo>
-                  <a:lnTo>
-                    <a:pt x="1217582" y="6127"/>
-                  </a:lnTo>
-                  <a:lnTo>
-                    <a:pt x="1145960" y="5768"/>
-                  </a:lnTo>
-                  <a:lnTo>
-                    <a:pt x="1074337" y="5409"/>
-                  </a:lnTo>
-                  <a:lnTo>
-                    <a:pt x="1002715" y="5049"/>
-                  </a:lnTo>
-                  <a:lnTo>
-                    <a:pt x="931092" y="4689"/>
-                  </a:lnTo>
-                  <a:lnTo>
-                    <a:pt x="859470" y="4330"/>
-                  </a:lnTo>
-                  <a:lnTo>
-                    <a:pt x="787847" y="3970"/>
-                  </a:lnTo>
-                  <a:lnTo>
-                    <a:pt x="716225" y="3609"/>
-                  </a:lnTo>
-                  <a:lnTo>
-                    <a:pt x="644602" y="3249"/>
-                  </a:lnTo>
-                  <a:lnTo>
-                    <a:pt x="572980" y="2889"/>
-                  </a:lnTo>
-                  <a:lnTo>
-                    <a:pt x="501357" y="2528"/>
-                  </a:lnTo>
-                  <a:lnTo>
-                    <a:pt x="429735" y="2167"/>
-                  </a:lnTo>
-                  <a:lnTo>
-                    <a:pt x="358112" y="1806"/>
-                  </a:lnTo>
-                  <a:lnTo>
-                    <a:pt x="286490" y="1445"/>
-                  </a:lnTo>
-                  <a:lnTo>
-                    <a:pt x="214867" y="1084"/>
-                  </a:lnTo>
-                  <a:lnTo>
-                    <a:pt x="143245" y="723"/>
-                  </a:lnTo>
-                  <a:lnTo>
-                    <a:pt x="71622" y="361"/>
+                    <a:pt x="6913622" y="649992"/>
+                  </a:lnTo>
+                  <a:lnTo>
+                    <a:pt x="6843075" y="641518"/>
+                  </a:lnTo>
+                  <a:lnTo>
+                    <a:pt x="6772528" y="632554"/>
+                  </a:lnTo>
+                  <a:lnTo>
+                    <a:pt x="6701981" y="623072"/>
+                  </a:lnTo>
+                  <a:lnTo>
+                    <a:pt x="6631434" y="613040"/>
+                  </a:lnTo>
+                  <a:lnTo>
+                    <a:pt x="6560887" y="602428"/>
+                  </a:lnTo>
+                  <a:lnTo>
+                    <a:pt x="6490339" y="591202"/>
+                  </a:lnTo>
+                  <a:lnTo>
+                    <a:pt x="6419792" y="579327"/>
+                  </a:lnTo>
+                  <a:lnTo>
+                    <a:pt x="6349245" y="566764"/>
+                  </a:lnTo>
+                  <a:lnTo>
+                    <a:pt x="6278698" y="553474"/>
+                  </a:lnTo>
+                  <a:lnTo>
+                    <a:pt x="6208151" y="539415"/>
+                  </a:lnTo>
+                  <a:lnTo>
+                    <a:pt x="6137604" y="524542"/>
+                  </a:lnTo>
+                  <a:lnTo>
+                    <a:pt x="6067056" y="508809"/>
+                  </a:lnTo>
+                  <a:lnTo>
+                    <a:pt x="5996509" y="492165"/>
+                  </a:lnTo>
+                  <a:lnTo>
+                    <a:pt x="5925962" y="474558"/>
+                  </a:lnTo>
+                  <a:lnTo>
+                    <a:pt x="5855415" y="455932"/>
+                  </a:lnTo>
+                  <a:lnTo>
+                    <a:pt x="5784868" y="436229"/>
+                  </a:lnTo>
+                  <a:lnTo>
+                    <a:pt x="5714320" y="415385"/>
+                  </a:lnTo>
+                  <a:lnTo>
+                    <a:pt x="5643773" y="393335"/>
+                  </a:lnTo>
+                  <a:lnTo>
+                    <a:pt x="5573226" y="370009"/>
+                  </a:lnTo>
+                  <a:lnTo>
+                    <a:pt x="5502679" y="345333"/>
+                  </a:lnTo>
+                  <a:lnTo>
+                    <a:pt x="5432132" y="319229"/>
+                  </a:lnTo>
+                  <a:lnTo>
+                    <a:pt x="5361585" y="291615"/>
+                  </a:lnTo>
+                  <a:lnTo>
+                    <a:pt x="5291037" y="262402"/>
+                  </a:lnTo>
+                  <a:lnTo>
+                    <a:pt x="5220490" y="231499"/>
+                  </a:lnTo>
+                  <a:lnTo>
+                    <a:pt x="5149943" y="198808"/>
+                  </a:lnTo>
+                  <a:lnTo>
+                    <a:pt x="5079396" y="164225"/>
+                  </a:lnTo>
+                  <a:lnTo>
+                    <a:pt x="5008849" y="127640"/>
+                  </a:lnTo>
+                  <a:lnTo>
+                    <a:pt x="4938302" y="88939"/>
+                  </a:lnTo>
+                  <a:lnTo>
+                    <a:pt x="4867754" y="47998"/>
+                  </a:lnTo>
+                  <a:lnTo>
+                    <a:pt x="4797207" y="22617"/>
+                  </a:lnTo>
+                  <a:lnTo>
+                    <a:pt x="4726660" y="22289"/>
+                  </a:lnTo>
+                  <a:lnTo>
+                    <a:pt x="4656113" y="21961"/>
+                  </a:lnTo>
+                  <a:lnTo>
+                    <a:pt x="4585566" y="21633"/>
+                  </a:lnTo>
+                  <a:lnTo>
+                    <a:pt x="4515019" y="21305"/>
+                  </a:lnTo>
+                  <a:lnTo>
+                    <a:pt x="4444471" y="20976"/>
+                  </a:lnTo>
+                  <a:lnTo>
+                    <a:pt x="4373924" y="20647"/>
+                  </a:lnTo>
+                  <a:lnTo>
+                    <a:pt x="4303377" y="20319"/>
+                  </a:lnTo>
+                  <a:lnTo>
+                    <a:pt x="4232830" y="19990"/>
+                  </a:lnTo>
+                  <a:lnTo>
+                    <a:pt x="4162283" y="19661"/>
+                  </a:lnTo>
+                  <a:lnTo>
+                    <a:pt x="4091736" y="19332"/>
+                  </a:lnTo>
+                  <a:lnTo>
+                    <a:pt x="4021188" y="19002"/>
+                  </a:lnTo>
+                  <a:lnTo>
+                    <a:pt x="3950641" y="18673"/>
+                  </a:lnTo>
+                  <a:lnTo>
+                    <a:pt x="3880094" y="18343"/>
+                  </a:lnTo>
+                  <a:lnTo>
+                    <a:pt x="3809547" y="18014"/>
+                  </a:lnTo>
+                  <a:lnTo>
+                    <a:pt x="3739000" y="17684"/>
+                  </a:lnTo>
+                  <a:lnTo>
+                    <a:pt x="3668452" y="17354"/>
+                  </a:lnTo>
+                  <a:lnTo>
+                    <a:pt x="3597905" y="17024"/>
+                  </a:lnTo>
+                  <a:lnTo>
+                    <a:pt x="3527358" y="16693"/>
+                  </a:lnTo>
+                  <a:lnTo>
+                    <a:pt x="3456811" y="16363"/>
+                  </a:lnTo>
+                  <a:lnTo>
+                    <a:pt x="3386264" y="16032"/>
+                  </a:lnTo>
+                  <a:lnTo>
+                    <a:pt x="3315717" y="15702"/>
+                  </a:lnTo>
+                  <a:lnTo>
+                    <a:pt x="3245169" y="15371"/>
+                  </a:lnTo>
+                  <a:lnTo>
+                    <a:pt x="3174622" y="15040"/>
+                  </a:lnTo>
+                  <a:lnTo>
+                    <a:pt x="3104075" y="14709"/>
+                  </a:lnTo>
+                  <a:lnTo>
+                    <a:pt x="3033528" y="14377"/>
+                  </a:lnTo>
+                  <a:lnTo>
+                    <a:pt x="2962981" y="14046"/>
+                  </a:lnTo>
+                  <a:lnTo>
+                    <a:pt x="2892434" y="13714"/>
+                  </a:lnTo>
+                  <a:lnTo>
+                    <a:pt x="2821886" y="13383"/>
+                  </a:lnTo>
+                  <a:lnTo>
+                    <a:pt x="2751339" y="13051"/>
+                  </a:lnTo>
+                  <a:lnTo>
+                    <a:pt x="2680792" y="12719"/>
+                  </a:lnTo>
+                  <a:lnTo>
+                    <a:pt x="2610245" y="12387"/>
+                  </a:lnTo>
+                  <a:lnTo>
+                    <a:pt x="2539698" y="12055"/>
+                  </a:lnTo>
+                  <a:lnTo>
+                    <a:pt x="2469151" y="11722"/>
+                  </a:lnTo>
+                  <a:lnTo>
+                    <a:pt x="2398603" y="11390"/>
+                  </a:lnTo>
+                  <a:lnTo>
+                    <a:pt x="2328056" y="11057"/>
+                  </a:lnTo>
+                  <a:lnTo>
+                    <a:pt x="2257509" y="10724"/>
+                  </a:lnTo>
+                  <a:lnTo>
+                    <a:pt x="2186962" y="10391"/>
+                  </a:lnTo>
+                  <a:lnTo>
+                    <a:pt x="2116415" y="10058"/>
+                  </a:lnTo>
+                  <a:lnTo>
+                    <a:pt x="2045868" y="9725"/>
+                  </a:lnTo>
+                  <a:lnTo>
+                    <a:pt x="1975320" y="9392"/>
+                  </a:lnTo>
+                  <a:lnTo>
+                    <a:pt x="1904773" y="9058"/>
+                  </a:lnTo>
+                  <a:lnTo>
+                    <a:pt x="1834226" y="8724"/>
+                  </a:lnTo>
+                  <a:lnTo>
+                    <a:pt x="1763679" y="8391"/>
+                  </a:lnTo>
+                  <a:lnTo>
+                    <a:pt x="1693132" y="8057"/>
+                  </a:lnTo>
+                  <a:lnTo>
+                    <a:pt x="1622584" y="7723"/>
+                  </a:lnTo>
+                  <a:lnTo>
+                    <a:pt x="1552037" y="7388"/>
+                  </a:lnTo>
+                  <a:lnTo>
+                    <a:pt x="1481490" y="7054"/>
+                  </a:lnTo>
+                  <a:lnTo>
+                    <a:pt x="1410943" y="6719"/>
+                  </a:lnTo>
+                  <a:lnTo>
+                    <a:pt x="1340396" y="6385"/>
+                  </a:lnTo>
+                  <a:lnTo>
+                    <a:pt x="1269849" y="6050"/>
+                  </a:lnTo>
+                  <a:lnTo>
+                    <a:pt x="1199301" y="5715"/>
+                  </a:lnTo>
+                  <a:lnTo>
+                    <a:pt x="1128754" y="5380"/>
+                  </a:lnTo>
+                  <a:lnTo>
+                    <a:pt x="1058207" y="5045"/>
+                  </a:lnTo>
+                  <a:lnTo>
+                    <a:pt x="987660" y="4709"/>
+                  </a:lnTo>
+                  <a:lnTo>
+                    <a:pt x="917113" y="4374"/>
+                  </a:lnTo>
+                  <a:lnTo>
+                    <a:pt x="846566" y="4038"/>
+                  </a:lnTo>
+                  <a:lnTo>
+                    <a:pt x="776018" y="3703"/>
+                  </a:lnTo>
+                  <a:lnTo>
+                    <a:pt x="705471" y="3367"/>
+                  </a:lnTo>
+                  <a:lnTo>
+                    <a:pt x="634924" y="3031"/>
+                  </a:lnTo>
+                  <a:lnTo>
+                    <a:pt x="564377" y="2694"/>
+                  </a:lnTo>
+                  <a:lnTo>
+                    <a:pt x="493830" y="2358"/>
+                  </a:lnTo>
+                  <a:lnTo>
+                    <a:pt x="423283" y="2021"/>
+                  </a:lnTo>
+                  <a:lnTo>
+                    <a:pt x="352735" y="1685"/>
+                  </a:lnTo>
+                  <a:lnTo>
+                    <a:pt x="282188" y="1348"/>
+                  </a:lnTo>
+                  <a:lnTo>
+                    <a:pt x="211641" y="1011"/>
+                  </a:lnTo>
+                  <a:lnTo>
+                    <a:pt x="141094" y="674"/>
+                  </a:lnTo>
+                  <a:lnTo>
+                    <a:pt x="70547" y="337"/>
                   </a:lnTo>
                   <a:lnTo>
                     <a:pt x="0" y="0"/>
@@ -4034,261 +4031,261 @@
           </p:nvSpPr>
           <p:spPr>
             <a:xfrm>
-              <a:off x="2445112" y="2073503"/>
-              <a:ext cx="5817567" cy="3135167"/>
+              <a:off x="2518802" y="2209169"/>
+              <a:ext cx="5730221" cy="2924276"/>
             </a:xfrm>
             <a:custGeom>
               <a:avLst/>
               <a:pathLst>
-                <a:path w="5817567" h="3135167">
+                <a:path w="5730221" h="2924276">
                   <a:moveTo>
                     <a:pt x="0" y="0"/>
                   </a:moveTo>
                   <a:lnTo>
-                    <a:pt x="16142" y="22425"/>
-                  </a:lnTo>
-                  <a:lnTo>
-                    <a:pt x="87765" y="119141"/>
-                  </a:lnTo>
-                  <a:lnTo>
-                    <a:pt x="159387" y="213156"/>
-                  </a:lnTo>
-                  <a:lnTo>
-                    <a:pt x="231010" y="304543"/>
-                  </a:lnTo>
-                  <a:lnTo>
-                    <a:pt x="302632" y="393377"/>
-                  </a:lnTo>
-                  <a:lnTo>
-                    <a:pt x="374255" y="479729"/>
-                  </a:lnTo>
-                  <a:lnTo>
-                    <a:pt x="445877" y="563668"/>
-                  </a:lnTo>
-                  <a:lnTo>
-                    <a:pt x="517500" y="645261"/>
-                  </a:lnTo>
-                  <a:lnTo>
-                    <a:pt x="589122" y="724574"/>
-                  </a:lnTo>
-                  <a:lnTo>
-                    <a:pt x="660745" y="801672"/>
-                  </a:lnTo>
-                  <a:lnTo>
-                    <a:pt x="732367" y="876615"/>
-                  </a:lnTo>
-                  <a:lnTo>
-                    <a:pt x="803990" y="949464"/>
-                  </a:lnTo>
-                  <a:lnTo>
-                    <a:pt x="875612" y="1020277"/>
-                  </a:lnTo>
-                  <a:lnTo>
-                    <a:pt x="947235" y="1089112"/>
-                  </a:lnTo>
-                  <a:lnTo>
-                    <a:pt x="1018857" y="1156023"/>
-                  </a:lnTo>
-                  <a:lnTo>
-                    <a:pt x="1090480" y="1221065"/>
-                  </a:lnTo>
-                  <a:lnTo>
-                    <a:pt x="1162102" y="1284289"/>
-                  </a:lnTo>
-                  <a:lnTo>
-                    <a:pt x="1233725" y="1345747"/>
-                  </a:lnTo>
-                  <a:lnTo>
-                    <a:pt x="1305348" y="1405487"/>
-                  </a:lnTo>
-                  <a:lnTo>
-                    <a:pt x="1376970" y="1463558"/>
-                  </a:lnTo>
-                  <a:lnTo>
-                    <a:pt x="1448593" y="1520007"/>
-                  </a:lnTo>
-                  <a:lnTo>
-                    <a:pt x="1520215" y="1574878"/>
-                  </a:lnTo>
-                  <a:lnTo>
-                    <a:pt x="1591838" y="1628216"/>
-                  </a:lnTo>
-                  <a:lnTo>
-                    <a:pt x="1663460" y="1680063"/>
-                  </a:lnTo>
-                  <a:lnTo>
-                    <a:pt x="1735083" y="1730462"/>
-                  </a:lnTo>
-                  <a:lnTo>
-                    <a:pt x="1806705" y="1779453"/>
-                  </a:lnTo>
-                  <a:lnTo>
-                    <a:pt x="1878328" y="1827075"/>
-                  </a:lnTo>
-                  <a:lnTo>
-                    <a:pt x="1949950" y="1873366"/>
-                  </a:lnTo>
-                  <a:lnTo>
-                    <a:pt x="2021573" y="1918363"/>
-                  </a:lnTo>
-                  <a:lnTo>
-                    <a:pt x="2093195" y="1962103"/>
-                  </a:lnTo>
-                  <a:lnTo>
-                    <a:pt x="2164818" y="2004621"/>
-                  </a:lnTo>
-                  <a:lnTo>
-                    <a:pt x="2236440" y="2045951"/>
-                  </a:lnTo>
-                  <a:lnTo>
-                    <a:pt x="2308063" y="2086126"/>
-                  </a:lnTo>
-                  <a:lnTo>
-                    <a:pt x="2379685" y="2125179"/>
-                  </a:lnTo>
-                  <a:lnTo>
-                    <a:pt x="2451308" y="2163140"/>
-                  </a:lnTo>
-                  <a:lnTo>
-                    <a:pt x="2522930" y="2200041"/>
-                  </a:lnTo>
-                  <a:lnTo>
-                    <a:pt x="2594553" y="2235911"/>
-                  </a:lnTo>
-                  <a:lnTo>
-                    <a:pt x="2666176" y="2270778"/>
-                  </a:lnTo>
-                  <a:lnTo>
-                    <a:pt x="2737798" y="2304671"/>
-                  </a:lnTo>
-                  <a:lnTo>
-                    <a:pt x="2809421" y="2337617"/>
-                  </a:lnTo>
-                  <a:lnTo>
-                    <a:pt x="2881043" y="2369642"/>
-                  </a:lnTo>
-                  <a:lnTo>
-                    <a:pt x="2952666" y="2400773"/>
-                  </a:lnTo>
-                  <a:lnTo>
-                    <a:pt x="3024288" y="2431033"/>
-                  </a:lnTo>
-                  <a:lnTo>
-                    <a:pt x="3095911" y="2460448"/>
-                  </a:lnTo>
-                  <a:lnTo>
-                    <a:pt x="3167533" y="2489042"/>
-                  </a:lnTo>
-                  <a:lnTo>
-                    <a:pt x="3239156" y="2516836"/>
-                  </a:lnTo>
-                  <a:lnTo>
-                    <a:pt x="3310778" y="2543853"/>
-                  </a:lnTo>
-                  <a:lnTo>
-                    <a:pt x="3382401" y="2570116"/>
-                  </a:lnTo>
-                  <a:lnTo>
-                    <a:pt x="3454023" y="2595645"/>
-                  </a:lnTo>
-                  <a:lnTo>
-                    <a:pt x="3525646" y="2620460"/>
-                  </a:lnTo>
-                  <a:lnTo>
-                    <a:pt x="3597268" y="2644582"/>
-                  </a:lnTo>
-                  <a:lnTo>
-                    <a:pt x="3668891" y="2668031"/>
-                  </a:lnTo>
-                  <a:lnTo>
-                    <a:pt x="3740513" y="2690823"/>
-                  </a:lnTo>
-                  <a:lnTo>
-                    <a:pt x="3812136" y="2712979"/>
-                  </a:lnTo>
-                  <a:lnTo>
-                    <a:pt x="3883758" y="2734516"/>
-                  </a:lnTo>
-                  <a:lnTo>
-                    <a:pt x="3955381" y="2755451"/>
-                  </a:lnTo>
-                  <a:lnTo>
-                    <a:pt x="4027004" y="2775802"/>
-                  </a:lnTo>
-                  <a:lnTo>
-                    <a:pt x="4098626" y="2795583"/>
-                  </a:lnTo>
-                  <a:lnTo>
-                    <a:pt x="4170249" y="2814812"/>
-                  </a:lnTo>
-                  <a:lnTo>
-                    <a:pt x="4241871" y="2833503"/>
-                  </a:lnTo>
-                  <a:lnTo>
-                    <a:pt x="4313494" y="2851673"/>
-                  </a:lnTo>
-                  <a:lnTo>
-                    <a:pt x="4385116" y="2869334"/>
-                  </a:lnTo>
-                  <a:lnTo>
-                    <a:pt x="4456739" y="2886502"/>
-                  </a:lnTo>
-                  <a:lnTo>
-                    <a:pt x="4528361" y="2903190"/>
-                  </a:lnTo>
-                  <a:lnTo>
-                    <a:pt x="4599984" y="2919412"/>
-                  </a:lnTo>
-                  <a:lnTo>
-                    <a:pt x="4671606" y="2935181"/>
-                  </a:lnTo>
-                  <a:lnTo>
-                    <a:pt x="4743229" y="2950509"/>
-                  </a:lnTo>
-                  <a:lnTo>
-                    <a:pt x="4814851" y="2965409"/>
-                  </a:lnTo>
-                  <a:lnTo>
-                    <a:pt x="4886474" y="2979893"/>
-                  </a:lnTo>
-                  <a:lnTo>
-                    <a:pt x="4958096" y="2993971"/>
-                  </a:lnTo>
-                  <a:lnTo>
-                    <a:pt x="5029719" y="3007657"/>
-                  </a:lnTo>
-                  <a:lnTo>
-                    <a:pt x="5101341" y="3020960"/>
-                  </a:lnTo>
-                  <a:lnTo>
-                    <a:pt x="5172964" y="3033891"/>
-                  </a:lnTo>
-                  <a:lnTo>
-                    <a:pt x="5244586" y="3046461"/>
-                  </a:lnTo>
-                  <a:lnTo>
-                    <a:pt x="5316209" y="3058680"/>
-                  </a:lnTo>
-                  <a:lnTo>
-                    <a:pt x="5387832" y="3070557"/>
-                  </a:lnTo>
-                  <a:lnTo>
-                    <a:pt x="5459454" y="3082102"/>
-                  </a:lnTo>
-                  <a:lnTo>
-                    <a:pt x="5531077" y="3093325"/>
-                  </a:lnTo>
-                  <a:lnTo>
-                    <a:pt x="5602699" y="3104234"/>
-                  </a:lnTo>
-                  <a:lnTo>
-                    <a:pt x="5674322" y="3114839"/>
-                  </a:lnTo>
-                  <a:lnTo>
-                    <a:pt x="5745944" y="3125147"/>
-                  </a:lnTo>
-                  <a:lnTo>
-                    <a:pt x="5817567" y="3135167"/>
+                    <a:pt x="15900" y="20916"/>
+                  </a:lnTo>
+                  <a:lnTo>
+                    <a:pt x="86447" y="111127"/>
+                  </a:lnTo>
+                  <a:lnTo>
+                    <a:pt x="156994" y="198818"/>
+                  </a:lnTo>
+                  <a:lnTo>
+                    <a:pt x="227541" y="284058"/>
+                  </a:lnTo>
+                  <a:lnTo>
+                    <a:pt x="298088" y="366916"/>
+                  </a:lnTo>
+                  <a:lnTo>
+                    <a:pt x="368636" y="447459"/>
+                  </a:lnTo>
+                  <a:lnTo>
+                    <a:pt x="439183" y="525752"/>
+                  </a:lnTo>
+                  <a:lnTo>
+                    <a:pt x="509730" y="601857"/>
+                  </a:lnTo>
+                  <a:lnTo>
+                    <a:pt x="580277" y="675835"/>
+                  </a:lnTo>
+                  <a:lnTo>
+                    <a:pt x="650824" y="747746"/>
+                  </a:lnTo>
+                  <a:lnTo>
+                    <a:pt x="721371" y="817648"/>
+                  </a:lnTo>
+                  <a:lnTo>
+                    <a:pt x="791919" y="885597"/>
+                  </a:lnTo>
+                  <a:lnTo>
+                    <a:pt x="862466" y="951647"/>
+                  </a:lnTo>
+                  <a:lnTo>
+                    <a:pt x="933013" y="1015851"/>
+                  </a:lnTo>
+                  <a:lnTo>
+                    <a:pt x="1003560" y="1078262"/>
+                  </a:lnTo>
+                  <a:lnTo>
+                    <a:pt x="1074107" y="1138928"/>
+                  </a:lnTo>
+                  <a:lnTo>
+                    <a:pt x="1144654" y="1197900"/>
+                  </a:lnTo>
+                  <a:lnTo>
+                    <a:pt x="1215202" y="1255223"/>
+                  </a:lnTo>
+                  <a:lnTo>
+                    <a:pt x="1285749" y="1310945"/>
+                  </a:lnTo>
+                  <a:lnTo>
+                    <a:pt x="1356296" y="1365110"/>
+                  </a:lnTo>
+                  <a:lnTo>
+                    <a:pt x="1426843" y="1417761"/>
+                  </a:lnTo>
+                  <a:lnTo>
+                    <a:pt x="1497390" y="1468942"/>
+                  </a:lnTo>
+                  <a:lnTo>
+                    <a:pt x="1567937" y="1518692"/>
+                  </a:lnTo>
+                  <a:lnTo>
+                    <a:pt x="1638485" y="1567052"/>
+                  </a:lnTo>
+                  <a:lnTo>
+                    <a:pt x="1709032" y="1614060"/>
+                  </a:lnTo>
+                  <a:lnTo>
+                    <a:pt x="1779579" y="1659756"/>
+                  </a:lnTo>
+                  <a:lnTo>
+                    <a:pt x="1850126" y="1704174"/>
+                  </a:lnTo>
+                  <a:lnTo>
+                    <a:pt x="1920673" y="1747351"/>
+                  </a:lnTo>
+                  <a:lnTo>
+                    <a:pt x="1991221" y="1789322"/>
+                  </a:lnTo>
+                  <a:lnTo>
+                    <a:pt x="2061768" y="1830120"/>
+                  </a:lnTo>
+                  <a:lnTo>
+                    <a:pt x="2132315" y="1869778"/>
+                  </a:lnTo>
+                  <a:lnTo>
+                    <a:pt x="2202862" y="1908328"/>
+                  </a:lnTo>
+                  <a:lnTo>
+                    <a:pt x="2273409" y="1945800"/>
+                  </a:lnTo>
+                  <a:lnTo>
+                    <a:pt x="2343956" y="1982226"/>
+                  </a:lnTo>
+                  <a:lnTo>
+                    <a:pt x="2414504" y="2017634"/>
+                  </a:lnTo>
+                  <a:lnTo>
+                    <a:pt x="2485051" y="2052052"/>
+                  </a:lnTo>
+                  <a:lnTo>
+                    <a:pt x="2555598" y="2085509"/>
+                  </a:lnTo>
+                  <a:lnTo>
+                    <a:pt x="2626145" y="2118031"/>
+                  </a:lnTo>
+                  <a:lnTo>
+                    <a:pt x="2696692" y="2149644"/>
+                  </a:lnTo>
+                  <a:lnTo>
+                    <a:pt x="2767239" y="2180374"/>
+                  </a:lnTo>
+                  <a:lnTo>
+                    <a:pt x="2837787" y="2210245"/>
+                  </a:lnTo>
+                  <a:lnTo>
+                    <a:pt x="2908334" y="2239281"/>
+                  </a:lnTo>
+                  <a:lnTo>
+                    <a:pt x="2978881" y="2267507"/>
+                  </a:lnTo>
+                  <a:lnTo>
+                    <a:pt x="3049428" y="2294943"/>
+                  </a:lnTo>
+                  <a:lnTo>
+                    <a:pt x="3119975" y="2321613"/>
+                  </a:lnTo>
+                  <a:lnTo>
+                    <a:pt x="3190522" y="2347537"/>
+                  </a:lnTo>
+                  <a:lnTo>
+                    <a:pt x="3261070" y="2372738"/>
+                  </a:lnTo>
+                  <a:lnTo>
+                    <a:pt x="3331617" y="2397234"/>
+                  </a:lnTo>
+                  <a:lnTo>
+                    <a:pt x="3402164" y="2421045"/>
+                  </a:lnTo>
+                  <a:lnTo>
+                    <a:pt x="3472711" y="2444192"/>
+                  </a:lnTo>
+                  <a:lnTo>
+                    <a:pt x="3543258" y="2466691"/>
+                  </a:lnTo>
+                  <a:lnTo>
+                    <a:pt x="3613805" y="2488562"/>
+                  </a:lnTo>
+                  <a:lnTo>
+                    <a:pt x="3684353" y="2509822"/>
+                  </a:lnTo>
+                  <a:lnTo>
+                    <a:pt x="3754900" y="2530487"/>
+                  </a:lnTo>
+                  <a:lnTo>
+                    <a:pt x="3825447" y="2550575"/>
+                  </a:lnTo>
+                  <a:lnTo>
+                    <a:pt x="3895994" y="2570102"/>
+                  </a:lnTo>
+                  <a:lnTo>
+                    <a:pt x="3966541" y="2589084"/>
+                  </a:lnTo>
+                  <a:lnTo>
+                    <a:pt x="4037089" y="2607534"/>
+                  </a:lnTo>
+                  <a:lnTo>
+                    <a:pt x="4107636" y="2625470"/>
+                  </a:lnTo>
+                  <a:lnTo>
+                    <a:pt x="4178183" y="2642904"/>
+                  </a:lnTo>
+                  <a:lnTo>
+                    <a:pt x="4248730" y="2659851"/>
+                  </a:lnTo>
+                  <a:lnTo>
+                    <a:pt x="4319277" y="2676325"/>
+                  </a:lnTo>
+                  <a:lnTo>
+                    <a:pt x="4389824" y="2692338"/>
+                  </a:lnTo>
+                  <a:lnTo>
+                    <a:pt x="4460372" y="2707903"/>
+                  </a:lnTo>
+                  <a:lnTo>
+                    <a:pt x="4530919" y="2723034"/>
+                  </a:lnTo>
+                  <a:lnTo>
+                    <a:pt x="4601466" y="2737742"/>
+                  </a:lnTo>
+                  <a:lnTo>
+                    <a:pt x="4672013" y="2752039"/>
+                  </a:lnTo>
+                  <a:lnTo>
+                    <a:pt x="4742560" y="2765937"/>
+                  </a:lnTo>
+                  <a:lnTo>
+                    <a:pt x="4813107" y="2779446"/>
+                  </a:lnTo>
+                  <a:lnTo>
+                    <a:pt x="4883655" y="2792578"/>
+                  </a:lnTo>
+                  <a:lnTo>
+                    <a:pt x="4954202" y="2805343"/>
+                  </a:lnTo>
+                  <a:lnTo>
+                    <a:pt x="5024749" y="2817751"/>
+                  </a:lnTo>
+                  <a:lnTo>
+                    <a:pt x="5095296" y="2829812"/>
+                  </a:lnTo>
+                  <a:lnTo>
+                    <a:pt x="5165843" y="2841537"/>
+                  </a:lnTo>
+                  <a:lnTo>
+                    <a:pt x="5236390" y="2852933"/>
+                  </a:lnTo>
+                  <a:lnTo>
+                    <a:pt x="5306938" y="2864012"/>
+                  </a:lnTo>
+                  <a:lnTo>
+                    <a:pt x="5377485" y="2874781"/>
+                  </a:lnTo>
+                  <a:lnTo>
+                    <a:pt x="5448032" y="2885249"/>
+                  </a:lnTo>
+                  <a:lnTo>
+                    <a:pt x="5518579" y="2895424"/>
+                  </a:lnTo>
+                  <a:lnTo>
+                    <a:pt x="5589126" y="2905315"/>
+                  </a:lnTo>
+                  <a:lnTo>
+                    <a:pt x="5659673" y="2914930"/>
+                  </a:lnTo>
+                  <a:lnTo>
+                    <a:pt x="5730221" y="2924276"/>
                   </a:lnTo>
                 </a:path>
               </a:pathLst>
@@ -4317,21 +4314,21 @@
           </p:nvSpPr>
           <p:spPr>
             <a:xfrm>
-              <a:off x="817517" y="4727786"/>
-              <a:ext cx="7799693" cy="0"/>
+              <a:off x="915645" y="4684908"/>
+              <a:ext cx="7682587" cy="0"/>
             </a:xfrm>
             <a:custGeom>
               <a:avLst/>
               <a:pathLst>
-                <a:path w="7799693" h="0">
+                <a:path w="7682587" h="0">
                   <a:moveTo>
                     <a:pt x="0" y="0"/>
                   </a:moveTo>
                   <a:lnTo>
-                    <a:pt x="7799693" y="0"/>
-                  </a:lnTo>
-                  <a:lnTo>
-                    <a:pt x="7799693" y="0"/>
+                    <a:pt x="7682587" y="0"/>
+                  </a:lnTo>
+                  <a:lnTo>
+                    <a:pt x="7682587" y="0"/>
                   </a:lnTo>
                 </a:path>
               </a:pathLst>
@@ -4360,15 +4357,15 @@
           </p:nvSpPr>
           <p:spPr>
             <a:xfrm>
-              <a:off x="6071765" y="2073503"/>
-              <a:ext cx="0" cy="3649639"/>
+              <a:off x="6091004" y="2209169"/>
+              <a:ext cx="0" cy="3404141"/>
             </a:xfrm>
             <a:custGeom>
               <a:avLst/>
               <a:pathLst>
-                <a:path w="0" h="3649639">
+                <a:path w="0" h="3404141">
                   <a:moveTo>
-                    <a:pt x="0" y="3649639"/>
+                    <a:pt x="0" y="3404141"/>
                   </a:moveTo>
                   <a:lnTo>
                     <a:pt x="0" y="0"/>
@@ -4403,15 +4400,15 @@
           </p:nvSpPr>
           <p:spPr>
             <a:xfrm>
-              <a:off x="5051213" y="2073503"/>
-              <a:ext cx="0" cy="3649639"/>
+              <a:off x="5085775" y="2209169"/>
+              <a:ext cx="0" cy="3404141"/>
             </a:xfrm>
             <a:custGeom>
               <a:avLst/>
               <a:pathLst>
-                <a:path w="0" h="3649639">
+                <a:path w="0" h="3404141">
                   <a:moveTo>
-                    <a:pt x="0" y="3649639"/>
+                    <a:pt x="0" y="3404141"/>
                   </a:moveTo>
                   <a:lnTo>
                     <a:pt x="0" y="0"/>
@@ -4446,15 +4443,15 @@
           </p:nvSpPr>
           <p:spPr>
             <a:xfrm>
-              <a:off x="6733531" y="2073503"/>
-              <a:ext cx="0" cy="3649639"/>
+              <a:off x="6742834" y="2209169"/>
+              <a:ext cx="0" cy="3404141"/>
             </a:xfrm>
             <a:custGeom>
               <a:avLst/>
               <a:pathLst>
-                <a:path w="0" h="3649639">
+                <a:path w="0" h="3404141">
                   <a:moveTo>
-                    <a:pt x="0" y="3649639"/>
+                    <a:pt x="0" y="3404141"/>
                   </a:moveTo>
                   <a:lnTo>
                     <a:pt x="0" y="0"/>
@@ -4489,8 +4486,8 @@
           </p:nvSpPr>
           <p:spPr>
             <a:xfrm>
-              <a:off x="692708" y="5517199"/>
-              <a:ext cx="62179" cy="80101"/>
+              <a:off x="756929" y="5407599"/>
+              <a:ext cx="79004" cy="101955"/>
             </a:xfrm>
             <a:prstGeom prst="rect">
               <a:avLst/>
@@ -4503,7 +4500,7 @@
             <a:p>
               <a:pPr algn="l" marL="0" marR="0" indent="0">
                 <a:lnSpc>
-                  <a:spcPts val="880"/>
+                  <a:spcPts val="1120"/>
                 </a:lnSpc>
                 <a:spcBef>
                   <a:spcPts val="0"/>
@@ -4513,7 +4510,7 @@
                 </a:spcAft>
               </a:pPr>
               <a:r>
-                <a:rPr sz="880">
+                <a:rPr sz="1120">
                   <a:solidFill>
                     <a:srgbClr val="4D4D4D">
                       <a:alpha val="100000"/>
@@ -4535,8 +4532,8 @@
           </p:nvSpPr>
           <p:spPr>
             <a:xfrm>
-              <a:off x="692708" y="4687735"/>
-              <a:ext cx="62179" cy="80101"/>
+              <a:off x="756929" y="4633931"/>
+              <a:ext cx="79004" cy="101955"/>
             </a:xfrm>
             <a:prstGeom prst="rect">
               <a:avLst/>
@@ -4549,7 +4546,7 @@
             <a:p>
               <a:pPr algn="l" marL="0" marR="0" indent="0">
                 <a:lnSpc>
-                  <a:spcPts val="880"/>
+                  <a:spcPts val="1120"/>
                 </a:lnSpc>
                 <a:spcBef>
                   <a:spcPts val="0"/>
@@ -4559,7 +4556,7 @@
                 </a:spcAft>
               </a:pPr>
               <a:r>
-                <a:rPr sz="880">
+                <a:rPr sz="1120">
                   <a:solidFill>
                     <a:srgbClr val="4D4D4D">
                       <a:alpha val="100000"/>
@@ -4581,8 +4578,8 @@
           </p:nvSpPr>
           <p:spPr>
             <a:xfrm>
-              <a:off x="692708" y="3858272"/>
-              <a:ext cx="62179" cy="80101"/>
+              <a:off x="756929" y="3860262"/>
+              <a:ext cx="79004" cy="101955"/>
             </a:xfrm>
             <a:prstGeom prst="rect">
               <a:avLst/>
@@ -4595,7 +4592,7 @@
             <a:p>
               <a:pPr algn="l" marL="0" marR="0" indent="0">
                 <a:lnSpc>
-                  <a:spcPts val="880"/>
+                  <a:spcPts val="1120"/>
                 </a:lnSpc>
                 <a:spcBef>
                   <a:spcPts val="0"/>
@@ -4605,7 +4602,7 @@
                 </a:spcAft>
               </a:pPr>
               <a:r>
-                <a:rPr sz="880">
+                <a:rPr sz="1120">
                   <a:solidFill>
                     <a:srgbClr val="4D4D4D">
                       <a:alpha val="100000"/>
@@ -4627,8 +4624,8 @@
           </p:nvSpPr>
           <p:spPr>
             <a:xfrm>
-              <a:off x="692708" y="3028808"/>
-              <a:ext cx="62179" cy="80101"/>
+              <a:off x="756929" y="3086593"/>
+              <a:ext cx="79004" cy="101955"/>
             </a:xfrm>
             <a:prstGeom prst="rect">
               <a:avLst/>
@@ -4641,7 +4638,7 @@
             <a:p>
               <a:pPr algn="l" marL="0" marR="0" indent="0">
                 <a:lnSpc>
-                  <a:spcPts val="880"/>
+                  <a:spcPts val="1120"/>
                 </a:lnSpc>
                 <a:spcBef>
                   <a:spcPts val="0"/>
@@ -4651,7 +4648,7 @@
                 </a:spcAft>
               </a:pPr>
               <a:r>
-                <a:rPr sz="880">
+                <a:rPr sz="1120">
                   <a:solidFill>
                     <a:srgbClr val="4D4D4D">
                       <a:alpha val="100000"/>
@@ -4673,8 +4670,8 @@
           </p:nvSpPr>
           <p:spPr>
             <a:xfrm>
-              <a:off x="692708" y="2199345"/>
-              <a:ext cx="62179" cy="80101"/>
+              <a:off x="756929" y="2312925"/>
+              <a:ext cx="79004" cy="101955"/>
             </a:xfrm>
             <a:prstGeom prst="rect">
               <a:avLst/>
@@ -4687,7 +4684,7 @@
             <a:p>
               <a:pPr algn="l" marL="0" marR="0" indent="0">
                 <a:lnSpc>
-                  <a:spcPts val="880"/>
+                  <a:spcPts val="1120"/>
                 </a:lnSpc>
                 <a:spcBef>
                   <a:spcPts val="0"/>
@@ -4697,7 +4694,7 @@
                 </a:spcAft>
               </a:pPr>
               <a:r>
-                <a:rPr sz="880">
+                <a:rPr sz="1120">
                   <a:solidFill>
                     <a:srgbClr val="4D4D4D">
                       <a:alpha val="100000"/>
@@ -4719,8 +4716,8 @@
           </p:nvSpPr>
           <p:spPr>
             <a:xfrm>
-              <a:off x="2331636" y="5785772"/>
-              <a:ext cx="161574" cy="80101"/>
+              <a:off x="2383963" y="5693022"/>
+              <a:ext cx="205282" cy="101955"/>
             </a:xfrm>
             <a:prstGeom prst="rect">
               <a:avLst/>
@@ -4733,7 +4730,7 @@
             <a:p>
               <a:pPr algn="l" marL="0" marR="0" indent="0">
                 <a:lnSpc>
-                  <a:spcPts val="880"/>
+                  <a:spcPts val="1120"/>
                 </a:lnSpc>
                 <a:spcBef>
                   <a:spcPts val="0"/>
@@ -4743,7 +4740,7 @@
                 </a:spcAft>
               </a:pPr>
               <a:r>
-                <a:rPr sz="880">
+                <a:rPr sz="1120">
                   <a:solidFill>
                     <a:srgbClr val="4D4D4D">
                       <a:alpha val="100000"/>
@@ -4765,8 +4762,8 @@
           </p:nvSpPr>
           <p:spPr>
             <a:xfrm>
-              <a:off x="4181509" y="5785772"/>
-              <a:ext cx="161574" cy="80101"/>
+              <a:off x="4206062" y="5693022"/>
+              <a:ext cx="205282" cy="101955"/>
             </a:xfrm>
             <a:prstGeom prst="rect">
               <a:avLst/>
@@ -4779,7 +4776,7 @@
             <a:p>
               <a:pPr algn="l" marL="0" marR="0" indent="0">
                 <a:lnSpc>
-                  <a:spcPts val="880"/>
+                  <a:spcPts val="1120"/>
                 </a:lnSpc>
                 <a:spcBef>
                   <a:spcPts val="0"/>
@@ -4789,7 +4786,7 @@
                 </a:spcAft>
               </a:pPr>
               <a:r>
-                <a:rPr sz="880">
+                <a:rPr sz="1120">
                   <a:solidFill>
                     <a:srgbClr val="4D4D4D">
                       <a:alpha val="100000"/>
@@ -4811,8 +4808,8 @@
           </p:nvSpPr>
           <p:spPr>
             <a:xfrm>
-              <a:off x="6081080" y="5785772"/>
-              <a:ext cx="62179" cy="80101"/>
+              <a:off x="6091300" y="5693022"/>
+              <a:ext cx="79004" cy="101955"/>
             </a:xfrm>
             <a:prstGeom prst="rect">
               <a:avLst/>
@@ -4825,7 +4822,7 @@
             <a:p>
               <a:pPr algn="l" marL="0" marR="0" indent="0">
                 <a:lnSpc>
-                  <a:spcPts val="880"/>
+                  <a:spcPts val="1120"/>
                 </a:lnSpc>
                 <a:spcBef>
                   <a:spcPts val="0"/>
@@ -4835,7 +4832,7 @@
                 </a:spcAft>
               </a:pPr>
               <a:r>
-                <a:rPr sz="880">
+                <a:rPr sz="1120">
                   <a:solidFill>
                     <a:srgbClr val="4D4D4D">
                       <a:alpha val="100000"/>
@@ -4857,8 +4854,8 @@
           </p:nvSpPr>
           <p:spPr>
             <a:xfrm>
-              <a:off x="7899863" y="5785772"/>
-              <a:ext cx="124358" cy="80101"/>
+              <a:off x="7873896" y="5693022"/>
+              <a:ext cx="158008" cy="101955"/>
             </a:xfrm>
             <a:prstGeom prst="rect">
               <a:avLst/>
@@ -4871,7 +4868,7 @@
             <a:p>
               <a:pPr algn="l" marL="0" marR="0" indent="0">
                 <a:lnSpc>
-                  <a:spcPts val="880"/>
+                  <a:spcPts val="1120"/>
                 </a:lnSpc>
                 <a:spcBef>
                   <a:spcPts val="0"/>
@@ -4881,7 +4878,7 @@
                 </a:spcAft>
               </a:pPr>
               <a:r>
-                <a:rPr sz="880">
+                <a:rPr sz="1120">
                   <a:solidFill>
                     <a:srgbClr val="4D4D4D">
                       <a:alpha val="100000"/>
@@ -4903,8 +4900,8 @@
           </p:nvSpPr>
           <p:spPr>
             <a:xfrm>
-              <a:off x="3832408" y="5925448"/>
-              <a:ext cx="1769912" cy="100218"/>
+              <a:off x="3630809" y="5870717"/>
+              <a:ext cx="2252258" cy="127558"/>
             </a:xfrm>
             <a:prstGeom prst="rect">
               <a:avLst/>
@@ -4917,7 +4914,7 @@
             <a:p>
               <a:pPr algn="l" marL="0" marR="0" indent="0">
                 <a:lnSpc>
-                  <a:spcPts val="1100"/>
+                  <a:spcPts val="1400"/>
                 </a:lnSpc>
                 <a:spcBef>
                   <a:spcPts val="0"/>
@@ -4927,7 +4924,7 @@
                 </a:spcAft>
               </a:pPr>
               <a:r>
-                <a:rPr sz="1100">
+                <a:rPr sz="1400">
                   <a:solidFill>
                     <a:srgbClr val="000000">
                       <a:alpha val="100000"/>
@@ -4949,8 +4946,8 @@
           </p:nvSpPr>
           <p:spPr>
             <a:xfrm rot="-5400000">
-              <a:off x="68446" y="3848213"/>
-              <a:ext cx="1016904" cy="100218"/>
+              <a:off x="-37527" y="3847460"/>
+              <a:ext cx="1294150" cy="127558"/>
             </a:xfrm>
             <a:prstGeom prst="rect">
               <a:avLst/>
@@ -4963,7 +4960,7 @@
             <a:p>
               <a:pPr algn="l" marL="0" marR="0" indent="0">
                 <a:lnSpc>
-                  <a:spcPts val="1100"/>
+                  <a:spcPts val="1400"/>
                 </a:lnSpc>
                 <a:spcBef>
                   <a:spcPts val="0"/>
@@ -4973,7 +4970,7 @@
                 </a:spcAft>
               </a:pPr>
               <a:r>
-                <a:rPr sz="1100">
+                <a:rPr sz="1400">
                   <a:solidFill>
                     <a:srgbClr val="000000">
                       <a:alpha val="100000"/>
@@ -4995,8 +4992,8 @@
           </p:nvSpPr>
           <p:spPr>
             <a:xfrm>
-              <a:off x="817517" y="1896563"/>
-              <a:ext cx="5413065" cy="82021"/>
+              <a:off x="915645" y="1977589"/>
+              <a:ext cx="7220102" cy="109362"/>
             </a:xfrm>
             <a:prstGeom prst="rect">
               <a:avLst/>
@@ -5009,7 +5006,7 @@
             <a:p>
               <a:pPr algn="l" marL="0" marR="0" indent="0">
                 <a:lnSpc>
-                  <a:spcPts val="900"/>
+                  <a:spcPts val="1200"/>
                 </a:lnSpc>
                 <a:spcBef>
                   <a:spcPts val="0"/>
@@ -5019,7 +5016,7 @@
                 </a:spcAft>
               </a:pPr>
               <a:r>
-                <a:rPr sz="900">
+                <a:rPr sz="1200">
                   <a:solidFill>
                     <a:srgbClr val="404040">
                       <a:alpha val="100000"/>
@@ -5041,8 +5038,8 @@
           </p:nvSpPr>
           <p:spPr>
             <a:xfrm>
-              <a:off x="817517" y="1669789"/>
-              <a:ext cx="3435949" cy="120152"/>
+              <a:off x="915645" y="1688767"/>
+              <a:ext cx="4374032" cy="153070"/>
             </a:xfrm>
             <a:prstGeom prst="rect">
               <a:avLst/>
@@ -5055,7 +5052,7 @@
             <a:p>
               <a:pPr algn="l" marL="0" marR="0" indent="0">
                 <a:lnSpc>
-                  <a:spcPts val="1320"/>
+                  <a:spcPts val="1680"/>
                 </a:lnSpc>
                 <a:spcBef>
                   <a:spcPts val="0"/>
@@ -5065,7 +5062,7 @@
                 </a:spcAft>
               </a:pPr>
               <a:r>
-                <a:rPr sz="1320">
+                <a:rPr sz="1680">
                   <a:solidFill>
                     <a:srgbClr val="000000">
                       <a:alpha val="100000"/>
